--- a/Demo Project/presentation.pptx
+++ b/Demo Project/presentation.pptx
@@ -518,7 +518,7 @@
           <a:lstStyle/>
           <a:p>
             <a:r>
-              <a:t>Welcome everyone. Today I'll present our AI-powered agentic test automation system for OME.</a:t>
+              <a:t>Welcome to the presentation of our AI-powered agentic test automation system for OME.</a:t>
             </a:r>
           </a:p>
         </p:txBody>
@@ -1148,7 +1148,7 @@
           <a:lstStyle/>
           <a:p>
             <a:r>
-              <a:t>Our system uses multiple AI agents to automate the entire test lifecycle.</a:t>
+              <a:t>Our system uses multiple specialized AI agents working together.</a:t>
             </a:r>
           </a:p>
         </p:txBody>
@@ -1218,7 +1218,7 @@
           <a:lstStyle/>
           <a:p>
             <a:r>
-              <a:t>We're addressing the fundamental problem of manual test creation in complex systems like OME.</a:t>
+              <a:t>We're addressing the fundamental problem of manual test creation.</a:t>
             </a:r>
           </a:p>
         </p:txBody>
@@ -1428,7 +1428,7 @@
           <a:lstStyle/>
           <a:p>
             <a:r>
-              <a:t>The multi-agent architecture allows specialized agents to handle different aspects of test automation.</a:t>
+              <a:t>The multi-agent architecture allows specialized agents to handle different aspects.</a:t>
             </a:r>
           </a:p>
         </p:txBody>
@@ -1568,7 +1568,7 @@
           <a:lstStyle/>
           <a:p>
             <a:r>
-              <a:t>The test generation process transforms natural language descriptions into executable code.</a:t>
+              <a:t>The test generation process transforms natural language into executable code.</a:t>
             </a:r>
           </a:p>
         </p:txBody>
@@ -4646,14 +4646,65 @@
       <p:grpSpPr/>
       <p:sp>
         <p:nvSpPr>
-          <p:cNvPr id="2" name="TextBox 1"/>
+          <p:cNvPr id="2" name="Rectangle 1"/>
+          <p:cNvSpPr/>
+          <p:nvPr/>
+        </p:nvSpPr>
+        <p:spPr>
+          <a:xfrm>
+            <a:off x="0" y="0"/>
+            <a:ext cx="9144000" cy="1371600"/>
+          </a:xfrm>
+          <a:prstGeom prst="rect">
+            <a:avLst/>
+          </a:prstGeom>
+          <a:solidFill>
+            <a:srgbClr val="2C3E50"/>
+          </a:solidFill>
+          <a:ln>
+            <a:solidFill>
+              <a:srgbClr val="000000"/>
+            </a:solidFill>
+          </a:ln>
+        </p:spPr>
+        <p:style>
+          <a:lnRef idx="1">
+            <a:schemeClr val="accent1"/>
+          </a:lnRef>
+          <a:fillRef idx="3">
+            <a:schemeClr val="accent1"/>
+          </a:fillRef>
+          <a:effectRef idx="2">
+            <a:schemeClr val="accent1"/>
+          </a:effectRef>
+          <a:fontRef idx="minor">
+            <a:schemeClr val="lt1"/>
+          </a:fontRef>
+        </p:style>
+        <p:txBody>
+          <a:bodyPr rtlCol="0" anchor="ctr"/>
+          <a:lstStyle/>
+          <a:p>
+            <a:pPr algn="ctr">
+              <a:defRPr sz="1600">
+                <a:solidFill>
+                  <a:srgbClr val="FFFFFF"/>
+                </a:solidFill>
+              </a:defRPr>
+            </a:pPr>
+          </a:p>
+        </p:txBody>
+      </p:sp>
+      <p:sp>
+        <p:nvSpPr>
+          <p:cNvPr id="3" name="TextBox 2"/>
           <p:cNvSpPr txBox="1"/>
           <p:nvPr/>
         </p:nvSpPr>
         <p:spPr>
           <a:xfrm>
-            <a:off x="457200" y="914400"/>
-            <a:ext cx="8229600" cy="914400"/>
+            <a:off x="457200" y="274320"/>
+            <a:ext cx="8229600" cy="731520"/>
           </a:xfrm>
           <a:prstGeom prst="rect">
             <a:avLst/>
@@ -4667,9 +4718,9 @@
           <a:lstStyle/>
           <a:p>
             <a:pPr algn="ctr">
-              <a:defRPr sz="3600" b="1">
-                <a:solidFill>
-                  <a:srgbClr val="2C3E50"/>
+              <a:defRPr sz="4000" b="1">
+                <a:solidFill>
+                  <a:srgbClr val="FFFFFF"/>
                 </a:solidFill>
               </a:defRPr>
             </a:pPr>
@@ -4681,14 +4732,14 @@
       </p:sp>
       <p:sp>
         <p:nvSpPr>
-          <p:cNvPr id="3" name="TextBox 2"/>
+          <p:cNvPr id="4" name="TextBox 3"/>
           <p:cNvSpPr txBox="1"/>
           <p:nvPr/>
         </p:nvSpPr>
         <p:spPr>
           <a:xfrm>
-            <a:off x="457200" y="2011680"/>
-            <a:ext cx="8229600" cy="548640"/>
+            <a:off x="457200" y="914400"/>
+            <a:ext cx="8229600" cy="365760"/>
           </a:xfrm>
           <a:prstGeom prst="rect">
             <a:avLst/>
@@ -4704,7 +4755,7 @@
             <a:pPr algn="ctr">
               <a:defRPr sz="2400">
                 <a:solidFill>
-                  <a:srgbClr val="34495E"/>
+                  <a:srgbClr val="16A085"/>
                 </a:solidFill>
               </a:defRPr>
             </a:pPr>
@@ -4716,30 +4767,49 @@
       </p:sp>
       <p:sp>
         <p:nvSpPr>
-          <p:cNvPr id="4" name="TextBox 3"/>
-          <p:cNvSpPr txBox="1"/>
+          <p:cNvPr id="5" name="Rectangle 4"/>
+          <p:cNvSpPr/>
           <p:nvPr/>
         </p:nvSpPr>
         <p:spPr>
           <a:xfrm>
-            <a:off x="2743200" y="3657600"/>
-            <a:ext cx="3657600" cy="1371600"/>
+            <a:off x="2286000" y="2286000"/>
+            <a:ext cx="4572000" cy="1371600"/>
           </a:xfrm>
           <a:prstGeom prst="rect">
             <a:avLst/>
           </a:prstGeom>
-          <a:noFill/>
-        </p:spPr>
-        <p:txBody>
-          <a:bodyPr wrap="square">
-            <a:spAutoFit/>
-          </a:bodyPr>
-          <a:lstStyle/>
-          <a:p>
-            <a:pPr>
-              <a:defRPr sz="1800">
-                <a:solidFill>
-                  <a:srgbClr val="34495E"/>
+          <a:solidFill>
+            <a:srgbClr val="16A085"/>
+          </a:solidFill>
+          <a:ln>
+            <a:solidFill>
+              <a:srgbClr val="000000"/>
+            </a:solidFill>
+          </a:ln>
+        </p:spPr>
+        <p:style>
+          <a:lnRef idx="1">
+            <a:schemeClr val="accent1"/>
+          </a:lnRef>
+          <a:fillRef idx="3">
+            <a:schemeClr val="accent1"/>
+          </a:fillRef>
+          <a:effectRef idx="2">
+            <a:schemeClr val="accent1"/>
+          </a:effectRef>
+          <a:fontRef idx="minor">
+            <a:schemeClr val="lt1"/>
+          </a:fontRef>
+        </p:style>
+        <p:txBody>
+          <a:bodyPr rtlCol="0" anchor="ctr"/>
+          <a:lstStyle/>
+          <a:p>
+            <a:pPr algn="ctr">
+              <a:defRPr sz="1600">
+                <a:solidFill>
+                  <a:srgbClr val="FFFFFF"/>
                 </a:solidFill>
               </a:defRPr>
             </a:pPr>
@@ -4755,6 +4825,114 @@
           <a:p>
             <a:r>
               <a:t>M.Tech Final Semester Project</a:t>
+            </a:r>
+          </a:p>
+        </p:txBody>
+      </p:sp>
+      <p:sp>
+        <p:nvSpPr>
+          <p:cNvPr id="6" name="Oval 5"/>
+          <p:cNvSpPr/>
+          <p:nvPr/>
+        </p:nvSpPr>
+        <p:spPr>
+          <a:xfrm>
+            <a:off x="457200" y="4114800"/>
+            <a:ext cx="914400" cy="914400"/>
+          </a:xfrm>
+          <a:prstGeom prst="ellipse">
+            <a:avLst/>
+          </a:prstGeom>
+          <a:solidFill>
+            <a:srgbClr val="2C3E50"/>
+          </a:solidFill>
+          <a:ln>
+            <a:solidFill>
+              <a:srgbClr val="000000"/>
+            </a:solidFill>
+          </a:ln>
+        </p:spPr>
+        <p:style>
+          <a:lnRef idx="1">
+            <a:schemeClr val="accent1"/>
+          </a:lnRef>
+          <a:fillRef idx="3">
+            <a:schemeClr val="accent1"/>
+          </a:fillRef>
+          <a:effectRef idx="2">
+            <a:schemeClr val="accent1"/>
+          </a:effectRef>
+          <a:fontRef idx="minor">
+            <a:schemeClr val="lt1"/>
+          </a:fontRef>
+        </p:style>
+        <p:txBody>
+          <a:bodyPr rtlCol="0" anchor="ctr"/>
+          <a:lstStyle/>
+          <a:p>
+            <a:pPr algn="ctr">
+              <a:defRPr sz="3600">
+                <a:solidFill>
+                  <a:srgbClr val="FFFFFF"/>
+                </a:solidFill>
+              </a:defRPr>
+            </a:pPr>
+            <a:r>
+              <a:t>AI</a:t>
+            </a:r>
+          </a:p>
+        </p:txBody>
+      </p:sp>
+      <p:sp>
+        <p:nvSpPr>
+          <p:cNvPr id="7" name="Oval 6"/>
+          <p:cNvSpPr/>
+          <p:nvPr/>
+        </p:nvSpPr>
+        <p:spPr>
+          <a:xfrm>
+            <a:off x="7772400" y="4114800"/>
+            <a:ext cx="914400" cy="914400"/>
+          </a:xfrm>
+          <a:prstGeom prst="ellipse">
+            <a:avLst/>
+          </a:prstGeom>
+          <a:solidFill>
+            <a:srgbClr val="16A085"/>
+          </a:solidFill>
+          <a:ln>
+            <a:solidFill>
+              <a:srgbClr val="000000"/>
+            </a:solidFill>
+          </a:ln>
+        </p:spPr>
+        <p:style>
+          <a:lnRef idx="1">
+            <a:schemeClr val="accent1"/>
+          </a:lnRef>
+          <a:fillRef idx="3">
+            <a:schemeClr val="accent1"/>
+          </a:fillRef>
+          <a:effectRef idx="2">
+            <a:schemeClr val="accent1"/>
+          </a:effectRef>
+          <a:fontRef idx="minor">
+            <a:schemeClr val="lt1"/>
+          </a:fontRef>
+        </p:style>
+        <p:txBody>
+          <a:bodyPr rtlCol="0" anchor="ctr"/>
+          <a:lstStyle/>
+          <a:p>
+            <a:pPr algn="ctr">
+              <a:defRPr sz="3600">
+                <a:solidFill>
+                  <a:srgbClr val="FFFFFF"/>
+                </a:solidFill>
+              </a:defRPr>
+            </a:pPr>
+            <a:r>
+              <a:t>ML</a:t>
             </a:r>
           </a:p>
         </p:txBody>
@@ -4779,14 +4957,65 @@
       <p:grpSpPr/>
       <p:sp>
         <p:nvSpPr>
-          <p:cNvPr id="2" name="TextBox 1"/>
+          <p:cNvPr id="2" name="Rectangle 1"/>
+          <p:cNvSpPr/>
+          <p:nvPr/>
+        </p:nvSpPr>
+        <p:spPr>
+          <a:xfrm>
+            <a:off x="0" y="0"/>
+            <a:ext cx="9144000" cy="914400"/>
+          </a:xfrm>
+          <a:prstGeom prst="rect">
+            <a:avLst/>
+          </a:prstGeom>
+          <a:solidFill>
+            <a:srgbClr val="2C3E50"/>
+          </a:solidFill>
+          <a:ln>
+            <a:solidFill>
+              <a:srgbClr val="000000"/>
+            </a:solidFill>
+          </a:ln>
+        </p:spPr>
+        <p:style>
+          <a:lnRef idx="1">
+            <a:schemeClr val="accent1"/>
+          </a:lnRef>
+          <a:fillRef idx="3">
+            <a:schemeClr val="accent1"/>
+          </a:fillRef>
+          <a:effectRef idx="2">
+            <a:schemeClr val="accent1"/>
+          </a:effectRef>
+          <a:fontRef idx="minor">
+            <a:schemeClr val="lt1"/>
+          </a:fontRef>
+        </p:style>
+        <p:txBody>
+          <a:bodyPr rtlCol="0" anchor="ctr"/>
+          <a:lstStyle/>
+          <a:p>
+            <a:pPr algn="ctr">
+              <a:defRPr sz="1600">
+                <a:solidFill>
+                  <a:srgbClr val="FFFFFF"/>
+                </a:solidFill>
+              </a:defRPr>
+            </a:pPr>
+          </a:p>
+        </p:txBody>
+      </p:sp>
+      <p:sp>
+        <p:nvSpPr>
+          <p:cNvPr id="3" name="TextBox 2"/>
           <p:cNvSpPr txBox="1"/>
           <p:nvPr/>
         </p:nvSpPr>
         <p:spPr>
           <a:xfrm>
-            <a:off x="457200" y="457200"/>
-            <a:ext cx="8229600" cy="731520"/>
+            <a:off x="457200" y="182880"/>
+            <a:ext cx="8229600" cy="548640"/>
           </a:xfrm>
           <a:prstGeom prst="rect">
             <a:avLst/>
@@ -4799,196 +5028,350 @@
           </a:bodyPr>
           <a:lstStyle/>
           <a:p>
+            <a:pPr>
+              <a:defRPr sz="3200" b="1">
+                <a:solidFill>
+                  <a:srgbClr val="FFFFFF"/>
+                </a:solidFill>
+              </a:defRPr>
+            </a:pPr>
+            <a:r>
+              <a:t>Demo: Test Generation</a:t>
+            </a:r>
+          </a:p>
+        </p:txBody>
+      </p:sp>
+      <p:sp>
+        <p:nvSpPr>
+          <p:cNvPr id="4" name="Rectangle 3"/>
+          <p:cNvSpPr/>
+          <p:nvPr/>
+        </p:nvSpPr>
+        <p:spPr>
+          <a:xfrm>
+            <a:off x="457200" y="1097280"/>
+            <a:ext cx="4114800" cy="731520"/>
+          </a:xfrm>
+          <a:prstGeom prst="rect">
+            <a:avLst/>
+          </a:prstGeom>
+          <a:solidFill>
+            <a:srgbClr val="E6FFE6"/>
+          </a:solidFill>
+          <a:ln>
+            <a:solidFill>
+              <a:srgbClr val="000000"/>
+            </a:solidFill>
+          </a:ln>
+        </p:spPr>
+        <p:style>
+          <a:lnRef idx="1">
+            <a:schemeClr val="accent1"/>
+          </a:lnRef>
+          <a:fillRef idx="3">
+            <a:schemeClr val="accent1"/>
+          </a:fillRef>
+          <a:effectRef idx="2">
+            <a:schemeClr val="accent1"/>
+          </a:effectRef>
+          <a:fontRef idx="minor">
+            <a:schemeClr val="lt1"/>
+          </a:fontRef>
+        </p:style>
+        <p:txBody>
+          <a:bodyPr rtlCol="0" anchor="ctr"/>
+          <a:lstStyle/>
+          <a:p>
             <a:pPr algn="ctr">
-              <a:defRPr sz="3600" b="1">
-                <a:solidFill>
-                  <a:srgbClr val="2C3E50"/>
+              <a:defRPr sz="1600">
+                <a:solidFill>
+                  <a:srgbClr val="27AE60"/>
                 </a:solidFill>
               </a:defRPr>
             </a:pPr>
             <a:r>
-              <a:t>Demo: Test Generation</a:t>
-            </a:r>
-          </a:p>
-        </p:txBody>
-      </p:sp>
-      <p:sp>
-        <p:nvSpPr>
-          <p:cNvPr id="3" name="TextBox 2"/>
-          <p:cNvSpPr txBox="1"/>
+              <a:t>Command: py regenerate_tests.py</a:t>
+            </a:r>
+          </a:p>
+        </p:txBody>
+      </p:sp>
+      <p:sp>
+        <p:nvSpPr>
+          <p:cNvPr id="5" name="Rectangle 4"/>
+          <p:cNvSpPr/>
           <p:nvPr/>
         </p:nvSpPr>
         <p:spPr>
           <a:xfrm>
-            <a:off x="457200" y="1371600"/>
-            <a:ext cx="3657600" cy="2286000"/>
+            <a:off x="4572000" y="1097280"/>
+            <a:ext cx="4114800" cy="731520"/>
           </a:xfrm>
           <a:prstGeom prst="rect">
             <a:avLst/>
           </a:prstGeom>
-          <a:noFill/>
-        </p:spPr>
-        <p:txBody>
-          <a:bodyPr wrap="square">
-            <a:spAutoFit/>
-          </a:bodyPr>
-          <a:lstStyle/>
-          <a:p>
-            <a:pPr>
-              <a:defRPr sz="1800">
+          <a:solidFill>
+            <a:srgbClr val="E6FFE6"/>
+          </a:solidFill>
+          <a:ln>
+            <a:solidFill>
+              <a:srgbClr val="000000"/>
+            </a:solidFill>
+          </a:ln>
+        </p:spPr>
+        <p:style>
+          <a:lnRef idx="1">
+            <a:schemeClr val="accent1"/>
+          </a:lnRef>
+          <a:fillRef idx="3">
+            <a:schemeClr val="accent1"/>
+          </a:fillRef>
+          <a:effectRef idx="2">
+            <a:schemeClr val="accent1"/>
+          </a:effectRef>
+          <a:fontRef idx="minor">
+            <a:schemeClr val="lt1"/>
+          </a:fontRef>
+        </p:style>
+        <p:txBody>
+          <a:bodyPr rtlCol="0" anchor="ctr"/>
+          <a:lstStyle/>
+          <a:p>
+            <a:pPr algn="ctr">
+              <a:defRPr sz="1600">
+                <a:solidFill>
+                  <a:srgbClr val="27AE60"/>
+                </a:solidFill>
+              </a:defRPr>
+            </a:pPr>
+            <a:r>
+              <a:t>Results: 10/10 generated • &lt;5s • 100% success</a:t>
+            </a:r>
+          </a:p>
+        </p:txBody>
+      </p:sp>
+      <p:sp>
+        <p:nvSpPr>
+          <p:cNvPr id="6" name="Rectangle 5"/>
+          <p:cNvSpPr/>
+          <p:nvPr/>
+        </p:nvSpPr>
+        <p:spPr>
+          <a:xfrm>
+            <a:off x="457200" y="2011680"/>
+            <a:ext cx="4114800" cy="1371600"/>
+          </a:xfrm>
+          <a:prstGeom prst="rect">
+            <a:avLst/>
+          </a:prstGeom>
+          <a:solidFill>
+            <a:srgbClr val="ECF0F1"/>
+          </a:solidFill>
+          <a:ln>
+            <a:solidFill>
+              <a:srgbClr val="000000"/>
+            </a:solidFill>
+          </a:ln>
+        </p:spPr>
+        <p:style>
+          <a:lnRef idx="1">
+            <a:schemeClr val="accent1"/>
+          </a:lnRef>
+          <a:fillRef idx="3">
+            <a:schemeClr val="accent1"/>
+          </a:fillRef>
+          <a:effectRef idx="2">
+            <a:schemeClr val="accent1"/>
+          </a:effectRef>
+          <a:fontRef idx="minor">
+            <a:schemeClr val="lt1"/>
+          </a:fontRef>
+        </p:style>
+        <p:txBody>
+          <a:bodyPr rtlCol="0" anchor="ctr"/>
+          <a:lstStyle/>
+          <a:p>
+            <a:pPr algn="ctr">
+              <a:defRPr sz="1600">
                 <a:solidFill>
                   <a:srgbClr val="34495E"/>
                 </a:solidFill>
               </a:defRPr>
             </a:pPr>
             <a:r>
-              <a:t>Command: py regenerate_tests.py</a:t>
-            </a:r>
-          </a:p>
-          <a:p/>
-          <a:p>
-            <a:r>
-              <a:t>Results:</a:t>
-            </a:r>
-          </a:p>
-          <a:p>
-            <a:r>
-              <a:t>• Generated 10 test cases successfully</a:t>
-            </a:r>
-          </a:p>
-          <a:p>
-            <a:r>
-              <a:t>• Processing time: &lt;5 seconds</a:t>
-            </a:r>
-          </a:p>
-          <a:p>
-            <a:r>
-              <a:t>• Success rate: 100%</a:t>
-            </a:r>
-          </a:p>
-          <a:p>
-            <a:r>
-              <a:t>• Framework: Standalone (no Atlas)</a:t>
-            </a:r>
-          </a:p>
-        </p:txBody>
-      </p:sp>
-      <p:sp>
-        <p:nvSpPr>
-          <p:cNvPr id="4" name="TextBox 3"/>
-          <p:cNvSpPr txBox="1"/>
+              <a:t>Test Coverage:</a:t>
+            </a:r>
+          </a:p>
+          <a:p>
+            <a:r>
+              <a:t>• TC-001: Product creation</a:t>
+            </a:r>
+          </a:p>
+          <a:p>
+            <a:r>
+              <a:t>• TC-002: Product search</a:t>
+            </a:r>
+          </a:p>
+          <a:p>
+            <a:r>
+              <a:t>• TC-003: Category ops</a:t>
+            </a:r>
+          </a:p>
+          <a:p>
+            <a:r>
+              <a:t>• TC-004: Shopping cart</a:t>
+            </a:r>
+          </a:p>
+          <a:p>
+            <a:r>
+              <a:t>• TC-005: Order processing</a:t>
+            </a:r>
+          </a:p>
+          <a:p>
+            <a:r>
+              <a:t>• TC-006: User registration</a:t>
+            </a:r>
+          </a:p>
+          <a:p>
+            <a:r>
+              <a:t>• TC-007: Product updates</a:t>
+            </a:r>
+          </a:p>
+          <a:p>
+            <a:r>
+              <a:t>• TC-008: Inventory mgmt</a:t>
+            </a:r>
+          </a:p>
+          <a:p>
+            <a:r>
+              <a:t>• TC-009: Catalog sync</a:t>
+            </a:r>
+          </a:p>
+          <a:p>
+            <a:r>
+              <a:t>• TC-010: Regression</a:t>
+            </a:r>
+          </a:p>
+        </p:txBody>
+      </p:sp>
+      <p:sp>
+        <p:nvSpPr>
+          <p:cNvPr id="7" name="Rounded Rectangle 6"/>
+          <p:cNvSpPr/>
           <p:nvPr/>
         </p:nvSpPr>
         <p:spPr>
           <a:xfrm>
-            <a:off x="4572000" y="1371600"/>
-            <a:ext cx="4114800" cy="3200400"/>
-          </a:xfrm>
-          <a:prstGeom prst="rect">
-            <a:avLst/>
-          </a:prstGeom>
-          <a:noFill/>
-        </p:spPr>
-        <p:txBody>
-          <a:bodyPr wrap="square">
-            <a:spAutoFit/>
-          </a:bodyPr>
-          <a:lstStyle/>
-          <a:p>
-            <a:pPr>
-              <a:defRPr sz="1800">
-                <a:solidFill>
-                  <a:srgbClr val="16A085"/>
-                </a:solidFill>
-              </a:defRPr>
-            </a:pPr>
-            <a:r>
-              <a:t>Test Coverage:</a:t>
-            </a:r>
-          </a:p>
-          <a:p>
-            <a:r>
-              <a:t>• TC-001: Product creation</a:t>
-            </a:r>
-          </a:p>
-          <a:p>
-            <a:r>
-              <a:t>• TC-002: Product search</a:t>
-            </a:r>
-          </a:p>
-          <a:p>
-            <a:r>
-              <a:t>• TC-003: Category operations</a:t>
-            </a:r>
-          </a:p>
-          <a:p>
-            <a:r>
-              <a:t>• TC-004: Shopping cart</a:t>
-            </a:r>
-          </a:p>
-          <a:p>
-            <a:r>
-              <a:t>• TC-005: Order processing</a:t>
-            </a:r>
-          </a:p>
-          <a:p>
-            <a:r>
-              <a:t>• TC-006: User registration</a:t>
-            </a:r>
-          </a:p>
-          <a:p>
-            <a:r>
-              <a:t>• TC-007: Product updates</a:t>
-            </a:r>
-          </a:p>
-          <a:p>
-            <a:r>
-              <a:t>• TC-008: Inventory management</a:t>
-            </a:r>
-          </a:p>
-          <a:p>
-            <a:r>
-              <a:t>• TC-009: Catalog sync</a:t>
-            </a:r>
-          </a:p>
-          <a:p>
-            <a:r>
-              <a:t>• TC-010: Regression testing</a:t>
-            </a:r>
-          </a:p>
-        </p:txBody>
-      </p:sp>
-      <p:sp>
-        <p:nvSpPr>
-          <p:cNvPr id="5" name="TextBox 4"/>
-          <p:cNvSpPr txBox="1"/>
-          <p:nvPr/>
-        </p:nvSpPr>
-        <p:spPr>
-          <a:xfrm>
-            <a:off x="457200" y="3657600"/>
-            <a:ext cx="8229600" cy="2743200"/>
-          </a:xfrm>
-          <a:prstGeom prst="rect">
-            <a:avLst/>
-          </a:prstGeom>
-          <a:noFill/>
-        </p:spPr>
-        <p:txBody>
-          <a:bodyPr wrap="none">
-            <a:spAutoFit/>
-          </a:bodyPr>
+            <a:off x="4572000" y="2011680"/>
+            <a:ext cx="4114800" cy="1371600"/>
+          </a:xfrm>
+          <a:prstGeom prst="roundRect">
+            <a:avLst/>
+          </a:prstGeom>
+          <a:solidFill>
+            <a:srgbClr val="F0F0F0"/>
+          </a:solidFill>
+          <a:ln w="25400">
+            <a:solidFill>
+              <a:srgbClr val="646464"/>
+            </a:solidFill>
+          </a:ln>
+        </p:spPr>
+        <p:style>
+          <a:lnRef idx="1">
+            <a:schemeClr val="accent1"/>
+          </a:lnRef>
+          <a:fillRef idx="3">
+            <a:schemeClr val="accent1"/>
+          </a:fillRef>
+          <a:effectRef idx="2">
+            <a:schemeClr val="accent1"/>
+          </a:effectRef>
+          <a:fontRef idx="minor">
+            <a:schemeClr val="lt1"/>
+          </a:fontRef>
+        </p:style>
+        <p:txBody>
+          <a:bodyPr rtlCol="0" anchor="ctr"/>
           <a:lstStyle/>
           <a:p>
             <a:pPr algn="ctr">
               <a:defRPr sz="1400" i="1">
                 <a:solidFill>
-                  <a:srgbClr val="969696"/>
+                  <a:srgbClr val="505050"/>
                 </a:solidFill>
               </a:defRPr>
             </a:pPr>
             <a:r>
-              <a:t>[INSERT SCREENSHOT: Test Generation Console Output]</a:t>
+              <a:t>[INSERT SCREENSHOT]</a:t>
+            </a:r>
+          </a:p>
+          <a:p>
+            <a:r>
+              <a:t>Test Generation Console Output</a:t>
+            </a:r>
+          </a:p>
+          <a:p>
+            <a:r>
+              <a:t>(Run: py regenerate_tests.py)</a:t>
+            </a:r>
+          </a:p>
+        </p:txBody>
+      </p:sp>
+      <p:sp>
+        <p:nvSpPr>
+          <p:cNvPr id="8" name="Rounded Rectangle 7"/>
+          <p:cNvSpPr/>
+          <p:nvPr/>
+        </p:nvSpPr>
+        <p:spPr>
+          <a:xfrm>
+            <a:off x="457200" y="3474720"/>
+            <a:ext cx="8229600" cy="3108960"/>
+          </a:xfrm>
+          <a:prstGeom prst="roundRect">
+            <a:avLst/>
+          </a:prstGeom>
+          <a:solidFill>
+            <a:srgbClr val="F0F0F0"/>
+          </a:solidFill>
+          <a:ln w="25400">
+            <a:solidFill>
+              <a:srgbClr val="646464"/>
+            </a:solidFill>
+          </a:ln>
+        </p:spPr>
+        <p:style>
+          <a:lnRef idx="1">
+            <a:schemeClr val="accent1"/>
+          </a:lnRef>
+          <a:fillRef idx="3">
+            <a:schemeClr val="accent1"/>
+          </a:fillRef>
+          <a:effectRef idx="2">
+            <a:schemeClr val="accent1"/>
+          </a:effectRef>
+          <a:fontRef idx="minor">
+            <a:schemeClr val="lt1"/>
+          </a:fontRef>
+        </p:style>
+        <p:txBody>
+          <a:bodyPr rtlCol="0" anchor="ctr"/>
+          <a:lstStyle/>
+          <a:p>
+            <a:pPr algn="ctr">
+              <a:defRPr sz="1400" i="1">
+                <a:solidFill>
+                  <a:srgbClr val="505050"/>
+                </a:solidFill>
+              </a:defRPr>
+            </a:pPr>
+            <a:r>
+              <a:t>[INSERT LARGE SCREENSHOT]</a:t>
+            </a:r>
+          </a:p>
+          <a:p>
+            <a:r>
+              <a:t>Full console output showing all 10 test generations</a:t>
             </a:r>
           </a:p>
         </p:txBody>
@@ -5013,14 +5396,65 @@
       <p:grpSpPr/>
       <p:sp>
         <p:nvSpPr>
-          <p:cNvPr id="2" name="TextBox 1"/>
+          <p:cNvPr id="2" name="Rectangle 1"/>
+          <p:cNvSpPr/>
+          <p:nvPr/>
+        </p:nvSpPr>
+        <p:spPr>
+          <a:xfrm>
+            <a:off x="0" y="0"/>
+            <a:ext cx="9144000" cy="914400"/>
+          </a:xfrm>
+          <a:prstGeom prst="rect">
+            <a:avLst/>
+          </a:prstGeom>
+          <a:solidFill>
+            <a:srgbClr val="2C3E50"/>
+          </a:solidFill>
+          <a:ln>
+            <a:solidFill>
+              <a:srgbClr val="000000"/>
+            </a:solidFill>
+          </a:ln>
+        </p:spPr>
+        <p:style>
+          <a:lnRef idx="1">
+            <a:schemeClr val="accent1"/>
+          </a:lnRef>
+          <a:fillRef idx="3">
+            <a:schemeClr val="accent1"/>
+          </a:fillRef>
+          <a:effectRef idx="2">
+            <a:schemeClr val="accent1"/>
+          </a:effectRef>
+          <a:fontRef idx="minor">
+            <a:schemeClr val="lt1"/>
+          </a:fontRef>
+        </p:style>
+        <p:txBody>
+          <a:bodyPr rtlCol="0" anchor="ctr"/>
+          <a:lstStyle/>
+          <a:p>
+            <a:pPr algn="ctr">
+              <a:defRPr sz="1600">
+                <a:solidFill>
+                  <a:srgbClr val="FFFFFF"/>
+                </a:solidFill>
+              </a:defRPr>
+            </a:pPr>
+          </a:p>
+        </p:txBody>
+      </p:sp>
+      <p:sp>
+        <p:nvSpPr>
+          <p:cNvPr id="3" name="TextBox 2"/>
           <p:cNvSpPr txBox="1"/>
           <p:nvPr/>
         </p:nvSpPr>
         <p:spPr>
           <a:xfrm>
-            <a:off x="457200" y="457200"/>
-            <a:ext cx="8229600" cy="731520"/>
+            <a:off x="457200" y="182880"/>
+            <a:ext cx="8229600" cy="548640"/>
           </a:xfrm>
           <a:prstGeom prst="rect">
             <a:avLst/>
@@ -5033,176 +5467,438 @@
           </a:bodyPr>
           <a:lstStyle/>
           <a:p>
+            <a:pPr>
+              <a:defRPr sz="3200" b="1">
+                <a:solidFill>
+                  <a:srgbClr val="FFFFFF"/>
+                </a:solidFill>
+              </a:defRPr>
+            </a:pPr>
+            <a:r>
+              <a:t>Demo: Test Execution</a:t>
+            </a:r>
+          </a:p>
+        </p:txBody>
+      </p:sp>
+      <p:sp>
+        <p:nvSpPr>
+          <p:cNvPr id="4" name="Rectangle 3"/>
+          <p:cNvSpPr/>
+          <p:nvPr/>
+        </p:nvSpPr>
+        <p:spPr>
+          <a:xfrm>
+            <a:off x="457200" y="1097280"/>
+            <a:ext cx="1828800" cy="731520"/>
+          </a:xfrm>
+          <a:prstGeom prst="rect">
+            <a:avLst/>
+          </a:prstGeom>
+          <a:solidFill>
+            <a:srgbClr val="E6FFE6"/>
+          </a:solidFill>
+          <a:ln>
+            <a:solidFill>
+              <a:srgbClr val="000000"/>
+            </a:solidFill>
+          </a:ln>
+        </p:spPr>
+        <p:style>
+          <a:lnRef idx="1">
+            <a:schemeClr val="accent1"/>
+          </a:lnRef>
+          <a:fillRef idx="3">
+            <a:schemeClr val="accent1"/>
+          </a:fillRef>
+          <a:effectRef idx="2">
+            <a:schemeClr val="accent1"/>
+          </a:effectRef>
+          <a:fontRef idx="minor">
+            <a:schemeClr val="lt1"/>
+          </a:fontRef>
+        </p:style>
+        <p:txBody>
+          <a:bodyPr rtlCol="0" anchor="ctr"/>
+          <a:lstStyle/>
+          <a:p>
             <a:pPr algn="ctr">
-              <a:defRPr sz="3600" b="1">
-                <a:solidFill>
-                  <a:srgbClr val="2C3E50"/>
+              <a:defRPr sz="1600">
+                <a:solidFill>
+                  <a:srgbClr val="27AE60"/>
                 </a:solidFill>
               </a:defRPr>
             </a:pPr>
             <a:r>
-              <a:t>Demo: Test Execution</a:t>
-            </a:r>
-          </a:p>
-        </p:txBody>
-      </p:sp>
-      <p:sp>
-        <p:nvSpPr>
-          <p:cNvPr id="3" name="TextBox 2"/>
-          <p:cNvSpPr txBox="1"/>
+              <a:t>Total: 10</a:t>
+            </a:r>
+          </a:p>
+        </p:txBody>
+      </p:sp>
+      <p:sp>
+        <p:nvSpPr>
+          <p:cNvPr id="5" name="Rectangle 4"/>
+          <p:cNvSpPr/>
           <p:nvPr/>
         </p:nvSpPr>
         <p:spPr>
           <a:xfrm>
-            <a:off x="457200" y="1371600"/>
-            <a:ext cx="3657600" cy="2286000"/>
+            <a:off x="2286000" y="1097280"/>
+            <a:ext cx="1828800" cy="731520"/>
           </a:xfrm>
           <a:prstGeom prst="rect">
             <a:avLst/>
           </a:prstGeom>
-          <a:noFill/>
-        </p:spPr>
-        <p:txBody>
-          <a:bodyPr wrap="square">
-            <a:spAutoFit/>
-          </a:bodyPr>
-          <a:lstStyle/>
-          <a:p>
-            <a:pPr>
-              <a:defRPr sz="1800">
+          <a:solidFill>
+            <a:srgbClr val="E6FFE6"/>
+          </a:solidFill>
+          <a:ln>
+            <a:solidFill>
+              <a:srgbClr val="000000"/>
+            </a:solidFill>
+          </a:ln>
+        </p:spPr>
+        <p:style>
+          <a:lnRef idx="1">
+            <a:schemeClr val="accent1"/>
+          </a:lnRef>
+          <a:fillRef idx="3">
+            <a:schemeClr val="accent1"/>
+          </a:fillRef>
+          <a:effectRef idx="2">
+            <a:schemeClr val="accent1"/>
+          </a:effectRef>
+          <a:fontRef idx="minor">
+            <a:schemeClr val="lt1"/>
+          </a:fontRef>
+        </p:style>
+        <p:txBody>
+          <a:bodyPr rtlCol="0" anchor="ctr"/>
+          <a:lstStyle/>
+          <a:p>
+            <a:pPr algn="ctr">
+              <a:defRPr sz="1600">
+                <a:solidFill>
+                  <a:srgbClr val="27AE60"/>
+                </a:solidFill>
+              </a:defRPr>
+            </a:pPr>
+            <a:r>
+              <a:t>Passed: 10</a:t>
+            </a:r>
+          </a:p>
+        </p:txBody>
+      </p:sp>
+      <p:sp>
+        <p:nvSpPr>
+          <p:cNvPr id="6" name="Rectangle 5"/>
+          <p:cNvSpPr/>
+          <p:nvPr/>
+        </p:nvSpPr>
+        <p:spPr>
+          <a:xfrm>
+            <a:off x="4114800" y="1097280"/>
+            <a:ext cx="1828800" cy="731520"/>
+          </a:xfrm>
+          <a:prstGeom prst="rect">
+            <a:avLst/>
+          </a:prstGeom>
+          <a:solidFill>
+            <a:srgbClr val="E6FFE6"/>
+          </a:solidFill>
+          <a:ln>
+            <a:solidFill>
+              <a:srgbClr val="000000"/>
+            </a:solidFill>
+          </a:ln>
+        </p:spPr>
+        <p:style>
+          <a:lnRef idx="1">
+            <a:schemeClr val="accent1"/>
+          </a:lnRef>
+          <a:fillRef idx="3">
+            <a:schemeClr val="accent1"/>
+          </a:fillRef>
+          <a:effectRef idx="2">
+            <a:schemeClr val="accent1"/>
+          </a:effectRef>
+          <a:fontRef idx="minor">
+            <a:schemeClr val="lt1"/>
+          </a:fontRef>
+        </p:style>
+        <p:txBody>
+          <a:bodyPr rtlCol="0" anchor="ctr"/>
+          <a:lstStyle/>
+          <a:p>
+            <a:pPr algn="ctr">
+              <a:defRPr sz="1600">
+                <a:solidFill>
+                  <a:srgbClr val="27AE60"/>
+                </a:solidFill>
+              </a:defRPr>
+            </a:pPr>
+            <a:r>
+              <a:t>Failed: 0</a:t>
+            </a:r>
+          </a:p>
+        </p:txBody>
+      </p:sp>
+      <p:sp>
+        <p:nvSpPr>
+          <p:cNvPr id="7" name="Rectangle 6"/>
+          <p:cNvSpPr/>
+          <p:nvPr/>
+        </p:nvSpPr>
+        <p:spPr>
+          <a:xfrm>
+            <a:off x="5943600" y="1097280"/>
+            <a:ext cx="1828800" cy="731520"/>
+          </a:xfrm>
+          <a:prstGeom prst="rect">
+            <a:avLst/>
+          </a:prstGeom>
+          <a:solidFill>
+            <a:srgbClr val="E6FFE6"/>
+          </a:solidFill>
+          <a:ln>
+            <a:solidFill>
+              <a:srgbClr val="000000"/>
+            </a:solidFill>
+          </a:ln>
+        </p:spPr>
+        <p:style>
+          <a:lnRef idx="1">
+            <a:schemeClr val="accent1"/>
+          </a:lnRef>
+          <a:fillRef idx="3">
+            <a:schemeClr val="accent1"/>
+          </a:fillRef>
+          <a:effectRef idx="2">
+            <a:schemeClr val="accent1"/>
+          </a:effectRef>
+          <a:fontRef idx="minor">
+            <a:schemeClr val="lt1"/>
+          </a:fontRef>
+        </p:style>
+        <p:txBody>
+          <a:bodyPr rtlCol="0" anchor="ctr"/>
+          <a:lstStyle/>
+          <a:p>
+            <a:pPr algn="ctr">
+              <a:defRPr sz="1600">
+                <a:solidFill>
+                  <a:srgbClr val="27AE60"/>
+                </a:solidFill>
+              </a:defRPr>
+            </a:pPr>
+            <a:r>
+              <a:t>Time: 0.19s</a:t>
+            </a:r>
+          </a:p>
+        </p:txBody>
+      </p:sp>
+      <p:sp>
+        <p:nvSpPr>
+          <p:cNvPr id="8" name="Rectangle 7"/>
+          <p:cNvSpPr/>
+          <p:nvPr/>
+        </p:nvSpPr>
+        <p:spPr>
+          <a:xfrm>
+            <a:off x="457200" y="2011680"/>
+            <a:ext cx="4114800" cy="1371600"/>
+          </a:xfrm>
+          <a:prstGeom prst="rect">
+            <a:avLst/>
+          </a:prstGeom>
+          <a:solidFill>
+            <a:srgbClr val="ECF0F1"/>
+          </a:solidFill>
+          <a:ln>
+            <a:solidFill>
+              <a:srgbClr val="000000"/>
+            </a:solidFill>
+          </a:ln>
+        </p:spPr>
+        <p:style>
+          <a:lnRef idx="1">
+            <a:schemeClr val="accent1"/>
+          </a:lnRef>
+          <a:fillRef idx="3">
+            <a:schemeClr val="accent1"/>
+          </a:fillRef>
+          <a:effectRef idx="2">
+            <a:schemeClr val="accent1"/>
+          </a:effectRef>
+          <a:fontRef idx="minor">
+            <a:schemeClr val="lt1"/>
+          </a:fontRef>
+        </p:style>
+        <p:txBody>
+          <a:bodyPr rtlCol="0" anchor="ctr"/>
+          <a:lstStyle/>
+          <a:p>
+            <a:pPr algn="ctr">
+              <a:defRPr sz="1600">
                 <a:solidFill>
                   <a:srgbClr val="34495E"/>
                 </a:solidFill>
               </a:defRPr>
             </a:pPr>
             <a:r>
-              <a:t>Command: py -m pytest generated_tests/ -v</a:t>
-            </a:r>
-          </a:p>
-          <a:p/>
-          <a:p>
-            <a:r>
-              <a:t>Results:</a:t>
-            </a:r>
-          </a:p>
-          <a:p>
-            <a:r>
-              <a:t>• Total Tests: 10</a:t>
-            </a:r>
-          </a:p>
-          <a:p>
-            <a:r>
-              <a:t>• Passed: 10 (100%)</a:t>
-            </a:r>
-          </a:p>
-          <a:p>
-            <a:r>
-              <a:t>• Failed: 0</a:t>
-            </a:r>
-          </a:p>
-          <a:p>
-            <a:r>
-              <a:t>• Execution Time: 0.19s</a:t>
-            </a:r>
-          </a:p>
-        </p:txBody>
-      </p:sp>
-      <p:sp>
-        <p:nvSpPr>
-          <p:cNvPr id="4" name="TextBox 3"/>
-          <p:cNvSpPr txBox="1"/>
+              <a:t>Test Areas:</a:t>
+            </a:r>
+          </a:p>
+          <a:p>
+            <a:r>
+              <a:t>• Product management</a:t>
+            </a:r>
+          </a:p>
+          <a:p>
+            <a:r>
+              <a:t>• Category operations</a:t>
+            </a:r>
+          </a:p>
+          <a:p>
+            <a:r>
+              <a:t>• Shopping cart</a:t>
+            </a:r>
+          </a:p>
+          <a:p>
+            <a:r>
+              <a:t>• Order processing</a:t>
+            </a:r>
+          </a:p>
+          <a:p>
+            <a:r>
+              <a:t>• User management</a:t>
+            </a:r>
+          </a:p>
+          <a:p>
+            <a:r>
+              <a:t>• Inventory control</a:t>
+            </a:r>
+          </a:p>
+        </p:txBody>
+      </p:sp>
+      <p:sp>
+        <p:nvSpPr>
+          <p:cNvPr id="9" name="Rounded Rectangle 8"/>
+          <p:cNvSpPr/>
           <p:nvPr/>
         </p:nvSpPr>
         <p:spPr>
           <a:xfrm>
-            <a:off x="4572000" y="1371600"/>
-            <a:ext cx="4114800" cy="2286000"/>
-          </a:xfrm>
-          <a:prstGeom prst="rect">
-            <a:avLst/>
-          </a:prstGeom>
-          <a:noFill/>
-        </p:spPr>
-        <p:txBody>
-          <a:bodyPr wrap="square">
-            <a:spAutoFit/>
-          </a:bodyPr>
-          <a:lstStyle/>
-          <a:p>
-            <a:pPr>
-              <a:defRPr sz="1800">
-                <a:solidFill>
-                  <a:srgbClr val="16A085"/>
-                </a:solidFill>
-              </a:defRPr>
-            </a:pPr>
-            <a:r>
-              <a:t>Test Areas Covered:</a:t>
-            </a:r>
-          </a:p>
-          <a:p>
-            <a:r>
-              <a:t>• Product management</a:t>
-            </a:r>
-          </a:p>
-          <a:p>
-            <a:r>
-              <a:t>• Category operations</a:t>
-            </a:r>
-          </a:p>
-          <a:p>
-            <a:r>
-              <a:t>• Shopping cart</a:t>
-            </a:r>
-          </a:p>
-          <a:p>
-            <a:r>
-              <a:t>• Order processing</a:t>
-            </a:r>
-          </a:p>
-          <a:p>
-            <a:r>
-              <a:t>• User management</a:t>
-            </a:r>
-          </a:p>
-          <a:p>
-            <a:r>
-              <a:t>• Inventory control</a:t>
-            </a:r>
-          </a:p>
-        </p:txBody>
-      </p:sp>
-      <p:sp>
-        <p:nvSpPr>
-          <p:cNvPr id="5" name="TextBox 4"/>
-          <p:cNvSpPr txBox="1"/>
-          <p:nvPr/>
-        </p:nvSpPr>
-        <p:spPr>
-          <a:xfrm>
-            <a:off x="457200" y="3657600"/>
-            <a:ext cx="8229600" cy="2743200"/>
-          </a:xfrm>
-          <a:prstGeom prst="rect">
-            <a:avLst/>
-          </a:prstGeom>
-          <a:noFill/>
-        </p:spPr>
-        <p:txBody>
-          <a:bodyPr wrap="none">
-            <a:spAutoFit/>
-          </a:bodyPr>
+            <a:off x="4572000" y="2011680"/>
+            <a:ext cx="4114800" cy="1371600"/>
+          </a:xfrm>
+          <a:prstGeom prst="roundRect">
+            <a:avLst/>
+          </a:prstGeom>
+          <a:solidFill>
+            <a:srgbClr val="F0F0F0"/>
+          </a:solidFill>
+          <a:ln w="25400">
+            <a:solidFill>
+              <a:srgbClr val="646464"/>
+            </a:solidFill>
+          </a:ln>
+        </p:spPr>
+        <p:style>
+          <a:lnRef idx="1">
+            <a:schemeClr val="accent1"/>
+          </a:lnRef>
+          <a:fillRef idx="3">
+            <a:schemeClr val="accent1"/>
+          </a:fillRef>
+          <a:effectRef idx="2">
+            <a:schemeClr val="accent1"/>
+          </a:effectRef>
+          <a:fontRef idx="minor">
+            <a:schemeClr val="lt1"/>
+          </a:fontRef>
+        </p:style>
+        <p:txBody>
+          <a:bodyPr rtlCol="0" anchor="ctr"/>
           <a:lstStyle/>
           <a:p>
             <a:pPr algn="ctr">
               <a:defRPr sz="1400" i="1">
                 <a:solidFill>
-                  <a:srgbClr val="969696"/>
+                  <a:srgbClr val="505050"/>
                 </a:solidFill>
               </a:defRPr>
             </a:pPr>
             <a:r>
-              <a:t>[INSERT SCREENSHOT: Pytest Execution Results]</a:t>
+              <a:t>[INSERT SCREENSHOT]</a:t>
+            </a:r>
+          </a:p>
+          <a:p>
+            <a:r>
+              <a:t>Pytest Execution Results</a:t>
+            </a:r>
+          </a:p>
+          <a:p>
+            <a:r>
+              <a:t>(Run: py -m pytest generated_tests/ -v)</a:t>
+            </a:r>
+          </a:p>
+        </p:txBody>
+      </p:sp>
+      <p:sp>
+        <p:nvSpPr>
+          <p:cNvPr id="10" name="Rounded Rectangle 9"/>
+          <p:cNvSpPr/>
+          <p:nvPr/>
+        </p:nvSpPr>
+        <p:spPr>
+          <a:xfrm>
+            <a:off x="457200" y="3474720"/>
+            <a:ext cx="8229600" cy="3108960"/>
+          </a:xfrm>
+          <a:prstGeom prst="roundRect">
+            <a:avLst/>
+          </a:prstGeom>
+          <a:solidFill>
+            <a:srgbClr val="F0F0F0"/>
+          </a:solidFill>
+          <a:ln w="25400">
+            <a:solidFill>
+              <a:srgbClr val="646464"/>
+            </a:solidFill>
+          </a:ln>
+        </p:spPr>
+        <p:style>
+          <a:lnRef idx="1">
+            <a:schemeClr val="accent1"/>
+          </a:lnRef>
+          <a:fillRef idx="3">
+            <a:schemeClr val="accent1"/>
+          </a:fillRef>
+          <a:effectRef idx="2">
+            <a:schemeClr val="accent1"/>
+          </a:effectRef>
+          <a:fontRef idx="minor">
+            <a:schemeClr val="lt1"/>
+          </a:fontRef>
+        </p:style>
+        <p:txBody>
+          <a:bodyPr rtlCol="0" anchor="ctr"/>
+          <a:lstStyle/>
+          <a:p>
+            <a:pPr algn="ctr">
+              <a:defRPr sz="1400" i="1">
+                <a:solidFill>
+                  <a:srgbClr val="505050"/>
+                </a:solidFill>
+              </a:defRPr>
+            </a:pPr>
+            <a:r>
+              <a:t>[INSERT LARGE SCREENSHOT]</a:t>
+            </a:r>
+          </a:p>
+          <a:p>
+            <a:r>
+              <a:t>Full pytest output showing 10/10 tests passed</a:t>
             </a:r>
           </a:p>
         </p:txBody>
@@ -5227,14 +5923,65 @@
       <p:grpSpPr/>
       <p:sp>
         <p:nvSpPr>
-          <p:cNvPr id="2" name="TextBox 1"/>
+          <p:cNvPr id="2" name="Rectangle 1"/>
+          <p:cNvSpPr/>
+          <p:nvPr/>
+        </p:nvSpPr>
+        <p:spPr>
+          <a:xfrm>
+            <a:off x="0" y="0"/>
+            <a:ext cx="9144000" cy="914400"/>
+          </a:xfrm>
+          <a:prstGeom prst="rect">
+            <a:avLst/>
+          </a:prstGeom>
+          <a:solidFill>
+            <a:srgbClr val="2C3E50"/>
+          </a:solidFill>
+          <a:ln>
+            <a:solidFill>
+              <a:srgbClr val="000000"/>
+            </a:solidFill>
+          </a:ln>
+        </p:spPr>
+        <p:style>
+          <a:lnRef idx="1">
+            <a:schemeClr val="accent1"/>
+          </a:lnRef>
+          <a:fillRef idx="3">
+            <a:schemeClr val="accent1"/>
+          </a:fillRef>
+          <a:effectRef idx="2">
+            <a:schemeClr val="accent1"/>
+          </a:effectRef>
+          <a:fontRef idx="minor">
+            <a:schemeClr val="lt1"/>
+          </a:fontRef>
+        </p:style>
+        <p:txBody>
+          <a:bodyPr rtlCol="0" anchor="ctr"/>
+          <a:lstStyle/>
+          <a:p>
+            <a:pPr algn="ctr">
+              <a:defRPr sz="1600">
+                <a:solidFill>
+                  <a:srgbClr val="FFFFFF"/>
+                </a:solidFill>
+              </a:defRPr>
+            </a:pPr>
+          </a:p>
+        </p:txBody>
+      </p:sp>
+      <p:sp>
+        <p:nvSpPr>
+          <p:cNvPr id="3" name="TextBox 2"/>
           <p:cNvSpPr txBox="1"/>
           <p:nvPr/>
         </p:nvSpPr>
         <p:spPr>
           <a:xfrm>
-            <a:off x="457200" y="457200"/>
-            <a:ext cx="8229600" cy="731520"/>
+            <a:off x="457200" y="182880"/>
+            <a:ext cx="8229600" cy="548640"/>
           </a:xfrm>
           <a:prstGeom prst="rect">
             <a:avLst/>
@@ -5247,116 +5994,195 @@
           </a:bodyPr>
           <a:lstStyle/>
           <a:p>
+            <a:r>
+              <a:t>Challenges Faced and Solutions</a:t>
+            </a:r>
+          </a:p>
+        </p:txBody>
+      </p:sp>
+      <p:sp>
+        <p:nvSpPr>
+          <p:cNvPr id="4" name="Rectangle 3"/>
+          <p:cNvSpPr/>
+          <p:nvPr/>
+        </p:nvSpPr>
+        <p:spPr>
+          <a:xfrm>
+            <a:off x="457200" y="1097280"/>
+            <a:ext cx="4114800" cy="1097280"/>
+          </a:xfrm>
+          <a:prstGeom prst="rect">
+            <a:avLst/>
+          </a:prstGeom>
+          <a:solidFill>
+            <a:srgbClr val="FFE6E6"/>
+          </a:solidFill>
+          <a:ln>
+            <a:solidFill>
+              <a:srgbClr val="000000"/>
+            </a:solidFill>
+          </a:ln>
+        </p:spPr>
+        <p:style>
+          <a:lnRef idx="1">
+            <a:schemeClr val="accent1"/>
+          </a:lnRef>
+          <a:fillRef idx="3">
+            <a:schemeClr val="accent1"/>
+          </a:fillRef>
+          <a:effectRef idx="2">
+            <a:schemeClr val="accent1"/>
+          </a:effectRef>
+          <a:fontRef idx="minor">
+            <a:schemeClr val="lt1"/>
+          </a:fontRef>
+        </p:style>
+        <p:txBody>
+          <a:bodyPr rtlCol="0" anchor="ctr"/>
+          <a:lstStyle/>
+          <a:p>
             <a:pPr algn="ctr">
-              <a:defRPr sz="3600" b="1">
-                <a:solidFill>
-                  <a:srgbClr val="2C3E50"/>
+              <a:defRPr sz="1600">
+                <a:solidFill>
+                  <a:srgbClr val="C0392B"/>
                 </a:solidFill>
               </a:defRPr>
             </a:pPr>
             <a:r>
-              <a:t>Challenges Faced and Solutions</a:t>
-            </a:r>
-          </a:p>
-        </p:txBody>
-      </p:sp>
-      <p:sp>
-        <p:nvSpPr>
-          <p:cNvPr id="3" name="TextBox 2"/>
-          <p:cNvSpPr txBox="1"/>
+              <a:t>Challenge 1: Atlas Dependencies</a:t>
+            </a:r>
+          </a:p>
+          <a:p>
+            <a:r>
+              <a:t>Issue: Proprietary framework</a:t>
+            </a:r>
+          </a:p>
+          <a:p>
+            <a:r>
+              <a:t>Solution: Standalone framework</a:t>
+            </a:r>
+          </a:p>
+          <a:p>
+            <a:r>
+              <a:t>Result: Fully portable</a:t>
+            </a:r>
+          </a:p>
+        </p:txBody>
+      </p:sp>
+      <p:sp>
+        <p:nvSpPr>
+          <p:cNvPr id="5" name="Rectangle 4"/>
+          <p:cNvSpPr/>
           <p:nvPr/>
         </p:nvSpPr>
         <p:spPr>
           <a:xfrm>
-            <a:off x="457200" y="1371600"/>
-            <a:ext cx="4114800" cy="2743200"/>
+            <a:off x="4572000" y="1097280"/>
+            <a:ext cx="4114800" cy="1097280"/>
           </a:xfrm>
           <a:prstGeom prst="rect">
             <a:avLst/>
           </a:prstGeom>
-          <a:noFill/>
-        </p:spPr>
-        <p:txBody>
-          <a:bodyPr wrap="square">
-            <a:spAutoFit/>
-          </a:bodyPr>
-          <a:lstStyle/>
-          <a:p>
-            <a:pPr>
-              <a:defRPr sz="1800">
-                <a:solidFill>
-                  <a:srgbClr val="34495E"/>
+          <a:solidFill>
+            <a:srgbClr val="FFE6E6"/>
+          </a:solidFill>
+          <a:ln>
+            <a:solidFill>
+              <a:srgbClr val="000000"/>
+            </a:solidFill>
+          </a:ln>
+        </p:spPr>
+        <p:style>
+          <a:lnRef idx="1">
+            <a:schemeClr val="accent1"/>
+          </a:lnRef>
+          <a:fillRef idx="3">
+            <a:schemeClr val="accent1"/>
+          </a:fillRef>
+          <a:effectRef idx="2">
+            <a:schemeClr val="accent1"/>
+          </a:effectRef>
+          <a:fontRef idx="minor">
+            <a:schemeClr val="lt1"/>
+          </a:fontRef>
+        </p:style>
+        <p:txBody>
+          <a:bodyPr rtlCol="0" anchor="ctr"/>
+          <a:lstStyle/>
+          <a:p>
+            <a:pPr algn="ctr">
+              <a:defRPr sz="1600">
+                <a:solidFill>
+                  <a:srgbClr val="C0392B"/>
                 </a:solidFill>
               </a:defRPr>
             </a:pPr>
             <a:r>
-              <a:t>Challenge 1: Atlas Dependencies</a:t>
-            </a:r>
-          </a:p>
-          <a:p>
-            <a:r>
-              <a:t>Issue: Proprietary framework required</a:t>
-            </a:r>
-          </a:p>
-          <a:p>
-            <a:r>
-              <a:t>Solution: Created standalone framework</a:t>
-            </a:r>
-          </a:p>
-          <a:p>
-            <a:r>
-              <a:t>Result: Fully portable</a:t>
-            </a:r>
-          </a:p>
-          <a:p/>
-          <a:p>
-            <a:r>
               <a:t>Challenge 2: Web UI Caching</a:t>
             </a:r>
           </a:p>
           <a:p>
             <a:r>
-              <a:t>Issue: Flask caching prevented updates</a:t>
-            </a:r>
-          </a:p>
-          <a:p>
-            <a:r>
-              <a:t>Solution: Command-line approach</a:t>
-            </a:r>
-          </a:p>
-          <a:p>
-            <a:r>
-              <a:t>Status: Documented for final fix</a:t>
-            </a:r>
-          </a:p>
-        </p:txBody>
-      </p:sp>
-      <p:sp>
-        <p:nvSpPr>
-          <p:cNvPr id="4" name="TextBox 3"/>
-          <p:cNvSpPr txBox="1"/>
+              <a:t>Issue: Flask caching</a:t>
+            </a:r>
+          </a:p>
+          <a:p>
+            <a:r>
+              <a:t>Solution: Command-line</a:t>
+            </a:r>
+          </a:p>
+          <a:p>
+            <a:r>
+              <a:t>Status: Documented for fix</a:t>
+            </a:r>
+          </a:p>
+        </p:txBody>
+      </p:sp>
+      <p:sp>
+        <p:nvSpPr>
+          <p:cNvPr id="6" name="Rectangle 5"/>
+          <p:cNvSpPr/>
           <p:nvPr/>
         </p:nvSpPr>
         <p:spPr>
           <a:xfrm>
-            <a:off x="4572000" y="1371600"/>
-            <a:ext cx="4114800" cy="2743200"/>
+            <a:off x="457200" y="2286000"/>
+            <a:ext cx="4114800" cy="1097280"/>
           </a:xfrm>
           <a:prstGeom prst="rect">
             <a:avLst/>
           </a:prstGeom>
-          <a:noFill/>
-        </p:spPr>
-        <p:txBody>
-          <a:bodyPr wrap="square">
-            <a:spAutoFit/>
-          </a:bodyPr>
-          <a:lstStyle/>
-          <a:p>
-            <a:pPr>
-              <a:defRPr sz="1800">
-                <a:solidFill>
-                  <a:srgbClr val="34495E"/>
+          <a:solidFill>
+            <a:srgbClr val="FFE6E6"/>
+          </a:solidFill>
+          <a:ln>
+            <a:solidFill>
+              <a:srgbClr val="000000"/>
+            </a:solidFill>
+          </a:ln>
+        </p:spPr>
+        <p:style>
+          <a:lnRef idx="1">
+            <a:schemeClr val="accent1"/>
+          </a:lnRef>
+          <a:fillRef idx="3">
+            <a:schemeClr val="accent1"/>
+          </a:fillRef>
+          <a:effectRef idx="2">
+            <a:schemeClr val="accent1"/>
+          </a:effectRef>
+          <a:fontRef idx="minor">
+            <a:schemeClr val="lt1"/>
+          </a:fontRef>
+        </p:style>
+        <p:txBody>
+          <a:bodyPr rtlCol="0" anchor="ctr"/>
+          <a:lstStyle/>
+          <a:p>
+            <a:pPr algn="ctr">
+              <a:defRPr sz="1600">
+                <a:solidFill>
+                  <a:srgbClr val="C0392B"/>
                 </a:solidFill>
               </a:defRPr>
             </a:pPr>
@@ -5366,7 +6192,7 @@
           </a:p>
           <a:p>
             <a:r>
-              <a:t>Issue: Excessive memory usage</a:t>
+              <a:t>Issue: Excessive memory</a:t>
             </a:r>
           </a:p>
           <a:p>
@@ -5376,18 +6202,66 @@
           </a:p>
           <a:p>
             <a:r>
-              <a:t>Plan: Optimize for final demo</a:t>
-            </a:r>
-          </a:p>
-          <a:p/>
-          <a:p>
+              <a:t>Plan: Optimize for final</a:t>
+            </a:r>
+          </a:p>
+        </p:txBody>
+      </p:sp>
+      <p:sp>
+        <p:nvSpPr>
+          <p:cNvPr id="7" name="Rectangle 6"/>
+          <p:cNvSpPr/>
+          <p:nvPr/>
+        </p:nvSpPr>
+        <p:spPr>
+          <a:xfrm>
+            <a:off x="4572000" y="2286000"/>
+            <a:ext cx="4114800" cy="1097280"/>
+          </a:xfrm>
+          <a:prstGeom prst="rect">
+            <a:avLst/>
+          </a:prstGeom>
+          <a:solidFill>
+            <a:srgbClr val="FFE6E6"/>
+          </a:solidFill>
+          <a:ln>
+            <a:solidFill>
+              <a:srgbClr val="000000"/>
+            </a:solidFill>
+          </a:ln>
+        </p:spPr>
+        <p:style>
+          <a:lnRef idx="1">
+            <a:schemeClr val="accent1"/>
+          </a:lnRef>
+          <a:fillRef idx="3">
+            <a:schemeClr val="accent1"/>
+          </a:fillRef>
+          <a:effectRef idx="2">
+            <a:schemeClr val="accent1"/>
+          </a:effectRef>
+          <a:fontRef idx="minor">
+            <a:schemeClr val="lt1"/>
+          </a:fontRef>
+        </p:style>
+        <p:txBody>
+          <a:bodyPr rtlCol="0" anchor="ctr"/>
+          <a:lstStyle/>
+          <a:p>
+            <a:pPr algn="ctr">
+              <a:defRPr sz="1600">
+                <a:solidFill>
+                  <a:srgbClr val="C0392B"/>
+                </a:solidFill>
+              </a:defRPr>
+            </a:pPr>
             <a:r>
               <a:t>Challenge 4: Generation Accuracy</a:t>
             </a:r>
           </a:p>
           <a:p>
             <a:r>
-              <a:t>Issue: Limited template matching</a:t>
+              <a:t>Issue: Limited templates</a:t>
             </a:r>
           </a:p>
           <a:p>
@@ -5404,35 +6278,59 @@
       </p:sp>
       <p:sp>
         <p:nvSpPr>
-          <p:cNvPr id="5" name="TextBox 4"/>
-          <p:cNvSpPr txBox="1"/>
+          <p:cNvPr id="8" name="Rounded Rectangle 7"/>
+          <p:cNvSpPr/>
           <p:nvPr/>
         </p:nvSpPr>
         <p:spPr>
           <a:xfrm>
-            <a:off x="457200" y="4206240"/>
-            <a:ext cx="8229600" cy="2194560"/>
-          </a:xfrm>
-          <a:prstGeom prst="rect">
-            <a:avLst/>
-          </a:prstGeom>
-          <a:noFill/>
-        </p:spPr>
-        <p:txBody>
-          <a:bodyPr wrap="none">
-            <a:spAutoFit/>
-          </a:bodyPr>
+            <a:off x="457200" y="3657600"/>
+            <a:ext cx="8229600" cy="2926080"/>
+          </a:xfrm>
+          <a:prstGeom prst="roundRect">
+            <a:avLst/>
+          </a:prstGeom>
+          <a:solidFill>
+            <a:srgbClr val="F0F0F0"/>
+          </a:solidFill>
+          <a:ln w="25400">
+            <a:solidFill>
+              <a:srgbClr val="646464"/>
+            </a:solidFill>
+          </a:ln>
+        </p:spPr>
+        <p:style>
+          <a:lnRef idx="1">
+            <a:schemeClr val="accent1"/>
+          </a:lnRef>
+          <a:fillRef idx="3">
+            <a:schemeClr val="accent1"/>
+          </a:fillRef>
+          <a:effectRef idx="2">
+            <a:schemeClr val="accent1"/>
+          </a:effectRef>
+          <a:fontRef idx="minor">
+            <a:schemeClr val="lt1"/>
+          </a:fontRef>
+        </p:style>
+        <p:txBody>
+          <a:bodyPr rtlCol="0" anchor="ctr"/>
           <a:lstStyle/>
           <a:p>
             <a:pPr algn="ctr">
               <a:defRPr sz="1400" i="1">
                 <a:solidFill>
-                  <a:srgbClr val="969696"/>
+                  <a:srgbClr val="505050"/>
                 </a:solidFill>
               </a:defRPr>
             </a:pPr>
             <a:r>
               <a:t>[INSERT: Challenge-Solution Matrix]</a:t>
+            </a:r>
+          </a:p>
+          <a:p>
+            <a:r>
+              <a:t>(Visual representation of challenges and solutions)</a:t>
             </a:r>
           </a:p>
         </p:txBody>
@@ -5457,14 +6355,65 @@
       <p:grpSpPr/>
       <p:sp>
         <p:nvSpPr>
-          <p:cNvPr id="2" name="TextBox 1"/>
+          <p:cNvPr id="2" name="Rectangle 1"/>
+          <p:cNvSpPr/>
+          <p:nvPr/>
+        </p:nvSpPr>
+        <p:spPr>
+          <a:xfrm>
+            <a:off x="0" y="0"/>
+            <a:ext cx="9144000" cy="914400"/>
+          </a:xfrm>
+          <a:prstGeom prst="rect">
+            <a:avLst/>
+          </a:prstGeom>
+          <a:solidFill>
+            <a:srgbClr val="2C3E50"/>
+          </a:solidFill>
+          <a:ln>
+            <a:solidFill>
+              <a:srgbClr val="000000"/>
+            </a:solidFill>
+          </a:ln>
+        </p:spPr>
+        <p:style>
+          <a:lnRef idx="1">
+            <a:schemeClr val="accent1"/>
+          </a:lnRef>
+          <a:fillRef idx="3">
+            <a:schemeClr val="accent1"/>
+          </a:fillRef>
+          <a:effectRef idx="2">
+            <a:schemeClr val="accent1"/>
+          </a:effectRef>
+          <a:fontRef idx="minor">
+            <a:schemeClr val="lt1"/>
+          </a:fontRef>
+        </p:style>
+        <p:txBody>
+          <a:bodyPr rtlCol="0" anchor="ctr"/>
+          <a:lstStyle/>
+          <a:p>
+            <a:pPr algn="ctr">
+              <a:defRPr sz="1600">
+                <a:solidFill>
+                  <a:srgbClr val="FFFFFF"/>
+                </a:solidFill>
+              </a:defRPr>
+            </a:pPr>
+          </a:p>
+        </p:txBody>
+      </p:sp>
+      <p:sp>
+        <p:nvSpPr>
+          <p:cNvPr id="3" name="TextBox 2"/>
           <p:cNvSpPr txBox="1"/>
           <p:nvPr/>
         </p:nvSpPr>
         <p:spPr>
           <a:xfrm>
-            <a:off x="457200" y="457200"/>
-            <a:ext cx="8229600" cy="731520"/>
+            <a:off x="457200" y="182880"/>
+            <a:ext cx="8229600" cy="548640"/>
           </a:xfrm>
           <a:prstGeom prst="rect">
             <a:avLst/>
@@ -5477,190 +6426,245 @@
           </a:bodyPr>
           <a:lstStyle/>
           <a:p>
+            <a:r>
+              <a:t>Current Status and Future Roadmap</a:t>
+            </a:r>
+          </a:p>
+        </p:txBody>
+      </p:sp>
+      <p:sp>
+        <p:nvSpPr>
+          <p:cNvPr id="4" name="Rectangle 3"/>
+          <p:cNvSpPr/>
+          <p:nvPr/>
+        </p:nvSpPr>
+        <p:spPr>
+          <a:xfrm>
+            <a:off x="457200" y="1097280"/>
+            <a:ext cx="4114800" cy="1828800"/>
+          </a:xfrm>
+          <a:prstGeom prst="rect">
+            <a:avLst/>
+          </a:prstGeom>
+          <a:solidFill>
+            <a:srgbClr val="E6FFE6"/>
+          </a:solidFill>
+          <a:ln>
+            <a:solidFill>
+              <a:srgbClr val="000000"/>
+            </a:solidFill>
+          </a:ln>
+        </p:spPr>
+        <p:style>
+          <a:lnRef idx="1">
+            <a:schemeClr val="accent1"/>
+          </a:lnRef>
+          <a:fillRef idx="3">
+            <a:schemeClr val="accent1"/>
+          </a:fillRef>
+          <a:effectRef idx="2">
+            <a:schemeClr val="accent1"/>
+          </a:effectRef>
+          <a:fontRef idx="minor">
+            <a:schemeClr val="lt1"/>
+          </a:fontRef>
+        </p:style>
+        <p:txBody>
+          <a:bodyPr rtlCol="0" anchor="ctr"/>
+          <a:lstStyle/>
+          <a:p>
             <a:pPr algn="ctr">
-              <a:defRPr sz="3600" b="1">
-                <a:solidFill>
-                  <a:srgbClr val="2C3E50"/>
+              <a:defRPr sz="1600">
+                <a:solidFill>
+                  <a:srgbClr val="27AE60"/>
                 </a:solidFill>
               </a:defRPr>
             </a:pPr>
             <a:r>
-              <a:t>Current Status and Future Roadmap</a:t>
-            </a:r>
-          </a:p>
-        </p:txBody>
-      </p:sp>
-      <p:sp>
-        <p:nvSpPr>
-          <p:cNvPr id="3" name="TextBox 2"/>
-          <p:cNvSpPr txBox="1"/>
+              <a:t>Mid-Term Demo (Completed):</a:t>
+            </a:r>
+          </a:p>
+          <a:p>
+            <a:r>
+              <a:t>✓ Standalone framework</a:t>
+            </a:r>
+          </a:p>
+          <a:p>
+            <a:r>
+              <a:t>✓ Multi-agent architecture</a:t>
+            </a:r>
+          </a:p>
+          <a:p>
+            <a:r>
+              <a:t>✓ Automated generation (10 tests)</a:t>
+            </a:r>
+          </a:p>
+          <a:p>
+            <a:r>
+              <a:t>✓ Pytest integration</a:t>
+            </a:r>
+          </a:p>
+          <a:p>
+            <a:r>
+              <a:t>✓ Mock API simulation</a:t>
+            </a:r>
+          </a:p>
+          <a:p>
+            <a:r>
+              <a:t>✓ Command-line execution</a:t>
+            </a:r>
+          </a:p>
+          <a:p>
+            <a:r>
+              <a:t>✓ 100% pass rate</a:t>
+            </a:r>
+          </a:p>
+        </p:txBody>
+      </p:sp>
+      <p:sp>
+        <p:nvSpPr>
+          <p:cNvPr id="5" name="Rectangle 4"/>
+          <p:cNvSpPr/>
           <p:nvPr/>
         </p:nvSpPr>
         <p:spPr>
           <a:xfrm>
-            <a:off x="457200" y="1371600"/>
-            <a:ext cx="4114800" cy="2743200"/>
+            <a:off x="4572000" y="1097280"/>
+            <a:ext cx="4114800" cy="1828800"/>
           </a:xfrm>
           <a:prstGeom prst="rect">
             <a:avLst/>
           </a:prstGeom>
-          <a:noFill/>
-        </p:spPr>
-        <p:txBody>
-          <a:bodyPr wrap="square">
-            <a:spAutoFit/>
-          </a:bodyPr>
-          <a:lstStyle/>
-          <a:p>
-            <a:pPr>
-              <a:defRPr sz="1800">
-                <a:solidFill>
-                  <a:srgbClr val="27AE60"/>
+          <a:solidFill>
+            <a:srgbClr val="FFE696"/>
+          </a:solidFill>
+          <a:ln>
+            <a:solidFill>
+              <a:srgbClr val="000000"/>
+            </a:solidFill>
+          </a:ln>
+        </p:spPr>
+        <p:style>
+          <a:lnRef idx="1">
+            <a:schemeClr val="accent1"/>
+          </a:lnRef>
+          <a:fillRef idx="3">
+            <a:schemeClr val="accent1"/>
+          </a:fillRef>
+          <a:effectRef idx="2">
+            <a:schemeClr val="accent1"/>
+          </a:effectRef>
+          <a:fontRef idx="minor">
+            <a:schemeClr val="lt1"/>
+          </a:fontRef>
+        </p:style>
+        <p:txBody>
+          <a:bodyPr rtlCol="0" anchor="ctr"/>
+          <a:lstStyle/>
+          <a:p>
+            <a:pPr algn="ctr">
+              <a:defRPr sz="1600">
+                <a:solidFill>
+                  <a:srgbClr val="E67E22"/>
                 </a:solidFill>
               </a:defRPr>
             </a:pPr>
             <a:r>
-              <a:t>Mid-Term Demo (Completed):</a:t>
-            </a:r>
-          </a:p>
-          <a:p>
-            <a:r>
-              <a:t>✓ Standalone test framework</a:t>
-            </a:r>
-          </a:p>
-          <a:p>
-            <a:r>
-              <a:t>✓ Multi-agent architecture</a:t>
-            </a:r>
-          </a:p>
-          <a:p>
-            <a:r>
-              <a:t>✓ Automated generation (10 tests)</a:t>
-            </a:r>
-          </a:p>
-          <a:p>
-            <a:r>
-              <a:t>✓ Pytest integration</a:t>
-            </a:r>
-          </a:p>
-          <a:p>
-            <a:r>
-              <a:t>✓ Mock API simulation</a:t>
-            </a:r>
-          </a:p>
-          <a:p>
-            <a:r>
-              <a:t>✓ Command-line execution</a:t>
-            </a:r>
-          </a:p>
-          <a:p>
-            <a:r>
-              <a:t>✓ 100% pass rate</a:t>
-            </a:r>
-          </a:p>
-        </p:txBody>
-      </p:sp>
-      <p:sp>
-        <p:nvSpPr>
-          <p:cNvPr id="4" name="TextBox 3"/>
-          <p:cNvSpPr txBox="1"/>
+              <a:t>Final Demo (Pending):</a:t>
+            </a:r>
+          </a:p>
+          <a:p>
+            <a:r>
+              <a:t>→ RAG system integration</a:t>
+            </a:r>
+          </a:p>
+          <a:p>
+            <a:r>
+              <a:t>→ LLM-powered generation</a:t>
+            </a:r>
+          </a:p>
+          <a:p>
+            <a:r>
+              <a:t>→ Web UI framework fix</a:t>
+            </a:r>
+          </a:p>
+          <a:p>
+            <a:r>
+              <a:t>→ Enhanced failure analysis</a:t>
+            </a:r>
+          </a:p>
+          <a:p>
+            <a:r>
+              <a:t>→ Real OME API integration</a:t>
+            </a:r>
+          </a:p>
+          <a:p>
+            <a:r>
+              <a:t>→ Advanced auto-fixing</a:t>
+            </a:r>
+          </a:p>
+          <a:p>
+            <a:r>
+              <a:t>→ Performance optimization</a:t>
+            </a:r>
+          </a:p>
+        </p:txBody>
+      </p:sp>
+      <p:sp>
+        <p:nvSpPr>
+          <p:cNvPr id="6" name="Rounded Rectangle 5"/>
+          <p:cNvSpPr/>
           <p:nvPr/>
         </p:nvSpPr>
         <p:spPr>
           <a:xfrm>
-            <a:off x="4572000" y="1371600"/>
-            <a:ext cx="4114800" cy="2743200"/>
-          </a:xfrm>
-          <a:prstGeom prst="rect">
-            <a:avLst/>
-          </a:prstGeom>
-          <a:noFill/>
-        </p:spPr>
-        <p:txBody>
-          <a:bodyPr wrap="square">
-            <a:spAutoFit/>
-          </a:bodyPr>
-          <a:lstStyle/>
-          <a:p>
-            <a:pPr>
-              <a:defRPr sz="1800">
-                <a:solidFill>
-                  <a:srgbClr val="E67E22"/>
-                </a:solidFill>
-              </a:defRPr>
-            </a:pPr>
-            <a:r>
-              <a:t>Final Demo (Pending):</a:t>
-            </a:r>
-          </a:p>
-          <a:p>
-            <a:r>
-              <a:t>→ RAG system integration</a:t>
-            </a:r>
-          </a:p>
-          <a:p>
-            <a:r>
-              <a:t>→ LLM-powered generation</a:t>
-            </a:r>
-          </a:p>
-          <a:p>
-            <a:r>
-              <a:t>→ Web UI framework fix</a:t>
-            </a:r>
-          </a:p>
-          <a:p>
-            <a:r>
-              <a:t>→ Enhanced failure analysis</a:t>
-            </a:r>
-          </a:p>
-          <a:p>
-            <a:r>
-              <a:t>→ Real OME API integration</a:t>
-            </a:r>
-          </a:p>
-          <a:p>
-            <a:r>
-              <a:t>→ Advanced auto-fixing</a:t>
-            </a:r>
-          </a:p>
-          <a:p>
-            <a:r>
-              <a:t>→ Performance optimization</a:t>
-            </a:r>
-          </a:p>
-        </p:txBody>
-      </p:sp>
-      <p:sp>
-        <p:nvSpPr>
-          <p:cNvPr id="5" name="TextBox 4"/>
-          <p:cNvSpPr txBox="1"/>
-          <p:nvPr/>
-        </p:nvSpPr>
-        <p:spPr>
-          <a:xfrm>
-            <a:off x="457200" y="4206240"/>
-            <a:ext cx="8229600" cy="2194560"/>
-          </a:xfrm>
-          <a:prstGeom prst="rect">
-            <a:avLst/>
-          </a:prstGeom>
-          <a:noFill/>
-        </p:spPr>
-        <p:txBody>
-          <a:bodyPr wrap="none">
-            <a:spAutoFit/>
-          </a:bodyPr>
+            <a:off x="457200" y="3017520"/>
+            <a:ext cx="8229600" cy="3566160"/>
+          </a:xfrm>
+          <a:prstGeom prst="roundRect">
+            <a:avLst/>
+          </a:prstGeom>
+          <a:solidFill>
+            <a:srgbClr val="F0F0F0"/>
+          </a:solidFill>
+          <a:ln w="25400">
+            <a:solidFill>
+              <a:srgbClr val="646464"/>
+            </a:solidFill>
+          </a:ln>
+        </p:spPr>
+        <p:style>
+          <a:lnRef idx="1">
+            <a:schemeClr val="accent1"/>
+          </a:lnRef>
+          <a:fillRef idx="3">
+            <a:schemeClr val="accent1"/>
+          </a:fillRef>
+          <a:effectRef idx="2">
+            <a:schemeClr val="accent1"/>
+          </a:effectRef>
+          <a:fontRef idx="minor">
+            <a:schemeClr val="lt1"/>
+          </a:fontRef>
+        </p:style>
+        <p:txBody>
+          <a:bodyPr rtlCol="0" anchor="ctr"/>
           <a:lstStyle/>
           <a:p>
             <a:pPr algn="ctr">
               <a:defRPr sz="1400" i="1">
                 <a:solidFill>
-                  <a:srgbClr val="969696"/>
+                  <a:srgbClr val="505050"/>
                 </a:solidFill>
               </a:defRPr>
             </a:pPr>
             <a:r>
               <a:t>[INSERT: Progress Timeline/Roadmap]</a:t>
+            </a:r>
+          </a:p>
+          <a:p>
+            <a:r>
+              <a:t>(Visual timeline from mid-term to final demo)</a:t>
             </a:r>
           </a:p>
         </p:txBody>
@@ -5685,14 +6689,65 @@
       <p:grpSpPr/>
       <p:sp>
         <p:nvSpPr>
-          <p:cNvPr id="2" name="TextBox 1"/>
+          <p:cNvPr id="2" name="Rectangle 1"/>
+          <p:cNvSpPr/>
+          <p:nvPr/>
+        </p:nvSpPr>
+        <p:spPr>
+          <a:xfrm>
+            <a:off x="0" y="0"/>
+            <a:ext cx="9144000" cy="914400"/>
+          </a:xfrm>
+          <a:prstGeom prst="rect">
+            <a:avLst/>
+          </a:prstGeom>
+          <a:solidFill>
+            <a:srgbClr val="2C3E50"/>
+          </a:solidFill>
+          <a:ln>
+            <a:solidFill>
+              <a:srgbClr val="000000"/>
+            </a:solidFill>
+          </a:ln>
+        </p:spPr>
+        <p:style>
+          <a:lnRef idx="1">
+            <a:schemeClr val="accent1"/>
+          </a:lnRef>
+          <a:fillRef idx="3">
+            <a:schemeClr val="accent1"/>
+          </a:fillRef>
+          <a:effectRef idx="2">
+            <a:schemeClr val="accent1"/>
+          </a:effectRef>
+          <a:fontRef idx="minor">
+            <a:schemeClr val="lt1"/>
+          </a:fontRef>
+        </p:style>
+        <p:txBody>
+          <a:bodyPr rtlCol="0" anchor="ctr"/>
+          <a:lstStyle/>
+          <a:p>
+            <a:pPr algn="ctr">
+              <a:defRPr sz="1600">
+                <a:solidFill>
+                  <a:srgbClr val="FFFFFF"/>
+                </a:solidFill>
+              </a:defRPr>
+            </a:pPr>
+          </a:p>
+        </p:txBody>
+      </p:sp>
+      <p:sp>
+        <p:nvSpPr>
+          <p:cNvPr id="3" name="TextBox 2"/>
           <p:cNvSpPr txBox="1"/>
           <p:nvPr/>
         </p:nvSpPr>
         <p:spPr>
           <a:xfrm>
-            <a:off x="457200" y="457200"/>
-            <a:ext cx="8229600" cy="731520"/>
+            <a:off x="457200" y="182880"/>
+            <a:ext cx="8229600" cy="548640"/>
           </a:xfrm>
           <a:prstGeom prst="rect">
             <a:avLst/>
@@ -5705,215 +6760,348 @@
           </a:bodyPr>
           <a:lstStyle/>
           <a:p>
+            <a:r>
+              <a:t>Real-World Application - OME Integration</a:t>
+            </a:r>
+          </a:p>
+        </p:txBody>
+      </p:sp>
+      <p:sp>
+        <p:nvSpPr>
+          <p:cNvPr id="4" name="Rectangle 3"/>
+          <p:cNvSpPr/>
+          <p:nvPr/>
+        </p:nvSpPr>
+        <p:spPr>
+          <a:xfrm>
+            <a:off x="457200" y="1097280"/>
+            <a:ext cx="4114800" cy="1097280"/>
+          </a:xfrm>
+          <a:prstGeom prst="rect">
+            <a:avLst/>
+          </a:prstGeom>
+          <a:solidFill>
+            <a:srgbClr val="ECF0F1"/>
+          </a:solidFill>
+          <a:ln>
+            <a:solidFill>
+              <a:srgbClr val="000000"/>
+            </a:solidFill>
+          </a:ln>
+        </p:spPr>
+        <p:style>
+          <a:lnRef idx="1">
+            <a:schemeClr val="accent1"/>
+          </a:lnRef>
+          <a:fillRef idx="3">
+            <a:schemeClr val="accent1"/>
+          </a:fillRef>
+          <a:effectRef idx="2">
+            <a:schemeClr val="accent1"/>
+          </a:effectRef>
+          <a:fontRef idx="minor">
+            <a:schemeClr val="lt1"/>
+          </a:fontRef>
+        </p:style>
+        <p:txBody>
+          <a:bodyPr rtlCol="0" anchor="ctr"/>
+          <a:lstStyle/>
+          <a:p>
             <a:pPr algn="ctr">
-              <a:defRPr sz="3600" b="1">
-                <a:solidFill>
-                  <a:srgbClr val="2C3E50"/>
+              <a:defRPr sz="1600">
+                <a:solidFill>
+                  <a:srgbClr val="34495E"/>
                 </a:solidFill>
               </a:defRPr>
             </a:pPr>
             <a:r>
-              <a:t>Real-World Application - OME Integration</a:t>
-            </a:r>
-          </a:p>
-        </p:txBody>
-      </p:sp>
-      <p:sp>
-        <p:nvSpPr>
-          <p:cNvPr id="3" name="TextBox 2"/>
-          <p:cNvSpPr txBox="1"/>
+              <a:t>OME Context:</a:t>
+            </a:r>
+          </a:p>
+          <a:p>
+            <a:r>
+              <a:t>• Operations Management Environment</a:t>
+            </a:r>
+          </a:p>
+          <a:p>
+            <a:r>
+              <a:t>• Complex enterprise workflows</a:t>
+            </a:r>
+          </a:p>
+          <a:p>
+            <a:r>
+              <a:t>• High-volume transactions</a:t>
+            </a:r>
+          </a:p>
+          <a:p>
+            <a:r>
+              <a:t>• Strict quality requirements</a:t>
+            </a:r>
+          </a:p>
+        </p:txBody>
+      </p:sp>
+      <p:sp>
+        <p:nvSpPr>
+          <p:cNvPr id="5" name="Rectangle 4"/>
+          <p:cNvSpPr/>
           <p:nvPr/>
         </p:nvSpPr>
         <p:spPr>
           <a:xfrm>
-            <a:off x="457200" y="1371600"/>
-            <a:ext cx="4114800" cy="1828800"/>
+            <a:off x="4572000" y="1097280"/>
+            <a:ext cx="4114800" cy="1097280"/>
           </a:xfrm>
           <a:prstGeom prst="rect">
             <a:avLst/>
           </a:prstGeom>
-          <a:noFill/>
-        </p:spPr>
-        <p:txBody>
-          <a:bodyPr wrap="square">
-            <a:spAutoFit/>
-          </a:bodyPr>
-          <a:lstStyle/>
-          <a:p>
-            <a:pPr>
-              <a:defRPr sz="1800">
+          <a:solidFill>
+            <a:srgbClr val="ECF0F1"/>
+          </a:solidFill>
+          <a:ln>
+            <a:solidFill>
+              <a:srgbClr val="000000"/>
+            </a:solidFill>
+          </a:ln>
+        </p:spPr>
+        <p:style>
+          <a:lnRef idx="1">
+            <a:schemeClr val="accent1"/>
+          </a:lnRef>
+          <a:fillRef idx="3">
+            <a:schemeClr val="accent1"/>
+          </a:fillRef>
+          <a:effectRef idx="2">
+            <a:schemeClr val="accent1"/>
+          </a:effectRef>
+          <a:fontRef idx="minor">
+            <a:schemeClr val="lt1"/>
+          </a:fontRef>
+        </p:style>
+        <p:txBody>
+          <a:bodyPr rtlCol="0" anchor="ctr"/>
+          <a:lstStyle/>
+          <a:p>
+            <a:pPr algn="ctr">
+              <a:defRPr sz="1600">
                 <a:solidFill>
                   <a:srgbClr val="34495E"/>
                 </a:solidFill>
               </a:defRPr>
             </a:pPr>
             <a:r>
-              <a:t>OME Context:</a:t>
-            </a:r>
-          </a:p>
-          <a:p>
-            <a:r>
-              <a:t>• Operations Management Environment</a:t>
-            </a:r>
-          </a:p>
-          <a:p>
-            <a:r>
-              <a:t>• Complex enterprise workflows</a:t>
-            </a:r>
-          </a:p>
-          <a:p>
-            <a:r>
-              <a:t>• High-volume transactions</a:t>
-            </a:r>
-          </a:p>
-          <a:p>
-            <a:r>
-              <a:t>• Strict quality requirements</a:t>
-            </a:r>
-          </a:p>
-        </p:txBody>
-      </p:sp>
-      <p:sp>
-        <p:nvSpPr>
-          <p:cNvPr id="4" name="TextBox 3"/>
-          <p:cNvSpPr txBox="1"/>
+              <a:t>Integration Plan:</a:t>
+            </a:r>
+          </a:p>
+          <a:p>
+            <a:r>
+              <a:t>• Replace mock with OME API</a:t>
+            </a:r>
+          </a:p>
+          <a:p>
+            <a:r>
+              <a:t>• Configure authentication</a:t>
+            </a:r>
+          </a:p>
+          <a:p>
+            <a:r>
+              <a:t>• Adapt test templates</a:t>
+            </a:r>
+          </a:p>
+          <a:p>
+            <a:r>
+              <a:t>• Implement OME models</a:t>
+            </a:r>
+          </a:p>
+        </p:txBody>
+      </p:sp>
+      <p:sp>
+        <p:nvSpPr>
+          <p:cNvPr id="6" name="Rectangle 5"/>
+          <p:cNvSpPr/>
           <p:nvPr/>
         </p:nvSpPr>
         <p:spPr>
           <a:xfrm>
-            <a:off x="4572000" y="1371600"/>
-            <a:ext cx="4114800" cy="1828800"/>
+            <a:off x="457200" y="2286000"/>
+            <a:ext cx="4114800" cy="914400"/>
           </a:xfrm>
           <a:prstGeom prst="rect">
             <a:avLst/>
           </a:prstGeom>
-          <a:noFill/>
-        </p:spPr>
-        <p:txBody>
-          <a:bodyPr wrap="square">
-            <a:spAutoFit/>
-          </a:bodyPr>
-          <a:lstStyle/>
-          <a:p>
-            <a:pPr>
-              <a:defRPr sz="1800">
-                <a:solidFill>
-                  <a:srgbClr val="16A085"/>
+          <a:solidFill>
+            <a:srgbClr val="E6FFE6"/>
+          </a:solidFill>
+          <a:ln>
+            <a:solidFill>
+              <a:srgbClr val="000000"/>
+            </a:solidFill>
+          </a:ln>
+        </p:spPr>
+        <p:style>
+          <a:lnRef idx="1">
+            <a:schemeClr val="accent1"/>
+          </a:lnRef>
+          <a:fillRef idx="3">
+            <a:schemeClr val="accent1"/>
+          </a:fillRef>
+          <a:effectRef idx="2">
+            <a:schemeClr val="accent1"/>
+          </a:effectRef>
+          <a:fontRef idx="minor">
+            <a:schemeClr val="lt1"/>
+          </a:fontRef>
+        </p:style>
+        <p:txBody>
+          <a:bodyPr rtlCol="0" anchor="ctr"/>
+          <a:lstStyle/>
+          <a:p>
+            <a:pPr algn="ctr">
+              <a:defRPr sz="1600">
+                <a:solidFill>
+                  <a:srgbClr val="27AE60"/>
                 </a:solidFill>
               </a:defRPr>
             </a:pPr>
             <a:r>
-              <a:t>Integration Plan:</a:t>
-            </a:r>
-          </a:p>
-          <a:p>
-            <a:r>
-              <a:t>• Replace mock API with OME endpoints</a:t>
-            </a:r>
-          </a:p>
-          <a:p>
-            <a:r>
-              <a:t>• Configure OME authentication</a:t>
-            </a:r>
-          </a:p>
-          <a:p>
-            <a:r>
-              <a:t>• Adapt test templates for OME</a:t>
-            </a:r>
-          </a:p>
-          <a:p>
-            <a:r>
-              <a:t>• Implement OME data models</a:t>
-            </a:r>
-          </a:p>
-        </p:txBody>
-      </p:sp>
-      <p:sp>
-        <p:nvSpPr>
-          <p:cNvPr id="5" name="TextBox 4"/>
-          <p:cNvSpPr txBox="1"/>
+              <a:t>Expected Benefits:</a:t>
+            </a:r>
+          </a:p>
+          <a:p>
+            <a:r>
+              <a:t>• 80% reduction in test creation</a:t>
+            </a:r>
+          </a:p>
+          <a:p>
+            <a:r>
+              <a:t>• Improved test coverage</a:t>
+            </a:r>
+          </a:p>
+          <a:p>
+            <a:r>
+              <a:t>• Faster regression testing</a:t>
+            </a:r>
+          </a:p>
+          <a:p>
+            <a:r>
+              <a:t>• CI/CD readiness</a:t>
+            </a:r>
+          </a:p>
+        </p:txBody>
+      </p:sp>
+      <p:sp>
+        <p:nvSpPr>
+          <p:cNvPr id="7" name="Rounded Rectangle 6"/>
+          <p:cNvSpPr/>
           <p:nvPr/>
         </p:nvSpPr>
         <p:spPr>
           <a:xfrm>
-            <a:off x="457200" y="3291840"/>
-            <a:ext cx="3657600" cy="1371600"/>
-          </a:xfrm>
-          <a:prstGeom prst="rect">
-            <a:avLst/>
-          </a:prstGeom>
-          <a:noFill/>
-        </p:spPr>
-        <p:txBody>
-          <a:bodyPr wrap="square">
-            <a:spAutoFit/>
-          </a:bodyPr>
-          <a:lstStyle/>
-          <a:p>
-            <a:pPr>
-              <a:defRPr sz="1800">
-                <a:solidFill>
-                  <a:srgbClr val="27AE60"/>
-                </a:solidFill>
-              </a:defRPr>
-            </a:pPr>
-            <a:r>
-              <a:t>Expected Benefits:</a:t>
-            </a:r>
-          </a:p>
-          <a:p>
-            <a:r>
-              <a:t>• 80% reduction in test creation</a:t>
-            </a:r>
-          </a:p>
-          <a:p>
-            <a:r>
-              <a:t>• Improved test coverage</a:t>
-            </a:r>
-          </a:p>
-          <a:p>
-            <a:r>
-              <a:t>• Faster regression testing</a:t>
-            </a:r>
-          </a:p>
-          <a:p>
-            <a:r>
-              <a:t>• CI/CD readiness</a:t>
-            </a:r>
-          </a:p>
-        </p:txBody>
-      </p:sp>
-      <p:sp>
-        <p:nvSpPr>
-          <p:cNvPr id="6" name="TextBox 5"/>
-          <p:cNvSpPr txBox="1"/>
-          <p:nvPr/>
-        </p:nvSpPr>
-        <p:spPr>
-          <a:xfrm>
-            <a:off x="4572000" y="3291840"/>
-            <a:ext cx="4114800" cy="3108960"/>
-          </a:xfrm>
-          <a:prstGeom prst="rect">
-            <a:avLst/>
-          </a:prstGeom>
-          <a:noFill/>
-        </p:spPr>
-        <p:txBody>
-          <a:bodyPr wrap="none">
-            <a:spAutoFit/>
-          </a:bodyPr>
+            <a:off x="4572000" y="2286000"/>
+            <a:ext cx="4114800" cy="914400"/>
+          </a:xfrm>
+          <a:prstGeom prst="roundRect">
+            <a:avLst/>
+          </a:prstGeom>
+          <a:solidFill>
+            <a:srgbClr val="F0F0F0"/>
+          </a:solidFill>
+          <a:ln w="25400">
+            <a:solidFill>
+              <a:srgbClr val="646464"/>
+            </a:solidFill>
+          </a:ln>
+        </p:spPr>
+        <p:style>
+          <a:lnRef idx="1">
+            <a:schemeClr val="accent1"/>
+          </a:lnRef>
+          <a:fillRef idx="3">
+            <a:schemeClr val="accent1"/>
+          </a:fillRef>
+          <a:effectRef idx="2">
+            <a:schemeClr val="accent1"/>
+          </a:effectRef>
+          <a:fontRef idx="minor">
+            <a:schemeClr val="lt1"/>
+          </a:fontRef>
+        </p:style>
+        <p:txBody>
+          <a:bodyPr rtlCol="0" anchor="ctr"/>
           <a:lstStyle/>
           <a:p>
             <a:pPr algn="ctr">
               <a:defRPr sz="1400" i="1">
                 <a:solidFill>
-                  <a:srgbClr val="969696"/>
+                  <a:srgbClr val="505050"/>
                 </a:solidFill>
               </a:defRPr>
             </a:pPr>
             <a:r>
-              <a:t>[INSERT: OME Integration Architecture Diagram]</a:t>
+              <a:t>[INSERT: OME Integration Architecture]</a:t>
+            </a:r>
+          </a:p>
+          <a:p>
+            <a:r>
+              <a:t>(Show ShopEasy → OME mapping)</a:t>
+            </a:r>
+          </a:p>
+        </p:txBody>
+      </p:sp>
+      <p:sp>
+        <p:nvSpPr>
+          <p:cNvPr id="8" name="Rounded Rectangle 7"/>
+          <p:cNvSpPr/>
+          <p:nvPr/>
+        </p:nvSpPr>
+        <p:spPr>
+          <a:xfrm>
+            <a:off x="457200" y="3291840"/>
+            <a:ext cx="8229600" cy="3291840"/>
+          </a:xfrm>
+          <a:prstGeom prst="roundRect">
+            <a:avLst/>
+          </a:prstGeom>
+          <a:solidFill>
+            <a:srgbClr val="F0F0F0"/>
+          </a:solidFill>
+          <a:ln w="25400">
+            <a:solidFill>
+              <a:srgbClr val="646464"/>
+            </a:solidFill>
+          </a:ln>
+        </p:spPr>
+        <p:style>
+          <a:lnRef idx="1">
+            <a:schemeClr val="accent1"/>
+          </a:lnRef>
+          <a:fillRef idx="3">
+            <a:schemeClr val="accent1"/>
+          </a:fillRef>
+          <a:effectRef idx="2">
+            <a:schemeClr val="accent1"/>
+          </a:effectRef>
+          <a:fontRef idx="minor">
+            <a:schemeClr val="lt1"/>
+          </a:fontRef>
+        </p:style>
+        <p:txBody>
+          <a:bodyPr rtlCol="0" anchor="ctr"/>
+          <a:lstStyle/>
+          <a:p>
+            <a:pPr algn="ctr">
+              <a:defRPr sz="1400" i="1">
+                <a:solidFill>
+                  <a:srgbClr val="505050"/>
+                </a:solidFill>
+              </a:defRPr>
+            </a:pPr>
+            <a:r>
+              <a:t>[INSERT: OME System Architecture Diagram]</a:t>
+            </a:r>
+          </a:p>
+          <a:p>
+            <a:r>
+              <a:t>(Show OME components and integration points)</a:t>
             </a:r>
           </a:p>
         </p:txBody>
@@ -5938,14 +7126,65 @@
       <p:grpSpPr/>
       <p:sp>
         <p:nvSpPr>
-          <p:cNvPr id="2" name="TextBox 1"/>
+          <p:cNvPr id="2" name="Rectangle 1"/>
+          <p:cNvSpPr/>
+          <p:nvPr/>
+        </p:nvSpPr>
+        <p:spPr>
+          <a:xfrm>
+            <a:off x="0" y="0"/>
+            <a:ext cx="9144000" cy="914400"/>
+          </a:xfrm>
+          <a:prstGeom prst="rect">
+            <a:avLst/>
+          </a:prstGeom>
+          <a:solidFill>
+            <a:srgbClr val="2C3E50"/>
+          </a:solidFill>
+          <a:ln>
+            <a:solidFill>
+              <a:srgbClr val="000000"/>
+            </a:solidFill>
+          </a:ln>
+        </p:spPr>
+        <p:style>
+          <a:lnRef idx="1">
+            <a:schemeClr val="accent1"/>
+          </a:lnRef>
+          <a:fillRef idx="3">
+            <a:schemeClr val="accent1"/>
+          </a:fillRef>
+          <a:effectRef idx="2">
+            <a:schemeClr val="accent1"/>
+          </a:effectRef>
+          <a:fontRef idx="minor">
+            <a:schemeClr val="lt1"/>
+          </a:fontRef>
+        </p:style>
+        <p:txBody>
+          <a:bodyPr rtlCol="0" anchor="ctr"/>
+          <a:lstStyle/>
+          <a:p>
+            <a:pPr algn="ctr">
+              <a:defRPr sz="1600">
+                <a:solidFill>
+                  <a:srgbClr val="FFFFFF"/>
+                </a:solidFill>
+              </a:defRPr>
+            </a:pPr>
+          </a:p>
+        </p:txBody>
+      </p:sp>
+      <p:sp>
+        <p:nvSpPr>
+          <p:cNvPr id="3" name="TextBox 2"/>
           <p:cNvSpPr txBox="1"/>
           <p:nvPr/>
         </p:nvSpPr>
         <p:spPr>
           <a:xfrm>
-            <a:off x="457200" y="457200"/>
-            <a:ext cx="8229600" cy="731520"/>
+            <a:off x="457200" y="182880"/>
+            <a:ext cx="8229600" cy="548640"/>
           </a:xfrm>
           <a:prstGeom prst="rect">
             <a:avLst/>
@@ -5958,165 +7197,220 @@
           </a:bodyPr>
           <a:lstStyle/>
           <a:p>
+            <a:r>
+              <a:t>Evaluation and Results</a:t>
+            </a:r>
+          </a:p>
+        </p:txBody>
+      </p:sp>
+      <p:sp>
+        <p:nvSpPr>
+          <p:cNvPr id="4" name="Rectangle 3"/>
+          <p:cNvSpPr/>
+          <p:nvPr/>
+        </p:nvSpPr>
+        <p:spPr>
+          <a:xfrm>
+            <a:off x="457200" y="1097280"/>
+            <a:ext cx="4114800" cy="1645920"/>
+          </a:xfrm>
+          <a:prstGeom prst="rect">
+            <a:avLst/>
+          </a:prstGeom>
+          <a:solidFill>
+            <a:srgbClr val="ECF0F1"/>
+          </a:solidFill>
+          <a:ln>
+            <a:solidFill>
+              <a:srgbClr val="000000"/>
+            </a:solidFill>
+          </a:ln>
+        </p:spPr>
+        <p:style>
+          <a:lnRef idx="1">
+            <a:schemeClr val="accent1"/>
+          </a:lnRef>
+          <a:fillRef idx="3">
+            <a:schemeClr val="accent1"/>
+          </a:fillRef>
+          <a:effectRef idx="2">
+            <a:schemeClr val="accent1"/>
+          </a:effectRef>
+          <a:fontRef idx="minor">
+            <a:schemeClr val="lt1"/>
+          </a:fontRef>
+        </p:style>
+        <p:txBody>
+          <a:bodyPr rtlCol="0" anchor="ctr"/>
+          <a:lstStyle/>
+          <a:p>
             <a:pPr algn="ctr">
-              <a:defRPr sz="3600" b="1">
-                <a:solidFill>
-                  <a:srgbClr val="2C3E50"/>
+              <a:defRPr sz="1600">
+                <a:solidFill>
+                  <a:srgbClr val="34495E"/>
                 </a:solidFill>
               </a:defRPr>
             </a:pPr>
             <a:r>
-              <a:t>Evaluation and Results</a:t>
-            </a:r>
-          </a:p>
-        </p:txBody>
-      </p:sp>
-      <p:sp>
-        <p:nvSpPr>
-          <p:cNvPr id="3" name="TextBox 2"/>
-          <p:cNvSpPr txBox="1"/>
+              <a:t>Quantitative Results:</a:t>
+            </a:r>
+          </a:p>
+          <a:p>
+            <a:r>
+              <a:t>• Test Generation: 10/10 successful</a:t>
+            </a:r>
+          </a:p>
+          <a:p>
+            <a:r>
+              <a:t>• Test Execution: 10/10 passed (100%)</a:t>
+            </a:r>
+          </a:p>
+          <a:p>
+            <a:r>
+              <a:t>• Execution Time: 0.19s for suite</a:t>
+            </a:r>
+          </a:p>
+          <a:p>
+            <a:r>
+              <a:t>• Code Quality: Clean and maintainable</a:t>
+            </a:r>
+          </a:p>
+          <a:p>
+            <a:r>
+              <a:t>• Framework Independence: No Atlas</a:t>
+            </a:r>
+          </a:p>
+        </p:txBody>
+      </p:sp>
+      <p:sp>
+        <p:nvSpPr>
+          <p:cNvPr id="5" name="Rectangle 4"/>
+          <p:cNvSpPr/>
           <p:nvPr/>
         </p:nvSpPr>
         <p:spPr>
           <a:xfrm>
-            <a:off x="457200" y="1371600"/>
-            <a:ext cx="4114800" cy="2286000"/>
+            <a:off x="4572000" y="1097280"/>
+            <a:ext cx="4114800" cy="1645920"/>
           </a:xfrm>
           <a:prstGeom prst="rect">
             <a:avLst/>
           </a:prstGeom>
-          <a:noFill/>
-        </p:spPr>
-        <p:txBody>
-          <a:bodyPr wrap="square">
-            <a:spAutoFit/>
-          </a:bodyPr>
-          <a:lstStyle/>
-          <a:p>
-            <a:pPr>
-              <a:defRPr sz="1800">
+          <a:solidFill>
+            <a:srgbClr val="ECF0F1"/>
+          </a:solidFill>
+          <a:ln>
+            <a:solidFill>
+              <a:srgbClr val="000000"/>
+            </a:solidFill>
+          </a:ln>
+        </p:spPr>
+        <p:style>
+          <a:lnRef idx="1">
+            <a:schemeClr val="accent1"/>
+          </a:lnRef>
+          <a:fillRef idx="3">
+            <a:schemeClr val="accent1"/>
+          </a:fillRef>
+          <a:effectRef idx="2">
+            <a:schemeClr val="accent1"/>
+          </a:effectRef>
+          <a:fontRef idx="minor">
+            <a:schemeClr val="lt1"/>
+          </a:fontRef>
+        </p:style>
+        <p:txBody>
+          <a:bodyPr rtlCol="0" anchor="ctr"/>
+          <a:lstStyle/>
+          <a:p>
+            <a:pPr algn="ctr">
+              <a:defRPr sz="1600">
                 <a:solidFill>
                   <a:srgbClr val="34495E"/>
                 </a:solidFill>
               </a:defRPr>
             </a:pPr>
             <a:r>
-              <a:t>Quantitative Results:</a:t>
-            </a:r>
-          </a:p>
-          <a:p>
-            <a:r>
-              <a:t>• Test Generation: 10/10 successful</a:t>
-            </a:r>
-          </a:p>
-          <a:p>
-            <a:r>
-              <a:t>• Test Execution: 10/10 passed (100%)</a:t>
-            </a:r>
-          </a:p>
-          <a:p>
-            <a:r>
-              <a:t>• Execution Time: 0.19s for suite</a:t>
-            </a:r>
-          </a:p>
-          <a:p>
-            <a:r>
-              <a:t>• Code Quality: Clean and maintainable</a:t>
-            </a:r>
-          </a:p>
-          <a:p>
-            <a:r>
-              <a:t>• Framework Independence: No Atlas</a:t>
-            </a:r>
-          </a:p>
-        </p:txBody>
-      </p:sp>
-      <p:sp>
-        <p:nvSpPr>
-          <p:cNvPr id="4" name="TextBox 3"/>
-          <p:cNvSpPr txBox="1"/>
+              <a:t>Qualitative Results:</a:t>
+            </a:r>
+          </a:p>
+          <a:p>
+            <a:r>
+              <a:t>• Usability: Simple command-line</a:t>
+            </a:r>
+          </a:p>
+          <a:p>
+            <a:r>
+              <a:t>• Maintainability: Clear structure</a:t>
+            </a:r>
+          </a:p>
+          <a:p>
+            <a:r>
+              <a:t>• Portability: Cross-platform Python</a:t>
+            </a:r>
+          </a:p>
+          <a:p>
+            <a:r>
+              <a:t>• Reliability: Consistent results</a:t>
+            </a:r>
+          </a:p>
+        </p:txBody>
+      </p:sp>
+      <p:sp>
+        <p:nvSpPr>
+          <p:cNvPr id="6" name="Rounded Rectangle 5"/>
+          <p:cNvSpPr/>
           <p:nvPr/>
         </p:nvSpPr>
         <p:spPr>
           <a:xfrm>
-            <a:off x="4572000" y="1371600"/>
-            <a:ext cx="4114800" cy="2286000"/>
-          </a:xfrm>
-          <a:prstGeom prst="rect">
-            <a:avLst/>
-          </a:prstGeom>
-          <a:noFill/>
-        </p:spPr>
-        <p:txBody>
-          <a:bodyPr wrap="square">
-            <a:spAutoFit/>
-          </a:bodyPr>
-          <a:lstStyle/>
-          <a:p>
-            <a:pPr>
-              <a:defRPr sz="1800">
-                <a:solidFill>
-                  <a:srgbClr val="16A085"/>
-                </a:solidFill>
-              </a:defRPr>
-            </a:pPr>
-            <a:r>
-              <a:t>Qualitative Results:</a:t>
-            </a:r>
-          </a:p>
-          <a:p>
-            <a:r>
-              <a:t>• Usability: Simple command-line</a:t>
-            </a:r>
-          </a:p>
-          <a:p>
-            <a:r>
-              <a:t>• Maintainability: Clear structure</a:t>
-            </a:r>
-          </a:p>
-          <a:p>
-            <a:r>
-              <a:t>• Portability: Cross-platform Python</a:t>
-            </a:r>
-          </a:p>
-          <a:p>
-            <a:r>
-              <a:t>• Reliability: Consistent results</a:t>
-            </a:r>
-          </a:p>
-        </p:txBody>
-      </p:sp>
-      <p:sp>
-        <p:nvSpPr>
-          <p:cNvPr id="5" name="TextBox 4"/>
-          <p:cNvSpPr txBox="1"/>
-          <p:nvPr/>
-        </p:nvSpPr>
-        <p:spPr>
-          <a:xfrm>
-            <a:off x="457200" y="3840480"/>
-            <a:ext cx="8229600" cy="2560320"/>
-          </a:xfrm>
-          <a:prstGeom prst="rect">
-            <a:avLst/>
-          </a:prstGeom>
-          <a:noFill/>
-        </p:spPr>
-        <p:txBody>
-          <a:bodyPr wrap="none">
-            <a:spAutoFit/>
-          </a:bodyPr>
+            <a:off x="457200" y="2834640"/>
+            <a:ext cx="8229600" cy="3749039"/>
+          </a:xfrm>
+          <a:prstGeom prst="roundRect">
+            <a:avLst/>
+          </a:prstGeom>
+          <a:solidFill>
+            <a:srgbClr val="F0F0F0"/>
+          </a:solidFill>
+          <a:ln w="25400">
+            <a:solidFill>
+              <a:srgbClr val="646464"/>
+            </a:solidFill>
+          </a:ln>
+        </p:spPr>
+        <p:style>
+          <a:lnRef idx="1">
+            <a:schemeClr val="accent1"/>
+          </a:lnRef>
+          <a:fillRef idx="3">
+            <a:schemeClr val="accent1"/>
+          </a:fillRef>
+          <a:effectRef idx="2">
+            <a:schemeClr val="accent1"/>
+          </a:effectRef>
+          <a:fontRef idx="minor">
+            <a:schemeClr val="lt1"/>
+          </a:fontRef>
+        </p:style>
+        <p:txBody>
+          <a:bodyPr rtlCol="0" anchor="ctr"/>
           <a:lstStyle/>
           <a:p>
             <a:pPr algn="ctr">
               <a:defRPr sz="1400" i="1">
                 <a:solidFill>
-                  <a:srgbClr val="969696"/>
+                  <a:srgbClr val="505050"/>
                 </a:solidFill>
               </a:defRPr>
             </a:pPr>
             <a:r>
               <a:t>[INSERT: Results Dashboard/Charts]</a:t>
+            </a:r>
+          </a:p>
+          <a:p>
+            <a:r>
+              <a:t>(Visual representation of all metrics and success indicators)</a:t>
             </a:r>
           </a:p>
         </p:txBody>
@@ -6141,14 +7435,65 @@
       <p:grpSpPr/>
       <p:sp>
         <p:nvSpPr>
-          <p:cNvPr id="2" name="TextBox 1"/>
+          <p:cNvPr id="2" name="Rectangle 1"/>
+          <p:cNvSpPr/>
+          <p:nvPr/>
+        </p:nvSpPr>
+        <p:spPr>
+          <a:xfrm>
+            <a:off x="0" y="0"/>
+            <a:ext cx="9144000" cy="914400"/>
+          </a:xfrm>
+          <a:prstGeom prst="rect">
+            <a:avLst/>
+          </a:prstGeom>
+          <a:solidFill>
+            <a:srgbClr val="2C3E50"/>
+          </a:solidFill>
+          <a:ln>
+            <a:solidFill>
+              <a:srgbClr val="000000"/>
+            </a:solidFill>
+          </a:ln>
+        </p:spPr>
+        <p:style>
+          <a:lnRef idx="1">
+            <a:schemeClr val="accent1"/>
+          </a:lnRef>
+          <a:fillRef idx="3">
+            <a:schemeClr val="accent1"/>
+          </a:fillRef>
+          <a:effectRef idx="2">
+            <a:schemeClr val="accent1"/>
+          </a:effectRef>
+          <a:fontRef idx="minor">
+            <a:schemeClr val="lt1"/>
+          </a:fontRef>
+        </p:style>
+        <p:txBody>
+          <a:bodyPr rtlCol="0" anchor="ctr"/>
+          <a:lstStyle/>
+          <a:p>
+            <a:pPr algn="ctr">
+              <a:defRPr sz="1600">
+                <a:solidFill>
+                  <a:srgbClr val="FFFFFF"/>
+                </a:solidFill>
+              </a:defRPr>
+            </a:pPr>
+          </a:p>
+        </p:txBody>
+      </p:sp>
+      <p:sp>
+        <p:nvSpPr>
+          <p:cNvPr id="3" name="TextBox 2"/>
           <p:cNvSpPr txBox="1"/>
           <p:nvPr/>
         </p:nvSpPr>
         <p:spPr>
           <a:xfrm>
-            <a:off x="457200" y="457200"/>
-            <a:ext cx="8229600" cy="731520"/>
+            <a:off x="457200" y="182880"/>
+            <a:ext cx="8229600" cy="548640"/>
           </a:xfrm>
           <a:prstGeom prst="rect">
             <a:avLst/>
@@ -6161,220 +7506,229 @@
           </a:bodyPr>
           <a:lstStyle/>
           <a:p>
+            <a:r>
+              <a:t>Conclusion and Future Work</a:t>
+            </a:r>
+          </a:p>
+        </p:txBody>
+      </p:sp>
+      <p:sp>
+        <p:nvSpPr>
+          <p:cNvPr id="4" name="Rectangle 3"/>
+          <p:cNvSpPr/>
+          <p:nvPr/>
+        </p:nvSpPr>
+        <p:spPr>
+          <a:xfrm>
+            <a:off x="457200" y="1097280"/>
+            <a:ext cx="8229600" cy="914400"/>
+          </a:xfrm>
+          <a:prstGeom prst="rect">
+            <a:avLst/>
+          </a:prstGeom>
+          <a:solidFill>
+            <a:srgbClr val="ECF0F1"/>
+          </a:solidFill>
+          <a:ln>
+            <a:solidFill>
+              <a:srgbClr val="000000"/>
+            </a:solidFill>
+          </a:ln>
+        </p:spPr>
+        <p:style>
+          <a:lnRef idx="1">
+            <a:schemeClr val="accent1"/>
+          </a:lnRef>
+          <a:fillRef idx="3">
+            <a:schemeClr val="accent1"/>
+          </a:fillRef>
+          <a:effectRef idx="2">
+            <a:schemeClr val="accent1"/>
+          </a:effectRef>
+          <a:fontRef idx="minor">
+            <a:schemeClr val="lt1"/>
+          </a:fontRef>
+        </p:style>
+        <p:txBody>
+          <a:bodyPr rtlCol="0" anchor="ctr"/>
+          <a:lstStyle/>
+          <a:p>
             <a:pPr algn="ctr">
-              <a:defRPr sz="3600" b="1">
-                <a:solidFill>
-                  <a:srgbClr val="2C3E50"/>
+              <a:defRPr sz="1600">
+                <a:solidFill>
+                  <a:srgbClr val="34495E"/>
                 </a:solidFill>
               </a:defRPr>
             </a:pPr>
             <a:r>
-              <a:t>Conclusion and Future Work</a:t>
-            </a:r>
-          </a:p>
-        </p:txBody>
-      </p:sp>
-      <p:sp>
-        <p:nvSpPr>
-          <p:cNvPr id="3" name="TextBox 2"/>
-          <p:cNvSpPr txBox="1"/>
+              <a:t>Conclusion: Successfully developed AI-powered automation • Demonstrated standalone framework (100% success) • Validated multi-agent architecture • Established foundation for OME integration</a:t>
+            </a:r>
+          </a:p>
+        </p:txBody>
+      </p:sp>
+      <p:sp>
+        <p:nvSpPr>
+          <p:cNvPr id="5" name="Rectangle 4"/>
+          <p:cNvSpPr/>
           <p:nvPr/>
         </p:nvSpPr>
         <p:spPr>
           <a:xfrm>
-            <a:off x="457200" y="1371600"/>
-            <a:ext cx="4114800" cy="1828800"/>
+            <a:off x="457200" y="2103120"/>
+            <a:ext cx="4114800" cy="914400"/>
           </a:xfrm>
           <a:prstGeom prst="rect">
             <a:avLst/>
           </a:prstGeom>
-          <a:noFill/>
-        </p:spPr>
-        <p:txBody>
-          <a:bodyPr wrap="square">
-            <a:spAutoFit/>
-          </a:bodyPr>
-          <a:lstStyle/>
-          <a:p>
-            <a:pPr>
-              <a:defRPr sz="1800">
+          <a:solidFill>
+            <a:srgbClr val="E6FFE6"/>
+          </a:solidFill>
+          <a:ln>
+            <a:solidFill>
+              <a:srgbClr val="000000"/>
+            </a:solidFill>
+          </a:ln>
+        </p:spPr>
+        <p:style>
+          <a:lnRef idx="1">
+            <a:schemeClr val="accent1"/>
+          </a:lnRef>
+          <a:fillRef idx="3">
+            <a:schemeClr val="accent1"/>
+          </a:fillRef>
+          <a:effectRef idx="2">
+            <a:schemeClr val="accent1"/>
+          </a:effectRef>
+          <a:fontRef idx="minor">
+            <a:schemeClr val="lt1"/>
+          </a:fontRef>
+        </p:style>
+        <p:txBody>
+          <a:bodyPr rtlCol="0" anchor="ctr"/>
+          <a:lstStyle/>
+          <a:p>
+            <a:pPr algn="ctr">
+              <a:defRPr sz="1600">
+                <a:solidFill>
+                  <a:srgbClr val="27AE60"/>
+                </a:solidFill>
+              </a:defRPr>
+            </a:pPr>
+            <a:r>
+              <a:t>Key Achievements: Framework independence • Automated generation • Reliable execution • Comprehensive documentation</a:t>
+            </a:r>
+          </a:p>
+        </p:txBody>
+      </p:sp>
+      <p:sp>
+        <p:nvSpPr>
+          <p:cNvPr id="6" name="Rectangle 5"/>
+          <p:cNvSpPr/>
+          <p:nvPr/>
+        </p:nvSpPr>
+        <p:spPr>
+          <a:xfrm>
+            <a:off x="457200" y="3108960"/>
+            <a:ext cx="8229600" cy="914400"/>
+          </a:xfrm>
+          <a:prstGeom prst="rect">
+            <a:avLst/>
+          </a:prstGeom>
+          <a:solidFill>
+            <a:srgbClr val="ECF0F1"/>
+          </a:solidFill>
+          <a:ln>
+            <a:solidFill>
+              <a:srgbClr val="000000"/>
+            </a:solidFill>
+          </a:ln>
+        </p:spPr>
+        <p:style>
+          <a:lnRef idx="1">
+            <a:schemeClr val="accent1"/>
+          </a:lnRef>
+          <a:fillRef idx="3">
+            <a:schemeClr val="accent1"/>
+          </a:fillRef>
+          <a:effectRef idx="2">
+            <a:schemeClr val="accent1"/>
+          </a:effectRef>
+          <a:fontRef idx="minor">
+            <a:schemeClr val="lt1"/>
+          </a:fontRef>
+        </p:style>
+        <p:txBody>
+          <a:bodyPr rtlCol="0" anchor="ctr"/>
+          <a:lstStyle/>
+          <a:p>
+            <a:pPr algn="ctr">
+              <a:defRPr sz="1600">
                 <a:solidFill>
                   <a:srgbClr val="34495E"/>
                 </a:solidFill>
               </a:defRPr>
             </a:pPr>
             <a:r>
-              <a:t>Conclusion:</a:t>
-            </a:r>
-          </a:p>
-          <a:p>
-            <a:r>
-              <a:t>• Successfully developed AI-powered automation</a:t>
-            </a:r>
-          </a:p>
-          <a:p>
-            <a:r>
-              <a:t>• Demonstrated standalone framework (100% success)</a:t>
-            </a:r>
-          </a:p>
-          <a:p>
-            <a:r>
-              <a:t>• Validated multi-agent architecture</a:t>
-            </a:r>
-          </a:p>
-          <a:p>
-            <a:r>
-              <a:t>• Established foundation for OME integration</a:t>
-            </a:r>
-          </a:p>
-        </p:txBody>
-      </p:sp>
-      <p:sp>
-        <p:nvSpPr>
-          <p:cNvPr id="4" name="TextBox 3"/>
-          <p:cNvSpPr txBox="1"/>
+              <a:t>Future Work: Optimize RAG system • Integrate LLM-powered generation • Implement advanced failure analysis • Complete OME API integration • Enhance web UI functionality</a:t>
+            </a:r>
+          </a:p>
+        </p:txBody>
+      </p:sp>
+      <p:sp>
+        <p:nvSpPr>
+          <p:cNvPr id="7" name="Rounded Rectangle 6"/>
+          <p:cNvSpPr/>
           <p:nvPr/>
         </p:nvSpPr>
         <p:spPr>
           <a:xfrm>
-            <a:off x="4572000" y="1371600"/>
-            <a:ext cx="4114800" cy="1828800"/>
-          </a:xfrm>
-          <a:prstGeom prst="rect">
-            <a:avLst/>
-          </a:prstGeom>
-          <a:noFill/>
-        </p:spPr>
-        <p:txBody>
-          <a:bodyPr wrap="square">
-            <a:spAutoFit/>
-          </a:bodyPr>
-          <a:lstStyle/>
-          <a:p>
-            <a:pPr>
-              <a:defRPr sz="1800">
-                <a:solidFill>
-                  <a:srgbClr val="16A085"/>
-                </a:solidFill>
-              </a:defRPr>
-            </a:pPr>
-            <a:r>
-              <a:t>Key Achievements:</a:t>
-            </a:r>
-          </a:p>
-          <a:p>
-            <a:r>
-              <a:t>• Framework independence</a:t>
-            </a:r>
-          </a:p>
-          <a:p>
-            <a:r>
-              <a:t>• Automated generation from descriptions</a:t>
-            </a:r>
-          </a:p>
-          <a:p>
-            <a:r>
-              <a:t>• Reliable pytest execution</a:t>
-            </a:r>
-          </a:p>
-          <a:p>
-            <a:r>
-              <a:t>• Comprehensive documentation</a:t>
-            </a:r>
-          </a:p>
-        </p:txBody>
-      </p:sp>
-      <p:sp>
-        <p:nvSpPr>
-          <p:cNvPr id="5" name="TextBox 4"/>
-          <p:cNvSpPr txBox="1"/>
-          <p:nvPr/>
-        </p:nvSpPr>
-        <p:spPr>
-          <a:xfrm>
-            <a:off x="457200" y="3383280"/>
-            <a:ext cx="8229600" cy="1371600"/>
-          </a:xfrm>
-          <a:prstGeom prst="rect">
-            <a:avLst/>
-          </a:prstGeom>
-          <a:noFill/>
-        </p:spPr>
-        <p:txBody>
-          <a:bodyPr wrap="square">
-            <a:spAutoFit/>
-          </a:bodyPr>
-          <a:lstStyle/>
-          <a:p>
-            <a:pPr>
-              <a:defRPr sz="1800">
-                <a:solidFill>
-                  <a:srgbClr val="34495E"/>
-                </a:solidFill>
-              </a:defRPr>
-            </a:pPr>
-            <a:r>
-              <a:t>Future Work:</a:t>
-            </a:r>
-          </a:p>
-          <a:p>
-            <a:r>
-              <a:t>• Optimize RAG system</a:t>
-            </a:r>
-          </a:p>
-          <a:p>
-            <a:r>
-              <a:t>• Integrate LLM-powered generation</a:t>
-            </a:r>
-          </a:p>
-          <a:p>
-            <a:r>
-              <a:t>• Implement advanced failure analysis</a:t>
-            </a:r>
-          </a:p>
-          <a:p>
-            <a:r>
-              <a:t>• Complete OME API integration</a:t>
-            </a:r>
-          </a:p>
-          <a:p>
-            <a:r>
-              <a:t>• Enhance web UI functionality</a:t>
-            </a:r>
-          </a:p>
-        </p:txBody>
-      </p:sp>
-      <p:sp>
-        <p:nvSpPr>
-          <p:cNvPr id="6" name="TextBox 5"/>
-          <p:cNvSpPr txBox="1"/>
-          <p:nvPr/>
-        </p:nvSpPr>
-        <p:spPr>
-          <a:xfrm>
-            <a:off x="457200" y="4846320"/>
-            <a:ext cx="8229600" cy="1554480"/>
-          </a:xfrm>
-          <a:prstGeom prst="rect">
-            <a:avLst/>
-          </a:prstGeom>
-          <a:noFill/>
-        </p:spPr>
-        <p:txBody>
-          <a:bodyPr wrap="none">
-            <a:spAutoFit/>
-          </a:bodyPr>
+            <a:off x="457200" y="4114800"/>
+            <a:ext cx="8229600" cy="2286000"/>
+          </a:xfrm>
+          <a:prstGeom prst="roundRect">
+            <a:avLst/>
+          </a:prstGeom>
+          <a:solidFill>
+            <a:srgbClr val="F0F0F0"/>
+          </a:solidFill>
+          <a:ln w="25400">
+            <a:solidFill>
+              <a:srgbClr val="646464"/>
+            </a:solidFill>
+          </a:ln>
+        </p:spPr>
+        <p:style>
+          <a:lnRef idx="1">
+            <a:schemeClr val="accent1"/>
+          </a:lnRef>
+          <a:fillRef idx="3">
+            <a:schemeClr val="accent1"/>
+          </a:fillRef>
+          <a:effectRef idx="2">
+            <a:schemeClr val="accent1"/>
+          </a:effectRef>
+          <a:fontRef idx="minor">
+            <a:schemeClr val="lt1"/>
+          </a:fontRef>
+        </p:style>
+        <p:txBody>
+          <a:bodyPr rtlCol="0" anchor="ctr"/>
           <a:lstStyle/>
           <a:p>
             <a:pPr algn="ctr">
               <a:defRPr sz="1400" i="1">
                 <a:solidFill>
-                  <a:srgbClr val="969696"/>
+                  <a:srgbClr val="505050"/>
                 </a:solidFill>
               </a:defRPr>
             </a:pPr>
             <a:r>
               <a:t>[INSERT: Achievement Highlights/Success Metrics]</a:t>
+            </a:r>
+          </a:p>
+          <a:p>
+            <a:r>
+              <a:t>(Visual summary of key accomplishments)</a:t>
             </a:r>
           </a:p>
         </p:txBody>
@@ -6399,14 +7753,65 @@
       <p:grpSpPr/>
       <p:sp>
         <p:nvSpPr>
-          <p:cNvPr id="2" name="TextBox 1"/>
+          <p:cNvPr id="2" name="Rectangle 1"/>
+          <p:cNvSpPr/>
+          <p:nvPr/>
+        </p:nvSpPr>
+        <p:spPr>
+          <a:xfrm>
+            <a:off x="0" y="0"/>
+            <a:ext cx="9144000" cy="914400"/>
+          </a:xfrm>
+          <a:prstGeom prst="rect">
+            <a:avLst/>
+          </a:prstGeom>
+          <a:solidFill>
+            <a:srgbClr val="2C3E50"/>
+          </a:solidFill>
+          <a:ln>
+            <a:solidFill>
+              <a:srgbClr val="000000"/>
+            </a:solidFill>
+          </a:ln>
+        </p:spPr>
+        <p:style>
+          <a:lnRef idx="1">
+            <a:schemeClr val="accent1"/>
+          </a:lnRef>
+          <a:fillRef idx="3">
+            <a:schemeClr val="accent1"/>
+          </a:fillRef>
+          <a:effectRef idx="2">
+            <a:schemeClr val="accent1"/>
+          </a:effectRef>
+          <a:fontRef idx="minor">
+            <a:schemeClr val="lt1"/>
+          </a:fontRef>
+        </p:style>
+        <p:txBody>
+          <a:bodyPr rtlCol="0" anchor="ctr"/>
+          <a:lstStyle/>
+          <a:p>
+            <a:pPr algn="ctr">
+              <a:defRPr sz="1600">
+                <a:solidFill>
+                  <a:srgbClr val="FFFFFF"/>
+                </a:solidFill>
+              </a:defRPr>
+            </a:pPr>
+          </a:p>
+        </p:txBody>
+      </p:sp>
+      <p:sp>
+        <p:nvSpPr>
+          <p:cNvPr id="3" name="TextBox 2"/>
           <p:cNvSpPr txBox="1"/>
           <p:nvPr/>
         </p:nvSpPr>
         <p:spPr>
           <a:xfrm>
-            <a:off x="457200" y="457200"/>
-            <a:ext cx="8229600" cy="731520"/>
+            <a:off x="457200" y="182880"/>
+            <a:ext cx="8229600" cy="548640"/>
           </a:xfrm>
           <a:prstGeom prst="rect">
             <a:avLst/>
@@ -6419,200 +7824,254 @@
           </a:bodyPr>
           <a:lstStyle/>
           <a:p>
+            <a:r>
+              <a:t>Questions &amp; Answers</a:t>
+            </a:r>
+          </a:p>
+        </p:txBody>
+      </p:sp>
+      <p:sp>
+        <p:nvSpPr>
+          <p:cNvPr id="4" name="Rectangle 3"/>
+          <p:cNvSpPr/>
+          <p:nvPr/>
+        </p:nvSpPr>
+        <p:spPr>
+          <a:xfrm>
+            <a:off x="1371600" y="1371600"/>
+            <a:ext cx="3657600" cy="1371600"/>
+          </a:xfrm>
+          <a:prstGeom prst="rect">
+            <a:avLst/>
+          </a:prstGeom>
+          <a:solidFill>
+            <a:srgbClr val="ECF0F1"/>
+          </a:solidFill>
+          <a:ln>
+            <a:solidFill>
+              <a:srgbClr val="000000"/>
+            </a:solidFill>
+          </a:ln>
+        </p:spPr>
+        <p:style>
+          <a:lnRef idx="1">
+            <a:schemeClr val="accent1"/>
+          </a:lnRef>
+          <a:fillRef idx="3">
+            <a:schemeClr val="accent1"/>
+          </a:fillRef>
+          <a:effectRef idx="2">
+            <a:schemeClr val="accent1"/>
+          </a:effectRef>
+          <a:fontRef idx="minor">
+            <a:schemeClr val="lt1"/>
+          </a:fontRef>
+        </p:style>
+        <p:txBody>
+          <a:bodyPr rtlCol="0" anchor="ctr"/>
+          <a:lstStyle/>
+          <a:p>
             <a:pPr algn="ctr">
-              <a:defRPr sz="3600" b="1">
-                <a:solidFill>
-                  <a:srgbClr val="2C3E50"/>
+              <a:defRPr sz="1600">
+                <a:solidFill>
+                  <a:srgbClr val="34495E"/>
                 </a:solidFill>
               </a:defRPr>
             </a:pPr>
             <a:r>
-              <a:t>Questions &amp; Answers</a:t>
-            </a:r>
-          </a:p>
-        </p:txBody>
-      </p:sp>
-      <p:sp>
-        <p:nvSpPr>
-          <p:cNvPr id="3" name="TextBox 2"/>
-          <p:cNvSpPr txBox="1"/>
+              <a:t>Contact:</a:t>
+            </a:r>
+          </a:p>
+          <a:p>
+            <a:r>
+              <a:t>Presenter: [Your Name]</a:t>
+            </a:r>
+          </a:p>
+          <a:p>
+            <a:r>
+              <a:t>Email: [your.email@institution.edu]</a:t>
+            </a:r>
+          </a:p>
+          <a:p>
+            <a:r>
+              <a:t>Project: AI-Powered Agentic Test Automation</a:t>
+            </a:r>
+          </a:p>
+        </p:txBody>
+      </p:sp>
+      <p:sp>
+        <p:nvSpPr>
+          <p:cNvPr id="5" name="Rectangle 4"/>
+          <p:cNvSpPr/>
           <p:nvPr/>
         </p:nvSpPr>
         <p:spPr>
           <a:xfrm>
-            <a:off x="1371600" y="1828800"/>
-            <a:ext cx="3657600" cy="1828800"/>
+            <a:off x="5029200" y="1371600"/>
+            <a:ext cx="2743200" cy="1371600"/>
           </a:xfrm>
           <a:prstGeom prst="rect">
             <a:avLst/>
           </a:prstGeom>
-          <a:noFill/>
-        </p:spPr>
-        <p:txBody>
-          <a:bodyPr wrap="square">
-            <a:spAutoFit/>
-          </a:bodyPr>
-          <a:lstStyle/>
-          <a:p>
-            <a:pPr>
-              <a:defRPr sz="1800">
+          <a:solidFill>
+            <a:srgbClr val="ECF0F1"/>
+          </a:solidFill>
+          <a:ln>
+            <a:solidFill>
+              <a:srgbClr val="000000"/>
+            </a:solidFill>
+          </a:ln>
+        </p:spPr>
+        <p:style>
+          <a:lnRef idx="1">
+            <a:schemeClr val="accent1"/>
+          </a:lnRef>
+          <a:fillRef idx="3">
+            <a:schemeClr val="accent1"/>
+          </a:fillRef>
+          <a:effectRef idx="2">
+            <a:schemeClr val="accent1"/>
+          </a:effectRef>
+          <a:fontRef idx="minor">
+            <a:schemeClr val="lt1"/>
+          </a:fontRef>
+        </p:style>
+        <p:txBody>
+          <a:bodyPr rtlCol="0" anchor="ctr"/>
+          <a:lstStyle/>
+          <a:p>
+            <a:pPr algn="ctr">
+              <a:defRPr sz="1600">
+                <a:solidFill>
+                  <a:srgbClr val="16A085"/>
+                </a:solidFill>
+              </a:defRPr>
+            </a:pPr>
+            <a:r>
+              <a:t>Resources:</a:t>
+            </a:r>
+          </a:p>
+          <a:p>
+            <a:r>
+              <a:t>• Demo Execution Guide</a:t>
+            </a:r>
+          </a:p>
+          <a:p>
+            <a:r>
+              <a:t>• Installation Instructions</a:t>
+            </a:r>
+          </a:p>
+          <a:p>
+            <a:r>
+              <a:t>• Project Documentation</a:t>
+            </a:r>
+          </a:p>
+          <a:p>
+            <a:r>
+              <a:t>• Source Code</a:t>
+            </a:r>
+          </a:p>
+        </p:txBody>
+      </p:sp>
+      <p:sp>
+        <p:nvSpPr>
+          <p:cNvPr id="6" name="Rectangle 5"/>
+          <p:cNvSpPr/>
+          <p:nvPr/>
+        </p:nvSpPr>
+        <p:spPr>
+          <a:xfrm>
+            <a:off x="1371600" y="2926080"/>
+            <a:ext cx="6400800" cy="731520"/>
+          </a:xfrm>
+          <a:prstGeom prst="rect">
+            <a:avLst/>
+          </a:prstGeom>
+          <a:solidFill>
+            <a:srgbClr val="ECF0F1"/>
+          </a:solidFill>
+          <a:ln>
+            <a:solidFill>
+              <a:srgbClr val="000000"/>
+            </a:solidFill>
+          </a:ln>
+        </p:spPr>
+        <p:style>
+          <a:lnRef idx="1">
+            <a:schemeClr val="accent1"/>
+          </a:lnRef>
+          <a:fillRef idx="3">
+            <a:schemeClr val="accent1"/>
+          </a:fillRef>
+          <a:effectRef idx="2">
+            <a:schemeClr val="accent1"/>
+          </a:effectRef>
+          <a:fontRef idx="minor">
+            <a:schemeClr val="lt1"/>
+          </a:fontRef>
+        </p:style>
+        <p:txBody>
+          <a:bodyPr rtlCol="0" anchor="ctr"/>
+          <a:lstStyle/>
+          <a:p>
+            <a:pPr algn="ctr">
+              <a:defRPr sz="1600">
                 <a:solidFill>
                   <a:srgbClr val="34495E"/>
                 </a:solidFill>
               </a:defRPr>
             </a:pPr>
             <a:r>
-              <a:t>Contact:</a:t>
-            </a:r>
-          </a:p>
-          <a:p>
-            <a:r>
-              <a:t>Presenter: [Your Name]</a:t>
-            </a:r>
-          </a:p>
-          <a:p>
-            <a:r>
-              <a:t>Email: [your.email@institution.edu]</a:t>
-            </a:r>
-          </a:p>
-          <a:p>
-            <a:r>
-              <a:t>Project: AI-Powered Agentic Test Automation</a:t>
-            </a:r>
-          </a:p>
-        </p:txBody>
-      </p:sp>
-      <p:sp>
-        <p:nvSpPr>
-          <p:cNvPr id="4" name="TextBox 3"/>
-          <p:cNvSpPr txBox="1"/>
+              <a:t>Acknowledgments: Faculty guidance • Institution support • Open-source community</a:t>
+            </a:r>
+          </a:p>
+        </p:txBody>
+      </p:sp>
+      <p:sp>
+        <p:nvSpPr>
+          <p:cNvPr id="7" name="Rounded Rectangle 6"/>
+          <p:cNvSpPr/>
           <p:nvPr/>
         </p:nvSpPr>
         <p:spPr>
           <a:xfrm>
-            <a:off x="5029200" y="1828800"/>
-            <a:ext cx="3657600" cy="1828800"/>
-          </a:xfrm>
-          <a:prstGeom prst="rect">
-            <a:avLst/>
-          </a:prstGeom>
-          <a:noFill/>
-        </p:spPr>
-        <p:txBody>
-          <a:bodyPr wrap="square">
-            <a:spAutoFit/>
-          </a:bodyPr>
-          <a:lstStyle/>
-          <a:p>
-            <a:pPr>
-              <a:defRPr sz="1800">
-                <a:solidFill>
-                  <a:srgbClr val="16A085"/>
-                </a:solidFill>
-              </a:defRPr>
-            </a:pPr>
-            <a:r>
-              <a:t>Resources:</a:t>
-            </a:r>
-          </a:p>
-          <a:p>
-            <a:r>
-              <a:t>• Demo Execution Guide</a:t>
-            </a:r>
-          </a:p>
-          <a:p>
-            <a:r>
-              <a:t>• Installation Instructions</a:t>
-            </a:r>
-          </a:p>
-          <a:p>
-            <a:r>
-              <a:t>• Project Documentation</a:t>
-            </a:r>
-          </a:p>
-          <a:p>
-            <a:r>
-              <a:t>• Source Code</a:t>
-            </a:r>
-          </a:p>
-        </p:txBody>
-      </p:sp>
-      <p:sp>
-        <p:nvSpPr>
-          <p:cNvPr id="5" name="TextBox 4"/>
-          <p:cNvSpPr txBox="1"/>
-          <p:nvPr/>
-        </p:nvSpPr>
-        <p:spPr>
-          <a:xfrm>
-            <a:off x="1371600" y="3840480"/>
-            <a:ext cx="6858000" cy="914400"/>
-          </a:xfrm>
-          <a:prstGeom prst="rect">
-            <a:avLst/>
-          </a:prstGeom>
-          <a:noFill/>
-        </p:spPr>
-        <p:txBody>
-          <a:bodyPr wrap="square">
-            <a:spAutoFit/>
-          </a:bodyPr>
-          <a:lstStyle/>
-          <a:p>
-            <a:pPr>
-              <a:defRPr sz="1800">
-                <a:solidFill>
-                  <a:srgbClr val="34495E"/>
-                </a:solidFill>
-              </a:defRPr>
-            </a:pPr>
-            <a:r>
-              <a:t>Acknowledgments:</a:t>
-            </a:r>
-          </a:p>
-          <a:p>
-            <a:r>
-              <a:t>• Faculty guidance and support</a:t>
-            </a:r>
-          </a:p>
-          <a:p>
-            <a:r>
-              <a:t>• Institution resources</a:t>
-            </a:r>
-          </a:p>
-          <a:p>
-            <a:r>
-              <a:t>• Open-source community</a:t>
-            </a:r>
-          </a:p>
-        </p:txBody>
-      </p:sp>
-      <p:sp>
-        <p:nvSpPr>
-          <p:cNvPr id="6" name="TextBox 5"/>
-          <p:cNvSpPr txBox="1"/>
-          <p:nvPr/>
-        </p:nvSpPr>
-        <p:spPr>
-          <a:xfrm>
-            <a:off x="3200400" y="4937760"/>
-            <a:ext cx="2743200" cy="731520"/>
-          </a:xfrm>
-          <a:prstGeom prst="rect">
-            <a:avLst/>
-          </a:prstGeom>
-          <a:noFill/>
-        </p:spPr>
-        <p:txBody>
-          <a:bodyPr wrap="square">
-            <a:spAutoFit/>
-          </a:bodyPr>
-          <a:lstStyle/>
-          <a:p>
-            <a:pPr>
+            <a:off x="3200400" y="3931920"/>
+            <a:ext cx="2743200" cy="914400"/>
+          </a:xfrm>
+          <a:prstGeom prst="roundRect">
+            <a:avLst/>
+          </a:prstGeom>
+          <a:solidFill>
+            <a:srgbClr val="16A085"/>
+          </a:solidFill>
+          <a:ln>
+            <a:solidFill>
+              <a:srgbClr val="000000"/>
+            </a:solidFill>
+          </a:ln>
+        </p:spPr>
+        <p:style>
+          <a:lnRef idx="1">
+            <a:schemeClr val="accent1"/>
+          </a:lnRef>
+          <a:fillRef idx="3">
+            <a:schemeClr val="accent1"/>
+          </a:fillRef>
+          <a:effectRef idx="2">
+            <a:schemeClr val="accent1"/>
+          </a:effectRef>
+          <a:fontRef idx="minor">
+            <a:schemeClr val="lt1"/>
+          </a:fontRef>
+        </p:style>
+        <p:txBody>
+          <a:bodyPr rtlCol="0" anchor="ctr"/>
+          <a:lstStyle/>
+          <a:p>
+            <a:pPr algn="ctr">
               <a:defRPr sz="3600">
                 <a:solidFill>
-                  <a:srgbClr val="16A085"/>
+                  <a:srgbClr val="FFFFFF"/>
                 </a:solidFill>
               </a:defRPr>
             </a:pPr>
@@ -6642,14 +8101,65 @@
       <p:grpSpPr/>
       <p:sp>
         <p:nvSpPr>
-          <p:cNvPr id="2" name="TextBox 1"/>
+          <p:cNvPr id="2" name="Rectangle 1"/>
+          <p:cNvSpPr/>
+          <p:nvPr/>
+        </p:nvSpPr>
+        <p:spPr>
+          <a:xfrm>
+            <a:off x="0" y="0"/>
+            <a:ext cx="9144000" cy="914400"/>
+          </a:xfrm>
+          <a:prstGeom prst="rect">
+            <a:avLst/>
+          </a:prstGeom>
+          <a:solidFill>
+            <a:srgbClr val="2C3E50"/>
+          </a:solidFill>
+          <a:ln>
+            <a:solidFill>
+              <a:srgbClr val="000000"/>
+            </a:solidFill>
+          </a:ln>
+        </p:spPr>
+        <p:style>
+          <a:lnRef idx="1">
+            <a:schemeClr val="accent1"/>
+          </a:lnRef>
+          <a:fillRef idx="3">
+            <a:schemeClr val="accent1"/>
+          </a:fillRef>
+          <a:effectRef idx="2">
+            <a:schemeClr val="accent1"/>
+          </a:effectRef>
+          <a:fontRef idx="minor">
+            <a:schemeClr val="lt1"/>
+          </a:fontRef>
+        </p:style>
+        <p:txBody>
+          <a:bodyPr rtlCol="0" anchor="ctr"/>
+          <a:lstStyle/>
+          <a:p>
+            <a:pPr algn="ctr">
+              <a:defRPr sz="1600">
+                <a:solidFill>
+                  <a:srgbClr val="FFFFFF"/>
+                </a:solidFill>
+              </a:defRPr>
+            </a:pPr>
+          </a:p>
+        </p:txBody>
+      </p:sp>
+      <p:sp>
+        <p:nvSpPr>
+          <p:cNvPr id="3" name="TextBox 2"/>
           <p:cNvSpPr txBox="1"/>
           <p:nvPr/>
         </p:nvSpPr>
         <p:spPr>
           <a:xfrm>
-            <a:off x="457200" y="457200"/>
-            <a:ext cx="8229600" cy="731520"/>
+            <a:off x="457200" y="182880"/>
+            <a:ext cx="8229600" cy="548640"/>
           </a:xfrm>
           <a:prstGeom prst="rect">
             <a:avLst/>
@@ -6662,190 +8172,225 @@
           </a:bodyPr>
           <a:lstStyle/>
           <a:p>
+            <a:pPr>
+              <a:defRPr sz="3200" b="1">
+                <a:solidFill>
+                  <a:srgbClr val="FFFFFF"/>
+                </a:solidFill>
+              </a:defRPr>
+            </a:pPr>
+            <a:r>
+              <a:t>Project Overview</a:t>
+            </a:r>
+          </a:p>
+        </p:txBody>
+      </p:sp>
+      <p:sp>
+        <p:nvSpPr>
+          <p:cNvPr id="4" name="Rectangle 3"/>
+          <p:cNvSpPr/>
+          <p:nvPr/>
+        </p:nvSpPr>
+        <p:spPr>
+          <a:xfrm>
+            <a:off x="457200" y="1371600"/>
+            <a:ext cx="4114800" cy="2743200"/>
+          </a:xfrm>
+          <a:prstGeom prst="rect">
+            <a:avLst/>
+          </a:prstGeom>
+          <a:solidFill>
+            <a:srgbClr val="ECF0F1"/>
+          </a:solidFill>
+          <a:ln>
+            <a:solidFill>
+              <a:srgbClr val="000000"/>
+            </a:solidFill>
+          </a:ln>
+        </p:spPr>
+        <p:style>
+          <a:lnRef idx="1">
+            <a:schemeClr val="accent1"/>
+          </a:lnRef>
+          <a:fillRef idx="3">
+            <a:schemeClr val="accent1"/>
+          </a:fillRef>
+          <a:effectRef idx="2">
+            <a:schemeClr val="accent1"/>
+          </a:effectRef>
+          <a:fontRef idx="minor">
+            <a:schemeClr val="lt1"/>
+          </a:fontRef>
+        </p:style>
+        <p:txBody>
+          <a:bodyPr rtlCol="0" anchor="ctr"/>
+          <a:lstStyle/>
+          <a:p>
             <a:pPr algn="ctr">
-              <a:defRPr sz="3600" b="1">
-                <a:solidFill>
-                  <a:srgbClr val="2C3E50"/>
+              <a:defRPr sz="1600">
+                <a:solidFill>
+                  <a:srgbClr val="34495E"/>
                 </a:solidFill>
               </a:defRPr>
             </a:pPr>
             <a:r>
-              <a:t>Project Overview</a:t>
-            </a:r>
-          </a:p>
-        </p:txBody>
-      </p:sp>
-      <p:sp>
-        <p:nvSpPr>
-          <p:cNvPr id="3" name="TextBox 2"/>
-          <p:cNvSpPr txBox="1"/>
+              <a:t>Objective: Automate test case generation for OME</a:t>
+            </a:r>
+          </a:p>
+          <a:p/>
+          <a:p>
+            <a:r>
+              <a:t>Approach: Multi-agent AI system</a:t>
+            </a:r>
+          </a:p>
+          <a:p/>
+          <a:p>
+            <a:r>
+              <a:t>Status: Mid-term demo with standalone framework</a:t>
+            </a:r>
+          </a:p>
+          <a:p/>
+          <a:p>
+            <a:r>
+              <a:t>Target: Full AI-powered automation</a:t>
+            </a:r>
+          </a:p>
+        </p:txBody>
+      </p:sp>
+      <p:sp>
+        <p:nvSpPr>
+          <p:cNvPr id="5" name="Rectangle 4"/>
+          <p:cNvSpPr/>
           <p:nvPr/>
         </p:nvSpPr>
         <p:spPr>
           <a:xfrm>
-            <a:off x="457200" y="1097280"/>
-            <a:ext cx="8229600" cy="457200"/>
+            <a:off x="4572000" y="1371600"/>
+            <a:ext cx="4114800" cy="2743200"/>
           </a:xfrm>
           <a:prstGeom prst="rect">
             <a:avLst/>
           </a:prstGeom>
-          <a:noFill/>
-        </p:spPr>
-        <p:txBody>
-          <a:bodyPr wrap="none">
-            <a:spAutoFit/>
-          </a:bodyPr>
+          <a:solidFill>
+            <a:srgbClr val="ECF0F1"/>
+          </a:solidFill>
+          <a:ln>
+            <a:solidFill>
+              <a:srgbClr val="000000"/>
+            </a:solidFill>
+          </a:ln>
+        </p:spPr>
+        <p:style>
+          <a:lnRef idx="1">
+            <a:schemeClr val="accent1"/>
+          </a:lnRef>
+          <a:fillRef idx="3">
+            <a:schemeClr val="accent1"/>
+          </a:fillRef>
+          <a:effectRef idx="2">
+            <a:schemeClr val="accent1"/>
+          </a:effectRef>
+          <a:fontRef idx="minor">
+            <a:schemeClr val="lt1"/>
+          </a:fontRef>
+        </p:style>
+        <p:txBody>
+          <a:bodyPr rtlCol="0" anchor="ctr"/>
           <a:lstStyle/>
           <a:p>
             <a:pPr algn="ctr">
-              <a:defRPr sz="2400">
-                <a:solidFill>
-                  <a:srgbClr val="16A085"/>
+              <a:defRPr sz="1600">
+                <a:solidFill>
+                  <a:srgbClr val="34495E"/>
                 </a:solidFill>
               </a:defRPr>
             </a:pPr>
             <a:r>
-              <a:t>Multi-Agent AI System for Test Automation</a:t>
-            </a:r>
-          </a:p>
-        </p:txBody>
-      </p:sp>
-      <p:sp>
-        <p:nvSpPr>
-          <p:cNvPr id="4" name="TextBox 3"/>
-          <p:cNvSpPr txBox="1"/>
+              <a:t>Key Features:</a:t>
+            </a:r>
+          </a:p>
+          <a:p>
+            <a:r>
+              <a:t>• Multi-agent system</a:t>
+            </a:r>
+          </a:p>
+          <a:p>
+            <a:r>
+              <a:t>• Automated generation</a:t>
+            </a:r>
+          </a:p>
+          <a:p>
+            <a:r>
+              <a:t>• Intelligent execution</a:t>
+            </a:r>
+          </a:p>
+          <a:p>
+            <a:r>
+              <a:t>• Self-healing</a:t>
+            </a:r>
+          </a:p>
+          <a:p>
+            <a:r>
+              <a:t>• RAG-based generation</a:t>
+            </a:r>
+          </a:p>
+        </p:txBody>
+      </p:sp>
+      <p:sp>
+        <p:nvSpPr>
+          <p:cNvPr id="6" name="Rounded Rectangle 5"/>
+          <p:cNvSpPr/>
           <p:nvPr/>
         </p:nvSpPr>
         <p:spPr>
           <a:xfrm>
-            <a:off x="457200" y="1828800"/>
-            <a:ext cx="3657600" cy="2743200"/>
-          </a:xfrm>
-          <a:prstGeom prst="rect">
-            <a:avLst/>
-          </a:prstGeom>
-          <a:noFill/>
-        </p:spPr>
-        <p:txBody>
-          <a:bodyPr wrap="square">
-            <a:spAutoFit/>
-          </a:bodyPr>
-          <a:lstStyle/>
-          <a:p>
-            <a:pPr>
-              <a:defRPr sz="1800">
-                <a:solidFill>
-                  <a:srgbClr val="34495E"/>
-                </a:solidFill>
-              </a:defRPr>
-            </a:pPr>
-            <a:r>
-              <a:t>• Objective: Automate test case generation for OME</a:t>
-            </a:r>
-          </a:p>
-          <a:p>
-            <a:r>
-              <a:t>• Approach: Multi-agent AI with agentic architecture</a:t>
-            </a:r>
-          </a:p>
-          <a:p>
-            <a:r>
-              <a:t>• Status: Mid-term demo with standalone framework</a:t>
-            </a:r>
-          </a:p>
-          <a:p>
-            <a:r>
-              <a:t>• Target: Full AI-powered automation with RAG</a:t>
-            </a:r>
-          </a:p>
-        </p:txBody>
-      </p:sp>
-      <p:sp>
-        <p:nvSpPr>
-          <p:cNvPr id="5" name="TextBox 4"/>
-          <p:cNvSpPr txBox="1"/>
-          <p:nvPr/>
-        </p:nvSpPr>
-        <p:spPr>
-          <a:xfrm>
-            <a:off x="4572000" y="1828800"/>
-            <a:ext cx="4114800" cy="2743200"/>
-          </a:xfrm>
-          <a:prstGeom prst="rect">
-            <a:avLst/>
-          </a:prstGeom>
-          <a:noFill/>
-        </p:spPr>
-        <p:txBody>
-          <a:bodyPr wrap="square">
-            <a:spAutoFit/>
-          </a:bodyPr>
-          <a:lstStyle/>
-          <a:p>
-            <a:pPr>
-              <a:defRPr sz="1800">
-                <a:solidFill>
-                  <a:srgbClr val="34495E"/>
-                </a:solidFill>
-              </a:defRPr>
-            </a:pPr>
-            <a:r>
-              <a:t>Key Features:</a:t>
-            </a:r>
-          </a:p>
-          <a:p>
-            <a:r>
-              <a:t>• Multi-agent system for test automation</a:t>
-            </a:r>
-          </a:p>
-          <a:p>
-            <a:r>
-              <a:t>• Automated generation from descriptions</a:t>
-            </a:r>
-          </a:p>
-          <a:p>
-            <a:r>
-              <a:t>• Intelligent execution with failure analysis</a:t>
-            </a:r>
-          </a:p>
-          <a:p>
-            <a:r>
-              <a:t>• Self-healing capabilities</a:t>
-            </a:r>
-          </a:p>
-        </p:txBody>
-      </p:sp>
-      <p:sp>
-        <p:nvSpPr>
-          <p:cNvPr id="6" name="TextBox 5"/>
-          <p:cNvSpPr txBox="1"/>
-          <p:nvPr/>
-        </p:nvSpPr>
-        <p:spPr>
-          <a:xfrm>
-            <a:off x="457200" y="4754880"/>
-            <a:ext cx="8229600" cy="1645920"/>
-          </a:xfrm>
-          <a:prstGeom prst="rect">
-            <a:avLst/>
-          </a:prstGeom>
-          <a:noFill/>
-        </p:spPr>
-        <p:txBody>
-          <a:bodyPr wrap="none">
-            <a:spAutoFit/>
-          </a:bodyPr>
+            <a:off x="457200" y="4389120"/>
+            <a:ext cx="8229600" cy="2011680"/>
+          </a:xfrm>
+          <a:prstGeom prst="roundRect">
+            <a:avLst/>
+          </a:prstGeom>
+          <a:solidFill>
+            <a:srgbClr val="F0F0F0"/>
+          </a:solidFill>
+          <a:ln w="25400">
+            <a:solidFill>
+              <a:srgbClr val="646464"/>
+            </a:solidFill>
+          </a:ln>
+        </p:spPr>
+        <p:style>
+          <a:lnRef idx="1">
+            <a:schemeClr val="accent1"/>
+          </a:lnRef>
+          <a:fillRef idx="3">
+            <a:schemeClr val="accent1"/>
+          </a:fillRef>
+          <a:effectRef idx="2">
+            <a:schemeClr val="accent1"/>
+          </a:effectRef>
+          <a:fontRef idx="minor">
+            <a:schemeClr val="lt1"/>
+          </a:fontRef>
+        </p:style>
+        <p:txBody>
+          <a:bodyPr rtlCol="0" anchor="ctr"/>
           <a:lstStyle/>
           <a:p>
             <a:pPr algn="ctr">
               <a:defRPr sz="1400" i="1">
                 <a:solidFill>
-                  <a:srgbClr val="969696"/>
+                  <a:srgbClr val="505050"/>
                 </a:solidFill>
               </a:defRPr>
             </a:pPr>
             <a:r>
               <a:t>[INSERT: Multi-Agent Architecture Diagram]</a:t>
+            </a:r>
+          </a:p>
+          <a:p>
+            <a:r>
+              <a:t>(Show Orchestrator, QTest, Generator, Executor, Fixer agents)</a:t>
             </a:r>
           </a:p>
         </p:txBody>
@@ -6870,14 +8415,65 @@
       <p:grpSpPr/>
       <p:sp>
         <p:nvSpPr>
-          <p:cNvPr id="2" name="TextBox 1"/>
+          <p:cNvPr id="2" name="Rectangle 1"/>
+          <p:cNvSpPr/>
+          <p:nvPr/>
+        </p:nvSpPr>
+        <p:spPr>
+          <a:xfrm>
+            <a:off x="0" y="0"/>
+            <a:ext cx="9144000" cy="914400"/>
+          </a:xfrm>
+          <a:prstGeom prst="rect">
+            <a:avLst/>
+          </a:prstGeom>
+          <a:solidFill>
+            <a:srgbClr val="2C3E50"/>
+          </a:solidFill>
+          <a:ln>
+            <a:solidFill>
+              <a:srgbClr val="000000"/>
+            </a:solidFill>
+          </a:ln>
+        </p:spPr>
+        <p:style>
+          <a:lnRef idx="1">
+            <a:schemeClr val="accent1"/>
+          </a:lnRef>
+          <a:fillRef idx="3">
+            <a:schemeClr val="accent1"/>
+          </a:fillRef>
+          <a:effectRef idx="2">
+            <a:schemeClr val="accent1"/>
+          </a:effectRef>
+          <a:fontRef idx="minor">
+            <a:schemeClr val="lt1"/>
+          </a:fontRef>
+        </p:style>
+        <p:txBody>
+          <a:bodyPr rtlCol="0" anchor="ctr"/>
+          <a:lstStyle/>
+          <a:p>
+            <a:pPr algn="ctr">
+              <a:defRPr sz="1600">
+                <a:solidFill>
+                  <a:srgbClr val="FFFFFF"/>
+                </a:solidFill>
+              </a:defRPr>
+            </a:pPr>
+          </a:p>
+        </p:txBody>
+      </p:sp>
+      <p:sp>
+        <p:nvSpPr>
+          <p:cNvPr id="3" name="TextBox 2"/>
           <p:cNvSpPr txBox="1"/>
           <p:nvPr/>
         </p:nvSpPr>
         <p:spPr>
           <a:xfrm>
-            <a:off x="457200" y="457200"/>
-            <a:ext cx="8229600" cy="731520"/>
+            <a:off x="457200" y="182880"/>
+            <a:ext cx="8229600" cy="548640"/>
           </a:xfrm>
           <a:prstGeom prst="rect">
             <a:avLst/>
@@ -6890,10 +8486,10 @@
           </a:bodyPr>
           <a:lstStyle/>
           <a:p>
-            <a:pPr algn="ctr">
-              <a:defRPr sz="3600" b="1">
-                <a:solidFill>
-                  <a:srgbClr val="2C3E50"/>
+            <a:pPr>
+              <a:defRPr sz="3200" b="1">
+                <a:solidFill>
+                  <a:srgbClr val="FFFFFF"/>
                 </a:solidFill>
               </a:defRPr>
             </a:pPr>
@@ -6905,8 +8501,8 @@
       </p:sp>
       <p:sp>
         <p:nvSpPr>
-          <p:cNvPr id="3" name="TextBox 2"/>
-          <p:cNvSpPr txBox="1"/>
+          <p:cNvPr id="4" name="Rectangle 3"/>
+          <p:cNvSpPr/>
           <p:nvPr/>
         </p:nvSpPr>
         <p:spPr>
@@ -6917,16 +8513,35 @@
           <a:prstGeom prst="rect">
             <a:avLst/>
           </a:prstGeom>
-          <a:noFill/>
-        </p:spPr>
-        <p:txBody>
-          <a:bodyPr wrap="square">
-            <a:spAutoFit/>
-          </a:bodyPr>
-          <a:lstStyle/>
-          <a:p>
-            <a:pPr>
-              <a:defRPr sz="1800">
+          <a:solidFill>
+            <a:srgbClr val="FFE6E6"/>
+          </a:solidFill>
+          <a:ln>
+            <a:solidFill>
+              <a:srgbClr val="000000"/>
+            </a:solidFill>
+          </a:ln>
+        </p:spPr>
+        <p:style>
+          <a:lnRef idx="1">
+            <a:schemeClr val="accent1"/>
+          </a:lnRef>
+          <a:fillRef idx="3">
+            <a:schemeClr val="accent1"/>
+          </a:fillRef>
+          <a:effectRef idx="2">
+            <a:schemeClr val="accent1"/>
+          </a:effectRef>
+          <a:fontRef idx="minor">
+            <a:schemeClr val="lt1"/>
+          </a:fontRef>
+        </p:style>
+        <p:txBody>
+          <a:bodyPr rtlCol="0" anchor="ctr"/>
+          <a:lstStyle/>
+          <a:p>
+            <a:pPr algn="ctr">
+              <a:defRPr sz="1600">
                 <a:solidFill>
                   <a:srgbClr val="C0392B"/>
                 </a:solidFill>
@@ -6960,8 +8575,8 @@
       </p:sp>
       <p:sp>
         <p:nvSpPr>
-          <p:cNvPr id="4" name="TextBox 3"/>
-          <p:cNvSpPr txBox="1"/>
+          <p:cNvPr id="5" name="Rectangle 4"/>
+          <p:cNvSpPr/>
           <p:nvPr/>
         </p:nvSpPr>
         <p:spPr>
@@ -6972,16 +8587,35 @@
           <a:prstGeom prst="rect">
             <a:avLst/>
           </a:prstGeom>
-          <a:noFill/>
-        </p:spPr>
-        <p:txBody>
-          <a:bodyPr wrap="square">
-            <a:spAutoFit/>
-          </a:bodyPr>
-          <a:lstStyle/>
-          <a:p>
-            <a:pPr>
-              <a:defRPr sz="1800">
+          <a:solidFill>
+            <a:srgbClr val="E6FFE6"/>
+          </a:solidFill>
+          <a:ln>
+            <a:solidFill>
+              <a:srgbClr val="000000"/>
+            </a:solidFill>
+          </a:ln>
+        </p:spPr>
+        <p:style>
+          <a:lnRef idx="1">
+            <a:schemeClr val="accent1"/>
+          </a:lnRef>
+          <a:fillRef idx="3">
+            <a:schemeClr val="accent1"/>
+          </a:fillRef>
+          <a:effectRef idx="2">
+            <a:schemeClr val="accent1"/>
+          </a:effectRef>
+          <a:fontRef idx="minor">
+            <a:schemeClr val="lt1"/>
+          </a:fontRef>
+        </p:style>
+        <p:txBody>
+          <a:bodyPr rtlCol="0" anchor="ctr"/>
+          <a:lstStyle/>
+          <a:p>
+            <a:pPr algn="ctr">
+              <a:defRPr sz="1600">
                 <a:solidFill>
                   <a:srgbClr val="27AE60"/>
                 </a:solidFill>
@@ -6993,7 +8627,7 @@
           </a:p>
           <a:p>
             <a:r>
-              <a:t>• AI-powered agentic automation</a:t>
+              <a:t>• AI-powered automation</a:t>
             </a:r>
           </a:p>
           <a:p>
@@ -7015,8 +8649,8 @@
       </p:sp>
       <p:sp>
         <p:nvSpPr>
-          <p:cNvPr id="5" name="TextBox 4"/>
-          <p:cNvSpPr txBox="1"/>
+          <p:cNvPr id="6" name="Rounded Rectangle 5"/>
+          <p:cNvSpPr/>
           <p:nvPr/>
         </p:nvSpPr>
         <p:spPr>
@@ -7024,26 +8658,50 @@
             <a:off x="457200" y="3840480"/>
             <a:ext cx="8229600" cy="2560320"/>
           </a:xfrm>
-          <a:prstGeom prst="rect">
-            <a:avLst/>
-          </a:prstGeom>
-          <a:noFill/>
-        </p:spPr>
-        <p:txBody>
-          <a:bodyPr wrap="none">
-            <a:spAutoFit/>
-          </a:bodyPr>
+          <a:prstGeom prst="roundRect">
+            <a:avLst/>
+          </a:prstGeom>
+          <a:solidFill>
+            <a:srgbClr val="F0F0F0"/>
+          </a:solidFill>
+          <a:ln w="25400">
+            <a:solidFill>
+              <a:srgbClr val="646464"/>
+            </a:solidFill>
+          </a:ln>
+        </p:spPr>
+        <p:style>
+          <a:lnRef idx="1">
+            <a:schemeClr val="accent1"/>
+          </a:lnRef>
+          <a:fillRef idx="3">
+            <a:schemeClr val="accent1"/>
+          </a:fillRef>
+          <a:effectRef idx="2">
+            <a:schemeClr val="accent1"/>
+          </a:effectRef>
+          <a:fontRef idx="minor">
+            <a:schemeClr val="lt1"/>
+          </a:fontRef>
+        </p:style>
+        <p:txBody>
+          <a:bodyPr rtlCol="0" anchor="ctr"/>
           <a:lstStyle/>
           <a:p>
             <a:pPr algn="ctr">
               <a:defRPr sz="1400" i="1">
                 <a:solidFill>
-                  <a:srgbClr val="969696"/>
+                  <a:srgbClr val="505050"/>
                 </a:solidFill>
               </a:defRPr>
             </a:pPr>
             <a:r>
-              <a:t>[INSERT: Problem vs Solution Comparison]</a:t>
+              <a:t>[INSERT: Problem vs Solution Comparison Chart]</a:t>
+            </a:r>
+          </a:p>
+          <a:p>
+            <a:r>
+              <a:t>(Manual vs Automated time comparison)</a:t>
             </a:r>
           </a:p>
         </p:txBody>
@@ -7068,14 +8726,65 @@
       <p:grpSpPr/>
       <p:sp>
         <p:nvSpPr>
-          <p:cNvPr id="2" name="TextBox 1"/>
+          <p:cNvPr id="2" name="Rectangle 1"/>
+          <p:cNvSpPr/>
+          <p:nvPr/>
+        </p:nvSpPr>
+        <p:spPr>
+          <a:xfrm>
+            <a:off x="0" y="0"/>
+            <a:ext cx="9144000" cy="914400"/>
+          </a:xfrm>
+          <a:prstGeom prst="rect">
+            <a:avLst/>
+          </a:prstGeom>
+          <a:solidFill>
+            <a:srgbClr val="2C3E50"/>
+          </a:solidFill>
+          <a:ln>
+            <a:solidFill>
+              <a:srgbClr val="000000"/>
+            </a:solidFill>
+          </a:ln>
+        </p:spPr>
+        <p:style>
+          <a:lnRef idx="1">
+            <a:schemeClr val="accent1"/>
+          </a:lnRef>
+          <a:fillRef idx="3">
+            <a:schemeClr val="accent1"/>
+          </a:fillRef>
+          <a:effectRef idx="2">
+            <a:schemeClr val="accent1"/>
+          </a:effectRef>
+          <a:fontRef idx="minor">
+            <a:schemeClr val="lt1"/>
+          </a:fontRef>
+        </p:style>
+        <p:txBody>
+          <a:bodyPr rtlCol="0" anchor="ctr"/>
+          <a:lstStyle/>
+          <a:p>
+            <a:pPr algn="ctr">
+              <a:defRPr sz="1600">
+                <a:solidFill>
+                  <a:srgbClr val="FFFFFF"/>
+                </a:solidFill>
+              </a:defRPr>
+            </a:pPr>
+          </a:p>
+        </p:txBody>
+      </p:sp>
+      <p:sp>
+        <p:nvSpPr>
+          <p:cNvPr id="3" name="TextBox 2"/>
           <p:cNvSpPr txBox="1"/>
           <p:nvPr/>
         </p:nvSpPr>
         <p:spPr>
           <a:xfrm>
-            <a:off x="457200" y="457200"/>
-            <a:ext cx="8229600" cy="731520"/>
+            <a:off x="457200" y="182880"/>
+            <a:ext cx="8229600" cy="548640"/>
           </a:xfrm>
           <a:prstGeom prst="rect">
             <a:avLst/>
@@ -7088,137 +8797,276 @@
           </a:bodyPr>
           <a:lstStyle/>
           <a:p>
+            <a:pPr>
+              <a:defRPr sz="3200" b="1">
+                <a:solidFill>
+                  <a:srgbClr val="FFFFFF"/>
+                </a:solidFill>
+              </a:defRPr>
+            </a:pPr>
+            <a:r>
+              <a:t>Literature Review</a:t>
+            </a:r>
+          </a:p>
+        </p:txBody>
+      </p:sp>
+      <p:sp>
+        <p:nvSpPr>
+          <p:cNvPr id="4" name="Rectangle 3"/>
+          <p:cNvSpPr/>
+          <p:nvPr/>
+        </p:nvSpPr>
+        <p:spPr>
+          <a:xfrm>
+            <a:off x="457200" y="1371600"/>
+            <a:ext cx="2743200" cy="1371600"/>
+          </a:xfrm>
+          <a:prstGeom prst="rect">
+            <a:avLst/>
+          </a:prstGeom>
+          <a:solidFill>
+            <a:srgbClr val="E6F0FF"/>
+          </a:solidFill>
+          <a:ln>
+            <a:solidFill>
+              <a:srgbClr val="000000"/>
+            </a:solidFill>
+          </a:ln>
+        </p:spPr>
+        <p:style>
+          <a:lnRef idx="1">
+            <a:schemeClr val="accent1"/>
+          </a:lnRef>
+          <a:fillRef idx="3">
+            <a:schemeClr val="accent1"/>
+          </a:fillRef>
+          <a:effectRef idx="2">
+            <a:schemeClr val="accent1"/>
+          </a:effectRef>
+          <a:fontRef idx="minor">
+            <a:schemeClr val="lt1"/>
+          </a:fontRef>
+        </p:style>
+        <p:txBody>
+          <a:bodyPr rtlCol="0" anchor="ctr"/>
+          <a:lstStyle/>
+          <a:p>
             <a:pPr algn="ctr">
-              <a:defRPr sz="3600" b="1">
-                <a:solidFill>
-                  <a:srgbClr val="2C3E50"/>
+              <a:defRPr sz="1600">
+                <a:solidFill>
+                  <a:srgbClr val="34495E"/>
                 </a:solidFill>
               </a:defRPr>
             </a:pPr>
             <a:r>
-              <a:t>Literature Review</a:t>
-            </a:r>
-          </a:p>
-        </p:txBody>
-      </p:sp>
-      <p:sp>
-        <p:nvSpPr>
-          <p:cNvPr id="3" name="TextBox 2"/>
-          <p:cNvSpPr txBox="1"/>
+              <a:t>1. Test Automation</a:t>
+            </a:r>
+          </a:p>
+          <a:p>
+            <a:r>
+              <a:t>• Traditional frameworks</a:t>
+            </a:r>
+          </a:p>
+          <a:p>
+            <a:r>
+              <a:t>• Limitations: Maintenance</a:t>
+            </a:r>
+          </a:p>
+        </p:txBody>
+      </p:sp>
+      <p:sp>
+        <p:nvSpPr>
+          <p:cNvPr id="5" name="Rectangle 4"/>
+          <p:cNvSpPr/>
           <p:nvPr/>
         </p:nvSpPr>
         <p:spPr>
           <a:xfrm>
-            <a:off x="457200" y="1371600"/>
-            <a:ext cx="8229600" cy="3657600"/>
+            <a:off x="3200400" y="1371600"/>
+            <a:ext cx="2743200" cy="1371600"/>
           </a:xfrm>
           <a:prstGeom prst="rect">
             <a:avLst/>
           </a:prstGeom>
-          <a:noFill/>
-        </p:spPr>
-        <p:txBody>
-          <a:bodyPr wrap="square">
-            <a:spAutoFit/>
-          </a:bodyPr>
-          <a:lstStyle/>
-          <a:p>
-            <a:pPr>
-              <a:defRPr sz="1800">
+          <a:solidFill>
+            <a:srgbClr val="E6F0FF"/>
+          </a:solidFill>
+          <a:ln>
+            <a:solidFill>
+              <a:srgbClr val="000000"/>
+            </a:solidFill>
+          </a:ln>
+        </p:spPr>
+        <p:style>
+          <a:lnRef idx="1">
+            <a:schemeClr val="accent1"/>
+          </a:lnRef>
+          <a:fillRef idx="3">
+            <a:schemeClr val="accent1"/>
+          </a:fillRef>
+          <a:effectRef idx="2">
+            <a:schemeClr val="accent1"/>
+          </a:effectRef>
+          <a:fontRef idx="minor">
+            <a:schemeClr val="lt1"/>
+          </a:fontRef>
+        </p:style>
+        <p:txBody>
+          <a:bodyPr rtlCol="0" anchor="ctr"/>
+          <a:lstStyle/>
+          <a:p>
+            <a:pPr algn="ctr">
+              <a:defRPr sz="1600">
                 <a:solidFill>
                   <a:srgbClr val="34495E"/>
                 </a:solidFill>
               </a:defRPr>
             </a:pPr>
             <a:r>
-              <a:t>1. Test Automation</a:t>
-            </a:r>
-          </a:p>
-          <a:p>
-            <a:r>
-              <a:t>   - Traditional frameworks (Selenium, Appium)</a:t>
-            </a:r>
-          </a:p>
-          <a:p>
-            <a:r>
-              <a:t>   - Limitations: Script maintenance, fragility</a:t>
-            </a:r>
-          </a:p>
-          <a:p/>
-          <a:p>
-            <a:r>
               <a:t>2. AI in Testing</a:t>
             </a:r>
           </a:p>
           <a:p>
             <a:r>
-              <a:t>   - ML for test case prioritization</a:t>
-            </a:r>
-          </a:p>
-          <a:p>
-            <a:r>
-              <a:t>   - NLP for test case generation</a:t>
-            </a:r>
-          </a:p>
-          <a:p>
-            <a:r>
-              <a:t>   - Gap: Limited agentic approaches</a:t>
-            </a:r>
-          </a:p>
-          <a:p/>
-          <a:p>
-            <a:r>
-              <a:t>3. Agentic AI Systems</a:t>
-            </a:r>
-          </a:p>
-          <a:p>
-            <a:r>
-              <a:t>   - Multi-agent architectures for complex tasks</a:t>
-            </a:r>
-          </a:p>
-          <a:p>
-            <a:r>
-              <a:t>   - Applications in software engineering</a:t>
-            </a:r>
-          </a:p>
-          <a:p>
-            <a:r>
-              <a:t>   - Opportunity: Test automation domain</a:t>
-            </a:r>
-          </a:p>
-        </p:txBody>
-      </p:sp>
-      <p:sp>
-        <p:nvSpPr>
-          <p:cNvPr id="4" name="TextBox 3"/>
-          <p:cNvSpPr txBox="1"/>
+              <a:t>• ML prioritization</a:t>
+            </a:r>
+          </a:p>
+          <a:p>
+            <a:r>
+              <a:t>• NLP generation</a:t>
+            </a:r>
+          </a:p>
+          <a:p>
+            <a:r>
+              <a:t>• Gap: Agentic approaches</a:t>
+            </a:r>
+          </a:p>
+        </p:txBody>
+      </p:sp>
+      <p:sp>
+        <p:nvSpPr>
+          <p:cNvPr id="6" name="Rectangle 5"/>
+          <p:cNvSpPr/>
           <p:nvPr/>
         </p:nvSpPr>
         <p:spPr>
           <a:xfrm>
-            <a:off x="457200" y="5120640"/>
-            <a:ext cx="8229600" cy="1280160"/>
+            <a:off x="5943600" y="1371600"/>
+            <a:ext cx="2743200" cy="1371600"/>
           </a:xfrm>
           <a:prstGeom prst="rect">
             <a:avLst/>
           </a:prstGeom>
-          <a:noFill/>
-        </p:spPr>
-        <p:txBody>
-          <a:bodyPr wrap="none">
-            <a:spAutoFit/>
-          </a:bodyPr>
+          <a:solidFill>
+            <a:srgbClr val="E6F0FF"/>
+          </a:solidFill>
+          <a:ln>
+            <a:solidFill>
+              <a:srgbClr val="000000"/>
+            </a:solidFill>
+          </a:ln>
+        </p:spPr>
+        <p:style>
+          <a:lnRef idx="1">
+            <a:schemeClr val="accent1"/>
+          </a:lnRef>
+          <a:fillRef idx="3">
+            <a:schemeClr val="accent1"/>
+          </a:fillRef>
+          <a:effectRef idx="2">
+            <a:schemeClr val="accent1"/>
+          </a:effectRef>
+          <a:fontRef idx="minor">
+            <a:schemeClr val="lt1"/>
+          </a:fontRef>
+        </p:style>
+        <p:txBody>
+          <a:bodyPr rtlCol="0" anchor="ctr"/>
+          <a:lstStyle/>
+          <a:p>
+            <a:pPr algn="ctr">
+              <a:defRPr sz="1600">
+                <a:solidFill>
+                  <a:srgbClr val="34495E"/>
+                </a:solidFill>
+              </a:defRPr>
+            </a:pPr>
+            <a:r>
+              <a:t>3. Agentic AI</a:t>
+            </a:r>
+          </a:p>
+          <a:p>
+            <a:r>
+              <a:t>• Multi-agent systems</a:t>
+            </a:r>
+          </a:p>
+          <a:p>
+            <a:r>
+              <a:t>• Software engineering</a:t>
+            </a:r>
+          </a:p>
+          <a:p>
+            <a:r>
+              <a:t>• Opportunity: Testing domain</a:t>
+            </a:r>
+          </a:p>
+        </p:txBody>
+      </p:sp>
+      <p:sp>
+        <p:nvSpPr>
+          <p:cNvPr id="7" name="Rounded Rectangle 6"/>
+          <p:cNvSpPr/>
+          <p:nvPr/>
+        </p:nvSpPr>
+        <p:spPr>
+          <a:xfrm>
+            <a:off x="457200" y="2926080"/>
+            <a:ext cx="8229600" cy="3474720"/>
+          </a:xfrm>
+          <a:prstGeom prst="roundRect">
+            <a:avLst/>
+          </a:prstGeom>
+          <a:solidFill>
+            <a:srgbClr val="F0F0F0"/>
+          </a:solidFill>
+          <a:ln w="25400">
+            <a:solidFill>
+              <a:srgbClr val="646464"/>
+            </a:solidFill>
+          </a:ln>
+        </p:spPr>
+        <p:style>
+          <a:lnRef idx="1">
+            <a:schemeClr val="accent1"/>
+          </a:lnRef>
+          <a:fillRef idx="3">
+            <a:schemeClr val="accent1"/>
+          </a:fillRef>
+          <a:effectRef idx="2">
+            <a:schemeClr val="accent1"/>
+          </a:effectRef>
+          <a:fontRef idx="minor">
+            <a:schemeClr val="lt1"/>
+          </a:fontRef>
+        </p:style>
+        <p:txBody>
+          <a:bodyPr rtlCol="0" anchor="ctr"/>
           <a:lstStyle/>
           <a:p>
             <a:pPr algn="ctr">
               <a:defRPr sz="1400" i="1">
                 <a:solidFill>
-                  <a:srgbClr val="969696"/>
+                  <a:srgbClr val="505050"/>
                 </a:solidFill>
               </a:defRPr>
             </a:pPr>
             <a:r>
               <a:t>[INSERT: Research Gap Matrix]</a:t>
+            </a:r>
+          </a:p>
+          <a:p>
+            <a:r>
+              <a:t>(Show current research vs our contribution)</a:t>
             </a:r>
           </a:p>
         </p:txBody>
@@ -7243,14 +9091,65 @@
       <p:grpSpPr/>
       <p:sp>
         <p:nvSpPr>
-          <p:cNvPr id="2" name="TextBox 1"/>
+          <p:cNvPr id="2" name="Rectangle 1"/>
+          <p:cNvSpPr/>
+          <p:nvPr/>
+        </p:nvSpPr>
+        <p:spPr>
+          <a:xfrm>
+            <a:off x="0" y="0"/>
+            <a:ext cx="9144000" cy="914400"/>
+          </a:xfrm>
+          <a:prstGeom prst="rect">
+            <a:avLst/>
+          </a:prstGeom>
+          <a:solidFill>
+            <a:srgbClr val="2C3E50"/>
+          </a:solidFill>
+          <a:ln>
+            <a:solidFill>
+              <a:srgbClr val="000000"/>
+            </a:solidFill>
+          </a:ln>
+        </p:spPr>
+        <p:style>
+          <a:lnRef idx="1">
+            <a:schemeClr val="accent1"/>
+          </a:lnRef>
+          <a:fillRef idx="3">
+            <a:schemeClr val="accent1"/>
+          </a:fillRef>
+          <a:effectRef idx="2">
+            <a:schemeClr val="accent1"/>
+          </a:effectRef>
+          <a:fontRef idx="minor">
+            <a:schemeClr val="lt1"/>
+          </a:fontRef>
+        </p:style>
+        <p:txBody>
+          <a:bodyPr rtlCol="0" anchor="ctr"/>
+          <a:lstStyle/>
+          <a:p>
+            <a:pPr algn="ctr">
+              <a:defRPr sz="1600">
+                <a:solidFill>
+                  <a:srgbClr val="FFFFFF"/>
+                </a:solidFill>
+              </a:defRPr>
+            </a:pPr>
+          </a:p>
+        </p:txBody>
+      </p:sp>
+      <p:sp>
+        <p:nvSpPr>
+          <p:cNvPr id="3" name="TextBox 2"/>
           <p:cNvSpPr txBox="1"/>
           <p:nvPr/>
         </p:nvSpPr>
         <p:spPr>
           <a:xfrm>
-            <a:off x="457200" y="457200"/>
-            <a:ext cx="8229600" cy="731520"/>
+            <a:off x="457200" y="182880"/>
+            <a:ext cx="8229600" cy="548640"/>
           </a:xfrm>
           <a:prstGeom prst="rect">
             <a:avLst/>
@@ -7263,145 +9162,507 @@
           </a:bodyPr>
           <a:lstStyle/>
           <a:p>
+            <a:pPr>
+              <a:defRPr sz="3200" b="1">
+                <a:solidFill>
+                  <a:srgbClr val="FFFFFF"/>
+                </a:solidFill>
+              </a:defRPr>
+            </a:pPr>
+            <a:r>
+              <a:t>Research Methodology</a:t>
+            </a:r>
+          </a:p>
+        </p:txBody>
+      </p:sp>
+      <p:sp>
+        <p:nvSpPr>
+          <p:cNvPr id="4" name="Rounded Rectangle 3"/>
+          <p:cNvSpPr/>
+          <p:nvPr/>
+        </p:nvSpPr>
+        <p:spPr>
+          <a:xfrm>
+            <a:off x="914400" y="1371600"/>
+            <a:ext cx="1645920" cy="731520"/>
+          </a:xfrm>
+          <a:prstGeom prst="roundRect">
+            <a:avLst/>
+          </a:prstGeom>
+          <a:solidFill>
+            <a:srgbClr val="16A085"/>
+          </a:solidFill>
+          <a:ln>
+            <a:solidFill>
+              <a:srgbClr val="000000"/>
+            </a:solidFill>
+          </a:ln>
+        </p:spPr>
+        <p:style>
+          <a:lnRef idx="1">
+            <a:schemeClr val="accent1"/>
+          </a:lnRef>
+          <a:fillRef idx="3">
+            <a:schemeClr val="accent1"/>
+          </a:fillRef>
+          <a:effectRef idx="2">
+            <a:schemeClr val="accent1"/>
+          </a:effectRef>
+          <a:fontRef idx="minor">
+            <a:schemeClr val="lt1"/>
+          </a:fontRef>
+        </p:style>
+        <p:txBody>
+          <a:bodyPr rtlCol="0" anchor="ctr"/>
+          <a:lstStyle/>
+          <a:p>
             <a:pPr algn="ctr">
-              <a:defRPr sz="3600" b="1">
-                <a:solidFill>
-                  <a:srgbClr val="2C3E50"/>
+              <a:defRPr sz="1400">
+                <a:solidFill>
+                  <a:srgbClr val="FFFFFF"/>
                 </a:solidFill>
               </a:defRPr>
             </a:pPr>
             <a:r>
-              <a:t>Research Methodology</a:t>
-            </a:r>
-          </a:p>
-        </p:txBody>
-      </p:sp>
-      <p:sp>
-        <p:nvSpPr>
-          <p:cNvPr id="3" name="TextBox 2"/>
-          <p:cNvSpPr txBox="1"/>
+              <a:t>1. Problem</a:t>
+            </a:r>
+          </a:p>
+          <a:p>
+            <a:r>
+              <a:t>Analysis</a:t>
+            </a:r>
+          </a:p>
+        </p:txBody>
+      </p:sp>
+      <p:sp>
+        <p:nvSpPr>
+          <p:cNvPr id="5" name="Rounded Rectangle 4"/>
+          <p:cNvSpPr/>
           <p:nvPr/>
         </p:nvSpPr>
         <p:spPr>
           <a:xfrm>
-            <a:off x="457200" y="1097280"/>
-            <a:ext cx="8229600" cy="457200"/>
+            <a:off x="2926080" y="1371600"/>
+            <a:ext cx="1645920" cy="731520"/>
+          </a:xfrm>
+          <a:prstGeom prst="roundRect">
+            <a:avLst/>
+          </a:prstGeom>
+          <a:solidFill>
+            <a:srgbClr val="16A085"/>
+          </a:solidFill>
+          <a:ln>
+            <a:solidFill>
+              <a:srgbClr val="000000"/>
+            </a:solidFill>
+          </a:ln>
+        </p:spPr>
+        <p:style>
+          <a:lnRef idx="1">
+            <a:schemeClr val="accent1"/>
+          </a:lnRef>
+          <a:fillRef idx="3">
+            <a:schemeClr val="accent1"/>
+          </a:fillRef>
+          <a:effectRef idx="2">
+            <a:schemeClr val="accent1"/>
+          </a:effectRef>
+          <a:fontRef idx="minor">
+            <a:schemeClr val="lt1"/>
+          </a:fontRef>
+        </p:style>
+        <p:txBody>
+          <a:bodyPr rtlCol="0" anchor="ctr"/>
+          <a:lstStyle/>
+          <a:p>
+            <a:pPr algn="ctr">
+              <a:defRPr sz="1400">
+                <a:solidFill>
+                  <a:srgbClr val="FFFFFF"/>
+                </a:solidFill>
+              </a:defRPr>
+            </a:pPr>
+            <a:r>
+              <a:t>2. System</a:t>
+            </a:r>
+          </a:p>
+          <a:p>
+            <a:r>
+              <a:t>Design</a:t>
+            </a:r>
+          </a:p>
+        </p:txBody>
+      </p:sp>
+      <p:sp>
+        <p:nvSpPr>
+          <p:cNvPr id="6" name="Rounded Rectangle 5"/>
+          <p:cNvSpPr/>
+          <p:nvPr/>
+        </p:nvSpPr>
+        <p:spPr>
+          <a:xfrm>
+            <a:off x="4937760" y="1371600"/>
+            <a:ext cx="1645920" cy="731520"/>
+          </a:xfrm>
+          <a:prstGeom prst="roundRect">
+            <a:avLst/>
+          </a:prstGeom>
+          <a:solidFill>
+            <a:srgbClr val="16A085"/>
+          </a:solidFill>
+          <a:ln>
+            <a:solidFill>
+              <a:srgbClr val="000000"/>
+            </a:solidFill>
+          </a:ln>
+        </p:spPr>
+        <p:style>
+          <a:lnRef idx="1">
+            <a:schemeClr val="accent1"/>
+          </a:lnRef>
+          <a:fillRef idx="3">
+            <a:schemeClr val="accent1"/>
+          </a:fillRef>
+          <a:effectRef idx="2">
+            <a:schemeClr val="accent1"/>
+          </a:effectRef>
+          <a:fontRef idx="minor">
+            <a:schemeClr val="lt1"/>
+          </a:fontRef>
+        </p:style>
+        <p:txBody>
+          <a:bodyPr rtlCol="0" anchor="ctr"/>
+          <a:lstStyle/>
+          <a:p>
+            <a:pPr algn="ctr">
+              <a:defRPr sz="1400">
+                <a:solidFill>
+                  <a:srgbClr val="FFFFFF"/>
+                </a:solidFill>
+              </a:defRPr>
+            </a:pPr>
+            <a:r>
+              <a:t>3. Implementation</a:t>
+            </a:r>
+          </a:p>
+        </p:txBody>
+      </p:sp>
+      <p:sp>
+        <p:nvSpPr>
+          <p:cNvPr id="7" name="Rounded Rectangle 6"/>
+          <p:cNvSpPr/>
+          <p:nvPr/>
+        </p:nvSpPr>
+        <p:spPr>
+          <a:xfrm>
+            <a:off x="6949440" y="1371600"/>
+            <a:ext cx="1645920" cy="731520"/>
+          </a:xfrm>
+          <a:prstGeom prst="roundRect">
+            <a:avLst/>
+          </a:prstGeom>
+          <a:solidFill>
+            <a:srgbClr val="16A085"/>
+          </a:solidFill>
+          <a:ln>
+            <a:solidFill>
+              <a:srgbClr val="000000"/>
+            </a:solidFill>
+          </a:ln>
+        </p:spPr>
+        <p:style>
+          <a:lnRef idx="1">
+            <a:schemeClr val="accent1"/>
+          </a:lnRef>
+          <a:fillRef idx="3">
+            <a:schemeClr val="accent1"/>
+          </a:fillRef>
+          <a:effectRef idx="2">
+            <a:schemeClr val="accent1"/>
+          </a:effectRef>
+          <a:fontRef idx="minor">
+            <a:schemeClr val="lt1"/>
+          </a:fontRef>
+        </p:style>
+        <p:txBody>
+          <a:bodyPr rtlCol="0" anchor="ctr"/>
+          <a:lstStyle/>
+          <a:p>
+            <a:pPr algn="ctr">
+              <a:defRPr sz="1400">
+                <a:solidFill>
+                  <a:srgbClr val="FFFFFF"/>
+                </a:solidFill>
+              </a:defRPr>
+            </a:pPr>
+            <a:r>
+              <a:t>4. Evaluation</a:t>
+            </a:r>
+          </a:p>
+        </p:txBody>
+      </p:sp>
+      <p:sp>
+        <p:nvSpPr>
+          <p:cNvPr id="8" name="Right Arrow 7"/>
+          <p:cNvSpPr/>
+          <p:nvPr/>
+        </p:nvSpPr>
+        <p:spPr>
+          <a:xfrm>
+            <a:off x="2651760" y="1508760"/>
+            <a:ext cx="182880" cy="457200"/>
+          </a:xfrm>
+          <a:prstGeom prst="rightArrow">
+            <a:avLst/>
+          </a:prstGeom>
+          <a:solidFill>
+            <a:srgbClr val="2C3E50"/>
+          </a:solidFill>
+          <a:ln>
+            <a:solidFill>
+              <a:srgbClr val="000000"/>
+            </a:solidFill>
+          </a:ln>
+        </p:spPr>
+        <p:style>
+          <a:lnRef idx="1">
+            <a:schemeClr val="accent1"/>
+          </a:lnRef>
+          <a:fillRef idx="3">
+            <a:schemeClr val="accent1"/>
+          </a:fillRef>
+          <a:effectRef idx="2">
+            <a:schemeClr val="accent1"/>
+          </a:effectRef>
+          <a:fontRef idx="minor">
+            <a:schemeClr val="lt1"/>
+          </a:fontRef>
+        </p:style>
+        <p:txBody>
+          <a:bodyPr rtlCol="0" anchor="ctr"/>
+          <a:lstStyle/>
+          <a:p>
+            <a:pPr algn="ctr">
+              <a:defRPr sz="1200">
+                <a:solidFill>
+                  <a:srgbClr val="FFFFFF"/>
+                </a:solidFill>
+              </a:defRPr>
+            </a:pPr>
+          </a:p>
+        </p:txBody>
+      </p:sp>
+      <p:sp>
+        <p:nvSpPr>
+          <p:cNvPr id="9" name="Right Arrow 8"/>
+          <p:cNvSpPr/>
+          <p:nvPr/>
+        </p:nvSpPr>
+        <p:spPr>
+          <a:xfrm>
+            <a:off x="4663440" y="1508760"/>
+            <a:ext cx="182880" cy="457200"/>
+          </a:xfrm>
+          <a:prstGeom prst="rightArrow">
+            <a:avLst/>
+          </a:prstGeom>
+          <a:solidFill>
+            <a:srgbClr val="2C3E50"/>
+          </a:solidFill>
+          <a:ln>
+            <a:solidFill>
+              <a:srgbClr val="000000"/>
+            </a:solidFill>
+          </a:ln>
+        </p:spPr>
+        <p:style>
+          <a:lnRef idx="1">
+            <a:schemeClr val="accent1"/>
+          </a:lnRef>
+          <a:fillRef idx="3">
+            <a:schemeClr val="accent1"/>
+          </a:fillRef>
+          <a:effectRef idx="2">
+            <a:schemeClr val="accent1"/>
+          </a:effectRef>
+          <a:fontRef idx="minor">
+            <a:schemeClr val="lt1"/>
+          </a:fontRef>
+        </p:style>
+        <p:txBody>
+          <a:bodyPr rtlCol="0" anchor="ctr"/>
+          <a:lstStyle/>
+          <a:p>
+            <a:pPr algn="ctr">
+              <a:defRPr sz="1200">
+                <a:solidFill>
+                  <a:srgbClr val="FFFFFF"/>
+                </a:solidFill>
+              </a:defRPr>
+            </a:pPr>
+          </a:p>
+        </p:txBody>
+      </p:sp>
+      <p:sp>
+        <p:nvSpPr>
+          <p:cNvPr id="10" name="Right Arrow 9"/>
+          <p:cNvSpPr/>
+          <p:nvPr/>
+        </p:nvSpPr>
+        <p:spPr>
+          <a:xfrm>
+            <a:off x="6675120" y="1508760"/>
+            <a:ext cx="182880" cy="457200"/>
+          </a:xfrm>
+          <a:prstGeom prst="rightArrow">
+            <a:avLst/>
+          </a:prstGeom>
+          <a:solidFill>
+            <a:srgbClr val="2C3E50"/>
+          </a:solidFill>
+          <a:ln>
+            <a:solidFill>
+              <a:srgbClr val="000000"/>
+            </a:solidFill>
+          </a:ln>
+        </p:spPr>
+        <p:style>
+          <a:lnRef idx="1">
+            <a:schemeClr val="accent1"/>
+          </a:lnRef>
+          <a:fillRef idx="3">
+            <a:schemeClr val="accent1"/>
+          </a:fillRef>
+          <a:effectRef idx="2">
+            <a:schemeClr val="accent1"/>
+          </a:effectRef>
+          <a:fontRef idx="minor">
+            <a:schemeClr val="lt1"/>
+          </a:fontRef>
+        </p:style>
+        <p:txBody>
+          <a:bodyPr rtlCol="0" anchor="ctr"/>
+          <a:lstStyle/>
+          <a:p>
+            <a:pPr algn="ctr">
+              <a:defRPr sz="1200">
+                <a:solidFill>
+                  <a:srgbClr val="FFFFFF"/>
+                </a:solidFill>
+              </a:defRPr>
+            </a:pPr>
+          </a:p>
+        </p:txBody>
+      </p:sp>
+      <p:sp>
+        <p:nvSpPr>
+          <p:cNvPr id="11" name="Rectangle 10"/>
+          <p:cNvSpPr/>
+          <p:nvPr/>
+        </p:nvSpPr>
+        <p:spPr>
+          <a:xfrm>
+            <a:off x="457200" y="2377440"/>
+            <a:ext cx="8229600" cy="1097280"/>
           </a:xfrm>
           <a:prstGeom prst="rect">
             <a:avLst/>
           </a:prstGeom>
-          <a:noFill/>
-        </p:spPr>
-        <p:txBody>
-          <a:bodyPr wrap="none">
-            <a:spAutoFit/>
-          </a:bodyPr>
+          <a:solidFill>
+            <a:srgbClr val="ECF0F1"/>
+          </a:solidFill>
+          <a:ln>
+            <a:solidFill>
+              <a:srgbClr val="000000"/>
+            </a:solidFill>
+          </a:ln>
+        </p:spPr>
+        <p:style>
+          <a:lnRef idx="1">
+            <a:schemeClr val="accent1"/>
+          </a:lnRef>
+          <a:fillRef idx="3">
+            <a:schemeClr val="accent1"/>
+          </a:fillRef>
+          <a:effectRef idx="2">
+            <a:schemeClr val="accent1"/>
+          </a:effectRef>
+          <a:fontRef idx="minor">
+            <a:schemeClr val="lt1"/>
+          </a:fontRef>
+        </p:style>
+        <p:txBody>
+          <a:bodyPr rtlCol="0" anchor="ctr"/>
           <a:lstStyle/>
           <a:p>
             <a:pPr algn="ctr">
-              <a:defRPr sz="2400">
-                <a:solidFill>
-                  <a:srgbClr val="16A085"/>
+              <a:defRPr sz="1600">
+                <a:solidFill>
+                  <a:srgbClr val="34495E"/>
                 </a:solidFill>
               </a:defRPr>
             </a:pPr>
             <a:r>
-              <a:t>Design Science Research Approach</a:t>
-            </a:r>
-          </a:p>
-        </p:txBody>
-      </p:sp>
-      <p:sp>
-        <p:nvSpPr>
-          <p:cNvPr id="4" name="TextBox 3"/>
-          <p:cNvSpPr txBox="1"/>
+              <a:t>Design Science Research Approach with iterative development and evaluation</a:t>
+            </a:r>
+          </a:p>
+        </p:txBody>
+      </p:sp>
+      <p:sp>
+        <p:nvSpPr>
+          <p:cNvPr id="12" name="Rounded Rectangle 11"/>
+          <p:cNvSpPr/>
           <p:nvPr/>
         </p:nvSpPr>
         <p:spPr>
           <a:xfrm>
-            <a:off x="457200" y="1828800"/>
-            <a:ext cx="8229600" cy="2286000"/>
-          </a:xfrm>
-          <a:prstGeom prst="rect">
-            <a:avLst/>
-          </a:prstGeom>
-          <a:noFill/>
-        </p:spPr>
-        <p:txBody>
-          <a:bodyPr wrap="square">
-            <a:spAutoFit/>
-          </a:bodyPr>
-          <a:lstStyle/>
-          <a:p>
-            <a:pPr>
-              <a:defRPr sz="1800">
-                <a:solidFill>
-                  <a:srgbClr val="34495E"/>
-                </a:solidFill>
-              </a:defRPr>
-            </a:pPr>
-            <a:r>
-              <a:t>Phases:</a:t>
-            </a:r>
-          </a:p>
-          <a:p>
-            <a:r>
-              <a:t>1. Problem Analysis - OME testing challenges</a:t>
-            </a:r>
-          </a:p>
-          <a:p>
-            <a:r>
-              <a:t>2. System Design - Multi-agent architecture</a:t>
-            </a:r>
-          </a:p>
-          <a:p>
-            <a:r>
-              <a:t>3. Implementation - Standalone framework</a:t>
-            </a:r>
-          </a:p>
-          <a:p>
-            <a:r>
-              <a:t>4. Evaluation - Demo validation</a:t>
-            </a:r>
-          </a:p>
-          <a:p>
-            <a:r>
-              <a:t>5. Refinement - Feedback-driven improvements</a:t>
-            </a:r>
-          </a:p>
-        </p:txBody>
-      </p:sp>
-      <p:sp>
-        <p:nvSpPr>
-          <p:cNvPr id="5" name="TextBox 4"/>
-          <p:cNvSpPr txBox="1"/>
-          <p:nvPr/>
-        </p:nvSpPr>
-        <p:spPr>
-          <a:xfrm>
-            <a:off x="457200" y="4206240"/>
-            <a:ext cx="8229600" cy="2194560"/>
-          </a:xfrm>
-          <a:prstGeom prst="rect">
-            <a:avLst/>
-          </a:prstGeom>
-          <a:noFill/>
-        </p:spPr>
-        <p:txBody>
-          <a:bodyPr wrap="none">
-            <a:spAutoFit/>
-          </a:bodyPr>
+            <a:off x="457200" y="3657600"/>
+            <a:ext cx="8229600" cy="2743200"/>
+          </a:xfrm>
+          <a:prstGeom prst="roundRect">
+            <a:avLst/>
+          </a:prstGeom>
+          <a:solidFill>
+            <a:srgbClr val="F0F0F0"/>
+          </a:solidFill>
+          <a:ln w="25400">
+            <a:solidFill>
+              <a:srgbClr val="646464"/>
+            </a:solidFill>
+          </a:ln>
+        </p:spPr>
+        <p:style>
+          <a:lnRef idx="1">
+            <a:schemeClr val="accent1"/>
+          </a:lnRef>
+          <a:fillRef idx="3">
+            <a:schemeClr val="accent1"/>
+          </a:fillRef>
+          <a:effectRef idx="2">
+            <a:schemeClr val="accent1"/>
+          </a:effectRef>
+          <a:fontRef idx="minor">
+            <a:schemeClr val="lt1"/>
+          </a:fontRef>
+        </p:style>
+        <p:txBody>
+          <a:bodyPr rtlCol="0" anchor="ctr"/>
           <a:lstStyle/>
           <a:p>
             <a:pPr algn="ctr">
               <a:defRPr sz="1400" i="1">
                 <a:solidFill>
-                  <a:srgbClr val="969696"/>
+                  <a:srgbClr val="505050"/>
                 </a:solidFill>
               </a:defRPr>
             </a:pPr>
             <a:r>
-              <a:t>[INSERT: Research Methodology Flowchart]</a:t>
+              <a:t>[INSERT: Detailed Research Methodology Flowchart]</a:t>
+            </a:r>
+          </a:p>
+          <a:p>
+            <a:r>
+              <a:t>(Show evaluation framework and validation approach)</a:t>
             </a:r>
           </a:p>
         </p:txBody>
@@ -7426,14 +9687,65 @@
       <p:grpSpPr/>
       <p:sp>
         <p:nvSpPr>
-          <p:cNvPr id="2" name="TextBox 1"/>
+          <p:cNvPr id="2" name="Rectangle 1"/>
+          <p:cNvSpPr/>
+          <p:nvPr/>
+        </p:nvSpPr>
+        <p:spPr>
+          <a:xfrm>
+            <a:off x="0" y="0"/>
+            <a:ext cx="9144000" cy="914400"/>
+          </a:xfrm>
+          <a:prstGeom prst="rect">
+            <a:avLst/>
+          </a:prstGeom>
+          <a:solidFill>
+            <a:srgbClr val="2C3E50"/>
+          </a:solidFill>
+          <a:ln>
+            <a:solidFill>
+              <a:srgbClr val="000000"/>
+            </a:solidFill>
+          </a:ln>
+        </p:spPr>
+        <p:style>
+          <a:lnRef idx="1">
+            <a:schemeClr val="accent1"/>
+          </a:lnRef>
+          <a:fillRef idx="3">
+            <a:schemeClr val="accent1"/>
+          </a:fillRef>
+          <a:effectRef idx="2">
+            <a:schemeClr val="accent1"/>
+          </a:effectRef>
+          <a:fontRef idx="minor">
+            <a:schemeClr val="lt1"/>
+          </a:fontRef>
+        </p:style>
+        <p:txBody>
+          <a:bodyPr rtlCol="0" anchor="ctr"/>
+          <a:lstStyle/>
+          <a:p>
+            <a:pPr algn="ctr">
+              <a:defRPr sz="1600">
+                <a:solidFill>
+                  <a:srgbClr val="FFFFFF"/>
+                </a:solidFill>
+              </a:defRPr>
+            </a:pPr>
+          </a:p>
+        </p:txBody>
+      </p:sp>
+      <p:sp>
+        <p:nvSpPr>
+          <p:cNvPr id="3" name="TextBox 2"/>
           <p:cNvSpPr txBox="1"/>
           <p:nvPr/>
         </p:nvSpPr>
         <p:spPr>
           <a:xfrm>
-            <a:off x="457200" y="457200"/>
-            <a:ext cx="8229600" cy="731520"/>
+            <a:off x="457200" y="182880"/>
+            <a:ext cx="8229600" cy="548640"/>
           </a:xfrm>
           <a:prstGeom prst="rect">
             <a:avLst/>
@@ -7446,145 +9758,522 @@
           </a:bodyPr>
           <a:lstStyle/>
           <a:p>
+            <a:pPr>
+              <a:defRPr sz="3200" b="1">
+                <a:solidFill>
+                  <a:srgbClr val="FFFFFF"/>
+                </a:solidFill>
+              </a:defRPr>
+            </a:pPr>
+            <a:r>
+              <a:t>Multi-Agent Architecture</a:t>
+            </a:r>
+          </a:p>
+        </p:txBody>
+      </p:sp>
+      <p:sp>
+        <p:nvSpPr>
+          <p:cNvPr id="4" name="Rounded Rectangle 3"/>
+          <p:cNvSpPr/>
+          <p:nvPr/>
+        </p:nvSpPr>
+        <p:spPr>
+          <a:xfrm>
+            <a:off x="3657600" y="1371600"/>
+            <a:ext cx="1828800" cy="731520"/>
+          </a:xfrm>
+          <a:prstGeom prst="roundRect">
+            <a:avLst/>
+          </a:prstGeom>
+          <a:solidFill>
+            <a:srgbClr val="E67E22"/>
+          </a:solidFill>
+          <a:ln>
+            <a:solidFill>
+              <a:srgbClr val="000000"/>
+            </a:solidFill>
+          </a:ln>
+        </p:spPr>
+        <p:style>
+          <a:lnRef idx="1">
+            <a:schemeClr val="accent1"/>
+          </a:lnRef>
+          <a:fillRef idx="3">
+            <a:schemeClr val="accent1"/>
+          </a:fillRef>
+          <a:effectRef idx="2">
+            <a:schemeClr val="accent1"/>
+          </a:effectRef>
+          <a:fontRef idx="minor">
+            <a:schemeClr val="lt1"/>
+          </a:fontRef>
+        </p:style>
+        <p:txBody>
+          <a:bodyPr rtlCol="0" anchor="ctr"/>
+          <a:lstStyle/>
+          <a:p>
             <a:pPr algn="ctr">
-              <a:defRPr sz="3600" b="1">
-                <a:solidFill>
-                  <a:srgbClr val="2C3E50"/>
+              <a:defRPr sz="1400">
+                <a:solidFill>
+                  <a:srgbClr val="FFFFFF"/>
                 </a:solidFill>
               </a:defRPr>
             </a:pPr>
             <a:r>
-              <a:t>Multi-Agent Architecture</a:t>
-            </a:r>
-          </a:p>
-        </p:txBody>
-      </p:sp>
-      <p:sp>
-        <p:nvSpPr>
-          <p:cNvPr id="3" name="TextBox 2"/>
-          <p:cNvSpPr txBox="1"/>
+              <a:t>Orchestrator</a:t>
+            </a:r>
+          </a:p>
+          <a:p>
+            <a:r>
+              <a:t>Agent</a:t>
+            </a:r>
+          </a:p>
+        </p:txBody>
+      </p:sp>
+      <p:sp>
+        <p:nvSpPr>
+          <p:cNvPr id="5" name="Rounded Rectangle 4"/>
+          <p:cNvSpPr/>
           <p:nvPr/>
         </p:nvSpPr>
         <p:spPr>
           <a:xfrm>
-            <a:off x="457200" y="1371600"/>
-            <a:ext cx="3657600" cy="2743200"/>
-          </a:xfrm>
-          <a:prstGeom prst="rect">
-            <a:avLst/>
-          </a:prstGeom>
-          <a:noFill/>
-        </p:spPr>
-        <p:txBody>
-          <a:bodyPr wrap="square">
-            <a:spAutoFit/>
-          </a:bodyPr>
-          <a:lstStyle/>
-          <a:p>
-            <a:pPr>
+            <a:off x="914400" y="2743200"/>
+            <a:ext cx="1371600" cy="548640"/>
+          </a:xfrm>
+          <a:prstGeom prst="roundRect">
+            <a:avLst/>
+          </a:prstGeom>
+          <a:solidFill>
+            <a:srgbClr val="16A085"/>
+          </a:solidFill>
+          <a:ln>
+            <a:solidFill>
+              <a:srgbClr val="000000"/>
+            </a:solidFill>
+          </a:ln>
+        </p:spPr>
+        <p:style>
+          <a:lnRef idx="1">
+            <a:schemeClr val="accent1"/>
+          </a:lnRef>
+          <a:fillRef idx="3">
+            <a:schemeClr val="accent1"/>
+          </a:fillRef>
+          <a:effectRef idx="2">
+            <a:schemeClr val="accent1"/>
+          </a:effectRef>
+          <a:fontRef idx="minor">
+            <a:schemeClr val="lt1"/>
+          </a:fontRef>
+        </p:style>
+        <p:txBody>
+          <a:bodyPr rtlCol="0" anchor="ctr"/>
+          <a:lstStyle/>
+          <a:p>
+            <a:pPr algn="ctr">
+              <a:defRPr sz="1200">
+                <a:solidFill>
+                  <a:srgbClr val="FFFFFF"/>
+                </a:solidFill>
+              </a:defRPr>
+            </a:pPr>
+            <a:r>
+              <a:t>QTest</a:t>
+            </a:r>
+          </a:p>
+          <a:p>
+            <a:r>
+              <a:t>Agent</a:t>
+            </a:r>
+          </a:p>
+        </p:txBody>
+      </p:sp>
+      <p:sp>
+        <p:nvSpPr>
+          <p:cNvPr id="6" name="Rounded Rectangle 5"/>
+          <p:cNvSpPr/>
+          <p:nvPr/>
+        </p:nvSpPr>
+        <p:spPr>
+          <a:xfrm>
+            <a:off x="5943600" y="2743200"/>
+            <a:ext cx="1371600" cy="548640"/>
+          </a:xfrm>
+          <a:prstGeom prst="roundRect">
+            <a:avLst/>
+          </a:prstGeom>
+          <a:solidFill>
+            <a:srgbClr val="16A085"/>
+          </a:solidFill>
+          <a:ln>
+            <a:solidFill>
+              <a:srgbClr val="000000"/>
+            </a:solidFill>
+          </a:ln>
+        </p:spPr>
+        <p:style>
+          <a:lnRef idx="1">
+            <a:schemeClr val="accent1"/>
+          </a:lnRef>
+          <a:fillRef idx="3">
+            <a:schemeClr val="accent1"/>
+          </a:fillRef>
+          <a:effectRef idx="2">
+            <a:schemeClr val="accent1"/>
+          </a:effectRef>
+          <a:fontRef idx="minor">
+            <a:schemeClr val="lt1"/>
+          </a:fontRef>
+        </p:style>
+        <p:txBody>
+          <a:bodyPr rtlCol="0" anchor="ctr"/>
+          <a:lstStyle/>
+          <a:p>
+            <a:pPr algn="ctr">
+              <a:defRPr sz="1200">
+                <a:solidFill>
+                  <a:srgbClr val="FFFFFF"/>
+                </a:solidFill>
+              </a:defRPr>
+            </a:pPr>
+            <a:r>
+              <a:t>Test</a:t>
+            </a:r>
+          </a:p>
+          <a:p>
+            <a:r>
+              <a:t>Generator</a:t>
+            </a:r>
+          </a:p>
+        </p:txBody>
+      </p:sp>
+      <p:sp>
+        <p:nvSpPr>
+          <p:cNvPr id="7" name="Rounded Rectangle 6"/>
+          <p:cNvSpPr/>
+          <p:nvPr/>
+        </p:nvSpPr>
+        <p:spPr>
+          <a:xfrm>
+            <a:off x="3657600" y="3840480"/>
+            <a:ext cx="1828800" cy="548640"/>
+          </a:xfrm>
+          <a:prstGeom prst="roundRect">
+            <a:avLst/>
+          </a:prstGeom>
+          <a:solidFill>
+            <a:srgbClr val="16A085"/>
+          </a:solidFill>
+          <a:ln>
+            <a:solidFill>
+              <a:srgbClr val="000000"/>
+            </a:solidFill>
+          </a:ln>
+        </p:spPr>
+        <p:style>
+          <a:lnRef idx="1">
+            <a:schemeClr val="accent1"/>
+          </a:lnRef>
+          <a:fillRef idx="3">
+            <a:schemeClr val="accent1"/>
+          </a:fillRef>
+          <a:effectRef idx="2">
+            <a:schemeClr val="accent1"/>
+          </a:effectRef>
+          <a:fontRef idx="minor">
+            <a:schemeClr val="lt1"/>
+          </a:fontRef>
+        </p:style>
+        <p:txBody>
+          <a:bodyPr rtlCol="0" anchor="ctr"/>
+          <a:lstStyle/>
+          <a:p>
+            <a:pPr algn="ctr">
+              <a:defRPr sz="1200">
+                <a:solidFill>
+                  <a:srgbClr val="FFFFFF"/>
+                </a:solidFill>
+              </a:defRPr>
+            </a:pPr>
+            <a:r>
+              <a:t>Test</a:t>
+            </a:r>
+          </a:p>
+          <a:p>
+            <a:r>
+              <a:t>Executor</a:t>
+            </a:r>
+          </a:p>
+        </p:txBody>
+      </p:sp>
+      <p:sp>
+        <p:nvSpPr>
+          <p:cNvPr id="8" name="Rounded Rectangle 7"/>
+          <p:cNvSpPr/>
+          <p:nvPr/>
+        </p:nvSpPr>
+        <p:spPr>
+          <a:xfrm>
+            <a:off x="3657600" y="4754880"/>
+            <a:ext cx="1828800" cy="548640"/>
+          </a:xfrm>
+          <a:prstGeom prst="roundRect">
+            <a:avLst/>
+          </a:prstGeom>
+          <a:solidFill>
+            <a:srgbClr val="16A085"/>
+          </a:solidFill>
+          <a:ln>
+            <a:solidFill>
+              <a:srgbClr val="000000"/>
+            </a:solidFill>
+          </a:ln>
+        </p:spPr>
+        <p:style>
+          <a:lnRef idx="1">
+            <a:schemeClr val="accent1"/>
+          </a:lnRef>
+          <a:fillRef idx="3">
+            <a:schemeClr val="accent1"/>
+          </a:fillRef>
+          <a:effectRef idx="2">
+            <a:schemeClr val="accent1"/>
+          </a:effectRef>
+          <a:fontRef idx="minor">
+            <a:schemeClr val="lt1"/>
+          </a:fontRef>
+        </p:style>
+        <p:txBody>
+          <a:bodyPr rtlCol="0" anchor="ctr"/>
+          <a:lstStyle/>
+          <a:p>
+            <a:pPr algn="ctr">
+              <a:defRPr sz="1200">
+                <a:solidFill>
+                  <a:srgbClr val="FFFFFF"/>
+                </a:solidFill>
+              </a:defRPr>
+            </a:pPr>
+            <a:r>
+              <a:t>Fixer</a:t>
+            </a:r>
+          </a:p>
+          <a:p>
+            <a:r>
+              <a:t>Agent</a:t>
+            </a:r>
+          </a:p>
+        </p:txBody>
+      </p:sp>
+      <p:sp>
+        <p:nvSpPr>
+          <p:cNvPr id="9" name="Down Arrow 8"/>
+          <p:cNvSpPr/>
+          <p:nvPr/>
+        </p:nvSpPr>
+        <p:spPr>
+          <a:xfrm>
+            <a:off x="4114800" y="2194560"/>
+            <a:ext cx="182880" cy="365760"/>
+          </a:xfrm>
+          <a:prstGeom prst="downArrow">
+            <a:avLst/>
+          </a:prstGeom>
+          <a:solidFill>
+            <a:srgbClr val="2C3E50"/>
+          </a:solidFill>
+          <a:ln>
+            <a:solidFill>
+              <a:srgbClr val="000000"/>
+            </a:solidFill>
+          </a:ln>
+        </p:spPr>
+        <p:style>
+          <a:lnRef idx="1">
+            <a:schemeClr val="accent1"/>
+          </a:lnRef>
+          <a:fillRef idx="3">
+            <a:schemeClr val="accent1"/>
+          </a:fillRef>
+          <a:effectRef idx="2">
+            <a:schemeClr val="accent1"/>
+          </a:effectRef>
+          <a:fontRef idx="minor">
+            <a:schemeClr val="lt1"/>
+          </a:fontRef>
+        </p:style>
+        <p:txBody>
+          <a:bodyPr rtlCol="0" anchor="ctr"/>
+          <a:lstStyle/>
+          <a:p>
+            <a:pPr algn="ctr">
               <a:defRPr sz="1800">
                 <a:solidFill>
-                  <a:srgbClr val="34495E"/>
+                  <a:srgbClr val="FFFFFF"/>
                 </a:solidFill>
               </a:defRPr>
             </a:pPr>
-            <a:r>
-              <a:t>Components:</a:t>
-            </a:r>
-          </a:p>
-          <a:p>
-            <a:r>
-              <a:t>• Orchestrator Agent - Pipeline coordination</a:t>
-            </a:r>
-          </a:p>
-          <a:p>
-            <a:r>
-              <a:t>• QTest Agent - Test case management</a:t>
-            </a:r>
-          </a:p>
-          <a:p>
-            <a:r>
-              <a:t>• Simple Test Generator - Code generation</a:t>
-            </a:r>
-          </a:p>
-          <a:p>
-            <a:r>
-              <a:t>• Test Executor Agent - Pytest execution</a:t>
-            </a:r>
-          </a:p>
-          <a:p>
-            <a:r>
-              <a:t>• Fixer Agent - Failure analysis</a:t>
-            </a:r>
-          </a:p>
-        </p:txBody>
-      </p:sp>
-      <p:sp>
-        <p:nvSpPr>
-          <p:cNvPr id="4" name="TextBox 3"/>
-          <p:cNvSpPr txBox="1"/>
+          </a:p>
+        </p:txBody>
+      </p:sp>
+      <p:sp>
+        <p:nvSpPr>
+          <p:cNvPr id="10" name="Down Arrow 9"/>
+          <p:cNvSpPr/>
           <p:nvPr/>
         </p:nvSpPr>
         <p:spPr>
           <a:xfrm>
-            <a:off x="4114800" y="1371600"/>
-            <a:ext cx="4572000" cy="2743200"/>
-          </a:xfrm>
-          <a:prstGeom prst="rect">
-            <a:avLst/>
-          </a:prstGeom>
-          <a:noFill/>
-        </p:spPr>
-        <p:txBody>
-          <a:bodyPr wrap="none">
-            <a:spAutoFit/>
-          </a:bodyPr>
+            <a:off x="4114800" y="3474720"/>
+            <a:ext cx="182880" cy="365760"/>
+          </a:xfrm>
+          <a:prstGeom prst="downArrow">
+            <a:avLst/>
+          </a:prstGeom>
+          <a:solidFill>
+            <a:srgbClr val="2C3E50"/>
+          </a:solidFill>
+          <a:ln>
+            <a:solidFill>
+              <a:srgbClr val="000000"/>
+            </a:solidFill>
+          </a:ln>
+        </p:spPr>
+        <p:style>
+          <a:lnRef idx="1">
+            <a:schemeClr val="accent1"/>
+          </a:lnRef>
+          <a:fillRef idx="3">
+            <a:schemeClr val="accent1"/>
+          </a:fillRef>
+          <a:effectRef idx="2">
+            <a:schemeClr val="accent1"/>
+          </a:effectRef>
+          <a:fontRef idx="minor">
+            <a:schemeClr val="lt1"/>
+          </a:fontRef>
+        </p:style>
+        <p:txBody>
+          <a:bodyPr rtlCol="0" anchor="ctr"/>
+          <a:lstStyle/>
+          <a:p>
+            <a:pPr algn="ctr">
+              <a:defRPr sz="1800">
+                <a:solidFill>
+                  <a:srgbClr val="FFFFFF"/>
+                </a:solidFill>
+              </a:defRPr>
+            </a:pPr>
+          </a:p>
+        </p:txBody>
+      </p:sp>
+      <p:sp>
+        <p:nvSpPr>
+          <p:cNvPr id="11" name="Down Arrow 10"/>
+          <p:cNvSpPr/>
+          <p:nvPr/>
+        </p:nvSpPr>
+        <p:spPr>
+          <a:xfrm>
+            <a:off x="4114800" y="4389120"/>
+            <a:ext cx="182880" cy="365760"/>
+          </a:xfrm>
+          <a:prstGeom prst="downArrow">
+            <a:avLst/>
+          </a:prstGeom>
+          <a:solidFill>
+            <a:srgbClr val="2C3E50"/>
+          </a:solidFill>
+          <a:ln>
+            <a:solidFill>
+              <a:srgbClr val="000000"/>
+            </a:solidFill>
+          </a:ln>
+        </p:spPr>
+        <p:style>
+          <a:lnRef idx="1">
+            <a:schemeClr val="accent1"/>
+          </a:lnRef>
+          <a:fillRef idx="3">
+            <a:schemeClr val="accent1"/>
+          </a:fillRef>
+          <a:effectRef idx="2">
+            <a:schemeClr val="accent1"/>
+          </a:effectRef>
+          <a:fontRef idx="minor">
+            <a:schemeClr val="lt1"/>
+          </a:fontRef>
+        </p:style>
+        <p:txBody>
+          <a:bodyPr rtlCol="0" anchor="ctr"/>
+          <a:lstStyle/>
+          <a:p>
+            <a:pPr algn="ctr">
+              <a:defRPr sz="1800">
+                <a:solidFill>
+                  <a:srgbClr val="FFFFFF"/>
+                </a:solidFill>
+              </a:defRPr>
+            </a:pPr>
+          </a:p>
+        </p:txBody>
+      </p:sp>
+      <p:sp>
+        <p:nvSpPr>
+          <p:cNvPr id="12" name="Rounded Rectangle 11"/>
+          <p:cNvSpPr/>
+          <p:nvPr/>
+        </p:nvSpPr>
+        <p:spPr>
+          <a:xfrm>
+            <a:off x="457200" y="5303520"/>
+            <a:ext cx="8229600" cy="1280160"/>
+          </a:xfrm>
+          <a:prstGeom prst="roundRect">
+            <a:avLst/>
+          </a:prstGeom>
+          <a:solidFill>
+            <a:srgbClr val="F0F0F0"/>
+          </a:solidFill>
+          <a:ln w="25400">
+            <a:solidFill>
+              <a:srgbClr val="646464"/>
+            </a:solidFill>
+          </a:ln>
+        </p:spPr>
+        <p:style>
+          <a:lnRef idx="1">
+            <a:schemeClr val="accent1"/>
+          </a:lnRef>
+          <a:fillRef idx="3">
+            <a:schemeClr val="accent1"/>
+          </a:fillRef>
+          <a:effectRef idx="2">
+            <a:schemeClr val="accent1"/>
+          </a:effectRef>
+          <a:fontRef idx="minor">
+            <a:schemeClr val="lt1"/>
+          </a:fontRef>
+        </p:style>
+        <p:txBody>
+          <a:bodyPr rtlCol="0" anchor="ctr"/>
           <a:lstStyle/>
           <a:p>
             <a:pPr algn="ctr">
               <a:defRPr sz="1400" i="1">
                 <a:solidFill>
-                  <a:srgbClr val="969696"/>
+                  <a:srgbClr val="505050"/>
                 </a:solidFill>
               </a:defRPr>
             </a:pPr>
             <a:r>
-              <a:t>[INSERT: Multi-Agent Architecture Diagram]</a:t>
-            </a:r>
-          </a:p>
-        </p:txBody>
-      </p:sp>
-      <p:sp>
-        <p:nvSpPr>
-          <p:cNvPr id="5" name="TextBox 4"/>
-          <p:cNvSpPr txBox="1"/>
-          <p:nvPr/>
-        </p:nvSpPr>
-        <p:spPr>
-          <a:xfrm>
-            <a:off x="457200" y="4206240"/>
-            <a:ext cx="8229600" cy="2194560"/>
-          </a:xfrm>
-          <a:prstGeom prst="rect">
-            <a:avLst/>
-          </a:prstGeom>
-          <a:noFill/>
-        </p:spPr>
-        <p:txBody>
-          <a:bodyPr wrap="none">
-            <a:spAutoFit/>
-          </a:bodyPr>
-          <a:lstStyle/>
-          <a:p>
-            <a:pPr algn="ctr">
-              <a:defRPr sz="1400" i="1">
-                <a:solidFill>
-                  <a:srgbClr val="969696"/>
-                </a:solidFill>
-              </a:defRPr>
-            </a:pPr>
-            <a:r>
-              <a:t>[INSERT: Agent Interaction Flow]</a:t>
+              <a:t>[INSERT: Detailed Multi-Agent Architecture Diagram]</a:t>
+            </a:r>
+          </a:p>
+          <a:p>
+            <a:r>
+              <a:t>(Show agent interactions and data flow)</a:t>
             </a:r>
           </a:p>
         </p:txBody>
@@ -7609,14 +10298,65 @@
       <p:grpSpPr/>
       <p:sp>
         <p:nvSpPr>
-          <p:cNvPr id="2" name="TextBox 1"/>
+          <p:cNvPr id="2" name="Rectangle 1"/>
+          <p:cNvSpPr/>
+          <p:nvPr/>
+        </p:nvSpPr>
+        <p:spPr>
+          <a:xfrm>
+            <a:off x="0" y="0"/>
+            <a:ext cx="9144000" cy="914400"/>
+          </a:xfrm>
+          <a:prstGeom prst="rect">
+            <a:avLst/>
+          </a:prstGeom>
+          <a:solidFill>
+            <a:srgbClr val="2C3E50"/>
+          </a:solidFill>
+          <a:ln>
+            <a:solidFill>
+              <a:srgbClr val="000000"/>
+            </a:solidFill>
+          </a:ln>
+        </p:spPr>
+        <p:style>
+          <a:lnRef idx="1">
+            <a:schemeClr val="accent1"/>
+          </a:lnRef>
+          <a:fillRef idx="3">
+            <a:schemeClr val="accent1"/>
+          </a:fillRef>
+          <a:effectRef idx="2">
+            <a:schemeClr val="accent1"/>
+          </a:effectRef>
+          <a:fontRef idx="minor">
+            <a:schemeClr val="lt1"/>
+          </a:fontRef>
+        </p:style>
+        <p:txBody>
+          <a:bodyPr rtlCol="0" anchor="ctr"/>
+          <a:lstStyle/>
+          <a:p>
+            <a:pPr algn="ctr">
+              <a:defRPr sz="1600">
+                <a:solidFill>
+                  <a:srgbClr val="FFFFFF"/>
+                </a:solidFill>
+              </a:defRPr>
+            </a:pPr>
+          </a:p>
+        </p:txBody>
+      </p:sp>
+      <p:sp>
+        <p:nvSpPr>
+          <p:cNvPr id="3" name="TextBox 2"/>
           <p:cNvSpPr txBox="1"/>
           <p:nvPr/>
         </p:nvSpPr>
         <p:spPr>
           <a:xfrm>
-            <a:off x="457200" y="457200"/>
-            <a:ext cx="8229600" cy="731520"/>
+            <a:off x="457200" y="182880"/>
+            <a:ext cx="8229600" cy="548640"/>
           </a:xfrm>
           <a:prstGeom prst="rect">
             <a:avLst/>
@@ -7629,160 +10369,305 @@
           </a:bodyPr>
           <a:lstStyle/>
           <a:p>
+            <a:pPr>
+              <a:defRPr sz="3200" b="1">
+                <a:solidFill>
+                  <a:srgbClr val="FFFFFF"/>
+                </a:solidFill>
+              </a:defRPr>
+            </a:pPr>
+            <a:r>
+              <a:t>Standalone Test Framework</a:t>
+            </a:r>
+          </a:p>
+        </p:txBody>
+      </p:sp>
+      <p:sp>
+        <p:nvSpPr>
+          <p:cNvPr id="4" name="Rectangle 3"/>
+          <p:cNvSpPr/>
+          <p:nvPr/>
+        </p:nvSpPr>
+        <p:spPr>
+          <a:xfrm>
+            <a:off x="457200" y="1371600"/>
+            <a:ext cx="2743200" cy="914400"/>
+          </a:xfrm>
+          <a:prstGeom prst="rect">
+            <a:avLst/>
+          </a:prstGeom>
+          <a:solidFill>
+            <a:srgbClr val="FFE6E6"/>
+          </a:solidFill>
+          <a:ln>
+            <a:solidFill>
+              <a:srgbClr val="000000"/>
+            </a:solidFill>
+          </a:ln>
+        </p:spPr>
+        <p:style>
+          <a:lnRef idx="1">
+            <a:schemeClr val="accent1"/>
+          </a:lnRef>
+          <a:fillRef idx="3">
+            <a:schemeClr val="accent1"/>
+          </a:fillRef>
+          <a:effectRef idx="2">
+            <a:schemeClr val="accent1"/>
+          </a:effectRef>
+          <a:fontRef idx="minor">
+            <a:schemeClr val="lt1"/>
+          </a:fontRef>
+        </p:style>
+        <p:txBody>
+          <a:bodyPr rtlCol="0" anchor="ctr"/>
+          <a:lstStyle/>
+          <a:p>
             <a:pPr algn="ctr">
-              <a:defRPr sz="3600" b="1">
-                <a:solidFill>
-                  <a:srgbClr val="2C3E50"/>
+              <a:defRPr sz="1600">
+                <a:solidFill>
+                  <a:srgbClr val="C0392B"/>
                 </a:solidFill>
               </a:defRPr>
             </a:pPr>
             <a:r>
-              <a:t>Standalone Test Framework</a:t>
-            </a:r>
-          </a:p>
-        </p:txBody>
-      </p:sp>
-      <p:sp>
-        <p:nvSpPr>
-          <p:cNvPr id="3" name="TextBox 2"/>
-          <p:cNvSpPr txBox="1"/>
+              <a:t>BaseTestCase</a:t>
+            </a:r>
+          </a:p>
+          <a:p>
+            <a:r>
+              <a:t>(Foundation)</a:t>
+            </a:r>
+          </a:p>
+        </p:txBody>
+      </p:sp>
+      <p:sp>
+        <p:nvSpPr>
+          <p:cNvPr id="5" name="Rectangle 4"/>
+          <p:cNvSpPr/>
           <p:nvPr/>
         </p:nvSpPr>
         <p:spPr>
           <a:xfrm>
-            <a:off x="457200" y="1371600"/>
-            <a:ext cx="3657600" cy="2286000"/>
+            <a:off x="3200400" y="1371600"/>
+            <a:ext cx="2743200" cy="914400"/>
           </a:xfrm>
           <a:prstGeom prst="rect">
             <a:avLst/>
           </a:prstGeom>
-          <a:noFill/>
-        </p:spPr>
-        <p:txBody>
-          <a:bodyPr wrap="square">
-            <a:spAutoFit/>
-          </a:bodyPr>
-          <a:lstStyle/>
-          <a:p>
-            <a:pPr>
-              <a:defRPr sz="1800">
+          <a:solidFill>
+            <a:srgbClr val="E6FFE6"/>
+          </a:solidFill>
+          <a:ln>
+            <a:solidFill>
+              <a:srgbClr val="000000"/>
+            </a:solidFill>
+          </a:ln>
+        </p:spPr>
+        <p:style>
+          <a:lnRef idx="1">
+            <a:schemeClr val="accent1"/>
+          </a:lnRef>
+          <a:fillRef idx="3">
+            <a:schemeClr val="accent1"/>
+          </a:fillRef>
+          <a:effectRef idx="2">
+            <a:schemeClr val="accent1"/>
+          </a:effectRef>
+          <a:fontRef idx="minor">
+            <a:schemeClr val="lt1"/>
+          </a:fontRef>
+        </p:style>
+        <p:txBody>
+          <a:bodyPr rtlCol="0" anchor="ctr"/>
+          <a:lstStyle/>
+          <a:p>
+            <a:pPr algn="ctr">
+              <a:defRPr sz="1600">
+                <a:solidFill>
+                  <a:srgbClr val="27AE60"/>
+                </a:solidFill>
+              </a:defRPr>
+            </a:pPr>
+            <a:r>
+              <a:t>MockAPIClient</a:t>
+            </a:r>
+          </a:p>
+          <a:p>
+            <a:r>
+              <a:t>(Simulates OME)</a:t>
+            </a:r>
+          </a:p>
+        </p:txBody>
+      </p:sp>
+      <p:sp>
+        <p:nvSpPr>
+          <p:cNvPr id="6" name="Rectangle 5"/>
+          <p:cNvSpPr/>
+          <p:nvPr/>
+        </p:nvSpPr>
+        <p:spPr>
+          <a:xfrm>
+            <a:off x="5943600" y="1371600"/>
+            <a:ext cx="2743200" cy="914400"/>
+          </a:xfrm>
+          <a:prstGeom prst="rect">
+            <a:avLst/>
+          </a:prstGeom>
+          <a:solidFill>
+            <a:srgbClr val="E6FFE6"/>
+          </a:solidFill>
+          <a:ln>
+            <a:solidFill>
+              <a:srgbClr val="000000"/>
+            </a:solidFill>
+          </a:ln>
+        </p:spPr>
+        <p:style>
+          <a:lnRef idx="1">
+            <a:schemeClr val="accent1"/>
+          </a:lnRef>
+          <a:fillRef idx="3">
+            <a:schemeClr val="accent1"/>
+          </a:fillRef>
+          <a:effectRef idx="2">
+            <a:schemeClr val="accent1"/>
+          </a:effectRef>
+          <a:fontRef idx="minor">
+            <a:schemeClr val="lt1"/>
+          </a:fontRef>
+        </p:style>
+        <p:txBody>
+          <a:bodyPr rtlCol="0" anchor="ctr"/>
+          <a:lstStyle/>
+          <a:p>
+            <a:pPr algn="ctr">
+              <a:defRPr sz="1600">
+                <a:solidFill>
+                  <a:srgbClr val="27AE60"/>
+                </a:solidFill>
+              </a:defRPr>
+            </a:pPr>
+            <a:r>
+              <a:t>Assertion</a:t>
+            </a:r>
+          </a:p>
+          <a:p>
+            <a:r>
+              <a:t>Utilities</a:t>
+            </a:r>
+          </a:p>
+        </p:txBody>
+      </p:sp>
+      <p:sp>
+        <p:nvSpPr>
+          <p:cNvPr id="7" name="Rectangle 6"/>
+          <p:cNvSpPr/>
+          <p:nvPr/>
+        </p:nvSpPr>
+        <p:spPr>
+          <a:xfrm>
+            <a:off x="457200" y="2560320"/>
+            <a:ext cx="8229600" cy="914400"/>
+          </a:xfrm>
+          <a:prstGeom prst="rect">
+            <a:avLst/>
+          </a:prstGeom>
+          <a:solidFill>
+            <a:srgbClr val="ECF0F1"/>
+          </a:solidFill>
+          <a:ln>
+            <a:solidFill>
+              <a:srgbClr val="000000"/>
+            </a:solidFill>
+          </a:ln>
+        </p:spPr>
+        <p:style>
+          <a:lnRef idx="1">
+            <a:schemeClr val="accent1"/>
+          </a:lnRef>
+          <a:fillRef idx="3">
+            <a:schemeClr val="accent1"/>
+          </a:fillRef>
+          <a:effectRef idx="2">
+            <a:schemeClr val="accent1"/>
+          </a:effectRef>
+          <a:fontRef idx="minor">
+            <a:schemeClr val="lt1"/>
+          </a:fontRef>
+        </p:style>
+        <p:txBody>
+          <a:bodyPr rtlCol="0" anchor="ctr"/>
+          <a:lstStyle/>
+          <a:p>
+            <a:pPr algn="ctr">
+              <a:defRPr sz="1600">
                 <a:solidFill>
                   <a:srgbClr val="34495E"/>
                 </a:solidFill>
               </a:defRPr>
             </a:pPr>
             <a:r>
-              <a:t>Components:</a:t>
-            </a:r>
-          </a:p>
-          <a:p>
-            <a:r>
-              <a:t>• BaseTestCase - Foundation for all tests</a:t>
-            </a:r>
-          </a:p>
-          <a:p>
-            <a:r>
-              <a:t>• MockAPIClient - Simulates OME API</a:t>
-            </a:r>
-          </a:p>
-          <a:p>
-            <a:r>
-              <a:t>• Assertion Utilities - Custom helpers</a:t>
-            </a:r>
-          </a:p>
-          <a:p>
-            <a:r>
-              <a:t>• Test Data Management - Parameter handling</a:t>
-            </a:r>
-          </a:p>
-        </p:txBody>
-      </p:sp>
-      <p:sp>
-        <p:nvSpPr>
-          <p:cNvPr id="4" name="TextBox 3"/>
-          <p:cNvSpPr txBox="1"/>
+              <a:t>Key Features: No Atlas dependencies • Pytest-compatible • Self-contained • Mock API for offline execution</a:t>
+            </a:r>
+          </a:p>
+        </p:txBody>
+      </p:sp>
+      <p:sp>
+        <p:nvSpPr>
+          <p:cNvPr id="8" name="Rounded Rectangle 7"/>
+          <p:cNvSpPr/>
           <p:nvPr/>
         </p:nvSpPr>
         <p:spPr>
           <a:xfrm>
-            <a:off x="4572000" y="1371600"/>
-            <a:ext cx="4114800" cy="2286000"/>
-          </a:xfrm>
-          <a:prstGeom prst="rect">
-            <a:avLst/>
-          </a:prstGeom>
-          <a:noFill/>
-        </p:spPr>
-        <p:txBody>
-          <a:bodyPr wrap="square">
-            <a:spAutoFit/>
-          </a:bodyPr>
-          <a:lstStyle/>
-          <a:p>
-            <a:pPr>
-              <a:defRPr sz="1800">
-                <a:solidFill>
-                  <a:srgbClr val="16A085"/>
-                </a:solidFill>
-              </a:defRPr>
-            </a:pPr>
-            <a:r>
-              <a:t>Key Features:</a:t>
-            </a:r>
-          </a:p>
-          <a:p>
-            <a:r>
-              <a:t>• No Atlas framework dependencies</a:t>
-            </a:r>
-          </a:p>
-          <a:p>
-            <a:r>
-              <a:t>• Pytest-compatible</a:t>
-            </a:r>
-          </a:p>
-          <a:p>
-            <a:r>
-              <a:t>• Self-contained and portable</a:t>
-            </a:r>
-          </a:p>
-          <a:p>
-            <a:r>
-              <a:t>• Mock API for offline execution</a:t>
-            </a:r>
-          </a:p>
-        </p:txBody>
-      </p:sp>
-      <p:sp>
-        <p:nvSpPr>
-          <p:cNvPr id="5" name="TextBox 4"/>
-          <p:cNvSpPr txBox="1"/>
-          <p:nvPr/>
-        </p:nvSpPr>
-        <p:spPr>
-          <a:xfrm>
-            <a:off x="457200" y="3840480"/>
-            <a:ext cx="8229600" cy="2560320"/>
-          </a:xfrm>
-          <a:prstGeom prst="rect">
-            <a:avLst/>
-          </a:prstGeom>
-          <a:noFill/>
-        </p:spPr>
-        <p:txBody>
-          <a:bodyPr wrap="none">
-            <a:spAutoFit/>
-          </a:bodyPr>
+            <a:off x="457200" y="3657600"/>
+            <a:ext cx="8229600" cy="2926080"/>
+          </a:xfrm>
+          <a:prstGeom prst="roundRect">
+            <a:avLst/>
+          </a:prstGeom>
+          <a:solidFill>
+            <a:srgbClr val="F0F0F0"/>
+          </a:solidFill>
+          <a:ln w="25400">
+            <a:solidFill>
+              <a:srgbClr val="646464"/>
+            </a:solidFill>
+          </a:ln>
+        </p:spPr>
+        <p:style>
+          <a:lnRef idx="1">
+            <a:schemeClr val="accent1"/>
+          </a:lnRef>
+          <a:fillRef idx="3">
+            <a:schemeClr val="accent1"/>
+          </a:fillRef>
+          <a:effectRef idx="2">
+            <a:schemeClr val="accent1"/>
+          </a:effectRef>
+          <a:fontRef idx="minor">
+            <a:schemeClr val="lt1"/>
+          </a:fontRef>
+        </p:style>
+        <p:txBody>
+          <a:bodyPr rtlCol="0" anchor="ctr"/>
           <a:lstStyle/>
           <a:p>
             <a:pPr algn="ctr">
               <a:defRPr sz="1400" i="1">
                 <a:solidFill>
-                  <a:srgbClr val="969696"/>
+                  <a:srgbClr val="505050"/>
                 </a:solidFill>
               </a:defRPr>
             </a:pPr>
             <a:r>
               <a:t>[INSERT: Framework Class Diagram]</a:t>
+            </a:r>
+          </a:p>
+          <a:p>
+            <a:r>
+              <a:t>(Show BaseTestCase, MockAPIClient, assertion utilities)</a:t>
             </a:r>
           </a:p>
         </p:txBody>
@@ -7807,14 +10692,65 @@
       <p:grpSpPr/>
       <p:sp>
         <p:nvSpPr>
-          <p:cNvPr id="2" name="TextBox 1"/>
+          <p:cNvPr id="2" name="Rectangle 1"/>
+          <p:cNvSpPr/>
+          <p:nvPr/>
+        </p:nvSpPr>
+        <p:spPr>
+          <a:xfrm>
+            <a:off x="0" y="0"/>
+            <a:ext cx="9144000" cy="914400"/>
+          </a:xfrm>
+          <a:prstGeom prst="rect">
+            <a:avLst/>
+          </a:prstGeom>
+          <a:solidFill>
+            <a:srgbClr val="2C3E50"/>
+          </a:solidFill>
+          <a:ln>
+            <a:solidFill>
+              <a:srgbClr val="000000"/>
+            </a:solidFill>
+          </a:ln>
+        </p:spPr>
+        <p:style>
+          <a:lnRef idx="1">
+            <a:schemeClr val="accent1"/>
+          </a:lnRef>
+          <a:fillRef idx="3">
+            <a:schemeClr val="accent1"/>
+          </a:fillRef>
+          <a:effectRef idx="2">
+            <a:schemeClr val="accent1"/>
+          </a:effectRef>
+          <a:fontRef idx="minor">
+            <a:schemeClr val="lt1"/>
+          </a:fontRef>
+        </p:style>
+        <p:txBody>
+          <a:bodyPr rtlCol="0" anchor="ctr"/>
+          <a:lstStyle/>
+          <a:p>
+            <a:pPr algn="ctr">
+              <a:defRPr sz="1600">
+                <a:solidFill>
+                  <a:srgbClr val="FFFFFF"/>
+                </a:solidFill>
+              </a:defRPr>
+            </a:pPr>
+          </a:p>
+        </p:txBody>
+      </p:sp>
+      <p:sp>
+        <p:nvSpPr>
+          <p:cNvPr id="3" name="TextBox 2"/>
           <p:cNvSpPr txBox="1"/>
           <p:nvPr/>
         </p:nvSpPr>
         <p:spPr>
           <a:xfrm>
-            <a:off x="457200" y="457200"/>
-            <a:ext cx="8229600" cy="731520"/>
+            <a:off x="457200" y="182880"/>
+            <a:ext cx="8229600" cy="548640"/>
           </a:xfrm>
           <a:prstGeom prst="rect">
             <a:avLst/>
@@ -7827,115 +10763,653 @@
           </a:bodyPr>
           <a:lstStyle/>
           <a:p>
+            <a:pPr>
+              <a:defRPr sz="3200" b="1">
+                <a:solidFill>
+                  <a:srgbClr val="FFFFFF"/>
+                </a:solidFill>
+              </a:defRPr>
+            </a:pPr>
+            <a:r>
+              <a:t>Test Generation Workflow</a:t>
+            </a:r>
+          </a:p>
+        </p:txBody>
+      </p:sp>
+      <p:sp>
+        <p:nvSpPr>
+          <p:cNvPr id="4" name="Rounded Rectangle 3"/>
+          <p:cNvSpPr/>
+          <p:nvPr/>
+        </p:nvSpPr>
+        <p:spPr>
+          <a:xfrm>
+            <a:off x="457200" y="1371600"/>
+            <a:ext cx="1188720" cy="548640"/>
+          </a:xfrm>
+          <a:prstGeom prst="roundRect">
+            <a:avLst/>
+          </a:prstGeom>
+          <a:solidFill>
+            <a:srgbClr val="16A085"/>
+          </a:solidFill>
+          <a:ln>
+            <a:solidFill>
+              <a:srgbClr val="000000"/>
+            </a:solidFill>
+          </a:ln>
+        </p:spPr>
+        <p:style>
+          <a:lnRef idx="1">
+            <a:schemeClr val="accent1"/>
+          </a:lnRef>
+          <a:fillRef idx="3">
+            <a:schemeClr val="accent1"/>
+          </a:fillRef>
+          <a:effectRef idx="2">
+            <a:schemeClr val="accent1"/>
+          </a:effectRef>
+          <a:fontRef idx="minor">
+            <a:schemeClr val="lt1"/>
+          </a:fontRef>
+        </p:style>
+        <p:txBody>
+          <a:bodyPr rtlCol="0" anchor="ctr"/>
+          <a:lstStyle/>
+          <a:p>
             <a:pPr algn="ctr">
-              <a:defRPr sz="3600" b="1">
-                <a:solidFill>
-                  <a:srgbClr val="2C3E50"/>
+              <a:defRPr sz="1100">
+                <a:solidFill>
+                  <a:srgbClr val="FFFFFF"/>
                 </a:solidFill>
               </a:defRPr>
             </a:pPr>
             <a:r>
-              <a:t>Test Generation Workflow</a:t>
-            </a:r>
-          </a:p>
-        </p:txBody>
-      </p:sp>
-      <p:sp>
-        <p:nvSpPr>
-          <p:cNvPr id="3" name="TextBox 2"/>
-          <p:cNvSpPr txBox="1"/>
+              <a:t>1. Input Description</a:t>
+            </a:r>
+          </a:p>
+        </p:txBody>
+      </p:sp>
+      <p:sp>
+        <p:nvSpPr>
+          <p:cNvPr id="5" name="Rounded Rectangle 4"/>
+          <p:cNvSpPr/>
           <p:nvPr/>
         </p:nvSpPr>
         <p:spPr>
           <a:xfrm>
-            <a:off x="457200" y="1371600"/>
-            <a:ext cx="3657600" cy="3200400"/>
-          </a:xfrm>
-          <a:prstGeom prst="rect">
-            <a:avLst/>
-          </a:prstGeom>
-          <a:noFill/>
-        </p:spPr>
-        <p:txBody>
-          <a:bodyPr wrap="square">
-            <a:spAutoFit/>
-          </a:bodyPr>
-          <a:lstStyle/>
-          <a:p>
-            <a:pPr>
+            <a:off x="1828800" y="1371600"/>
+            <a:ext cx="1188720" cy="548640"/>
+          </a:xfrm>
+          <a:prstGeom prst="roundRect">
+            <a:avLst/>
+          </a:prstGeom>
+          <a:solidFill>
+            <a:srgbClr val="16A085"/>
+          </a:solidFill>
+          <a:ln>
+            <a:solidFill>
+              <a:srgbClr val="000000"/>
+            </a:solidFill>
+          </a:ln>
+        </p:spPr>
+        <p:style>
+          <a:lnRef idx="1">
+            <a:schemeClr val="accent1"/>
+          </a:lnRef>
+          <a:fillRef idx="3">
+            <a:schemeClr val="accent1"/>
+          </a:fillRef>
+          <a:effectRef idx="2">
+            <a:schemeClr val="accent1"/>
+          </a:effectRef>
+          <a:fontRef idx="minor">
+            <a:schemeClr val="lt1"/>
+          </a:fontRef>
+        </p:style>
+        <p:txBody>
+          <a:bodyPr rtlCol="0" anchor="ctr"/>
+          <a:lstStyle/>
+          <a:p>
+            <a:pPr algn="ctr">
+              <a:defRPr sz="1100">
+                <a:solidFill>
+                  <a:srgbClr val="FFFFFF"/>
+                </a:solidFill>
+              </a:defRPr>
+            </a:pPr>
+            <a:r>
+              <a:t>2. Extract Steps</a:t>
+            </a:r>
+          </a:p>
+        </p:txBody>
+      </p:sp>
+      <p:sp>
+        <p:nvSpPr>
+          <p:cNvPr id="6" name="Rounded Rectangle 5"/>
+          <p:cNvSpPr/>
+          <p:nvPr/>
+        </p:nvSpPr>
+        <p:spPr>
+          <a:xfrm>
+            <a:off x="3200400" y="1371600"/>
+            <a:ext cx="1188720" cy="548640"/>
+          </a:xfrm>
+          <a:prstGeom prst="roundRect">
+            <a:avLst/>
+          </a:prstGeom>
+          <a:solidFill>
+            <a:srgbClr val="16A085"/>
+          </a:solidFill>
+          <a:ln>
+            <a:solidFill>
+              <a:srgbClr val="000000"/>
+            </a:solidFill>
+          </a:ln>
+        </p:spPr>
+        <p:style>
+          <a:lnRef idx="1">
+            <a:schemeClr val="accent1"/>
+          </a:lnRef>
+          <a:fillRef idx="3">
+            <a:schemeClr val="accent1"/>
+          </a:fillRef>
+          <a:effectRef idx="2">
+            <a:schemeClr val="accent1"/>
+          </a:effectRef>
+          <a:fontRef idx="minor">
+            <a:schemeClr val="lt1"/>
+          </a:fontRef>
+        </p:style>
+        <p:txBody>
+          <a:bodyPr rtlCol="0" anchor="ctr"/>
+          <a:lstStyle/>
+          <a:p>
+            <a:pPr algn="ctr">
+              <a:defRPr sz="1100">
+                <a:solidFill>
+                  <a:srgbClr val="FFFFFF"/>
+                </a:solidFill>
+              </a:defRPr>
+            </a:pPr>
+            <a:r>
+              <a:t>3. Template Match</a:t>
+            </a:r>
+          </a:p>
+        </p:txBody>
+      </p:sp>
+      <p:sp>
+        <p:nvSpPr>
+          <p:cNvPr id="7" name="Rounded Rectangle 6"/>
+          <p:cNvSpPr/>
+          <p:nvPr/>
+        </p:nvSpPr>
+        <p:spPr>
+          <a:xfrm>
+            <a:off x="4572000" y="2103120"/>
+            <a:ext cx="1188720" cy="548640"/>
+          </a:xfrm>
+          <a:prstGeom prst="roundRect">
+            <a:avLst/>
+          </a:prstGeom>
+          <a:solidFill>
+            <a:srgbClr val="16A085"/>
+          </a:solidFill>
+          <a:ln>
+            <a:solidFill>
+              <a:srgbClr val="000000"/>
+            </a:solidFill>
+          </a:ln>
+        </p:spPr>
+        <p:style>
+          <a:lnRef idx="1">
+            <a:schemeClr val="accent1"/>
+          </a:lnRef>
+          <a:fillRef idx="3">
+            <a:schemeClr val="accent1"/>
+          </a:fillRef>
+          <a:effectRef idx="2">
+            <a:schemeClr val="accent1"/>
+          </a:effectRef>
+          <a:fontRef idx="minor">
+            <a:schemeClr val="lt1"/>
+          </a:fontRef>
+        </p:style>
+        <p:txBody>
+          <a:bodyPr rtlCol="0" anchor="ctr"/>
+          <a:lstStyle/>
+          <a:p>
+            <a:pPr algn="ctr">
+              <a:defRPr sz="1100">
+                <a:solidFill>
+                  <a:srgbClr val="FFFFFF"/>
+                </a:solidFill>
+              </a:defRPr>
+            </a:pPr>
+            <a:r>
+              <a:t>4. Generate Code</a:t>
+            </a:r>
+          </a:p>
+        </p:txBody>
+      </p:sp>
+      <p:sp>
+        <p:nvSpPr>
+          <p:cNvPr id="8" name="Rounded Rectangle 7"/>
+          <p:cNvSpPr/>
+          <p:nvPr/>
+        </p:nvSpPr>
+        <p:spPr>
+          <a:xfrm>
+            <a:off x="5943600" y="2103120"/>
+            <a:ext cx="1188720" cy="548640"/>
+          </a:xfrm>
+          <a:prstGeom prst="roundRect">
+            <a:avLst/>
+          </a:prstGeom>
+          <a:solidFill>
+            <a:srgbClr val="16A085"/>
+          </a:solidFill>
+          <a:ln>
+            <a:solidFill>
+              <a:srgbClr val="000000"/>
+            </a:solidFill>
+          </a:ln>
+        </p:spPr>
+        <p:style>
+          <a:lnRef idx="1">
+            <a:schemeClr val="accent1"/>
+          </a:lnRef>
+          <a:fillRef idx="3">
+            <a:schemeClr val="accent1"/>
+          </a:fillRef>
+          <a:effectRef idx="2">
+            <a:schemeClr val="accent1"/>
+          </a:effectRef>
+          <a:fontRef idx="minor">
+            <a:schemeClr val="lt1"/>
+          </a:fontRef>
+        </p:style>
+        <p:txBody>
+          <a:bodyPr rtlCol="0" anchor="ctr"/>
+          <a:lstStyle/>
+          <a:p>
+            <a:pPr algn="ctr">
+              <a:defRPr sz="1100">
+                <a:solidFill>
+                  <a:srgbClr val="FFFFFF"/>
+                </a:solidFill>
+              </a:defRPr>
+            </a:pPr>
+            <a:r>
+              <a:t>5. Validate</a:t>
+            </a:r>
+          </a:p>
+        </p:txBody>
+      </p:sp>
+      <p:sp>
+        <p:nvSpPr>
+          <p:cNvPr id="9" name="Rounded Rectangle 8"/>
+          <p:cNvSpPr/>
+          <p:nvPr/>
+        </p:nvSpPr>
+        <p:spPr>
+          <a:xfrm>
+            <a:off x="7315200" y="2103120"/>
+            <a:ext cx="1188720" cy="548640"/>
+          </a:xfrm>
+          <a:prstGeom prst="roundRect">
+            <a:avLst/>
+          </a:prstGeom>
+          <a:solidFill>
+            <a:srgbClr val="16A085"/>
+          </a:solidFill>
+          <a:ln>
+            <a:solidFill>
+              <a:srgbClr val="000000"/>
+            </a:solidFill>
+          </a:ln>
+        </p:spPr>
+        <p:style>
+          <a:lnRef idx="1">
+            <a:schemeClr val="accent1"/>
+          </a:lnRef>
+          <a:fillRef idx="3">
+            <a:schemeClr val="accent1"/>
+          </a:fillRef>
+          <a:effectRef idx="2">
+            <a:schemeClr val="accent1"/>
+          </a:effectRef>
+          <a:fontRef idx="minor">
+            <a:schemeClr val="lt1"/>
+          </a:fontRef>
+        </p:style>
+        <p:txBody>
+          <a:bodyPr rtlCol="0" anchor="ctr"/>
+          <a:lstStyle/>
+          <a:p>
+            <a:pPr algn="ctr">
+              <a:defRPr sz="1100">
+                <a:solidFill>
+                  <a:srgbClr val="FFFFFF"/>
+                </a:solidFill>
+              </a:defRPr>
+            </a:pPr>
+            <a:r>
+              <a:t>6. Output Test</a:t>
+            </a:r>
+          </a:p>
+        </p:txBody>
+      </p:sp>
+      <p:sp>
+        <p:nvSpPr>
+          <p:cNvPr id="10" name="Right Arrow 9"/>
+          <p:cNvSpPr/>
+          <p:nvPr/>
+        </p:nvSpPr>
+        <p:spPr>
+          <a:xfrm>
+            <a:off x="1645920" y="1508760"/>
+            <a:ext cx="137160" cy="274320"/>
+          </a:xfrm>
+          <a:prstGeom prst="rightArrow">
+            <a:avLst/>
+          </a:prstGeom>
+          <a:solidFill>
+            <a:srgbClr val="2C3E50"/>
+          </a:solidFill>
+          <a:ln>
+            <a:solidFill>
+              <a:srgbClr val="000000"/>
+            </a:solidFill>
+          </a:ln>
+        </p:spPr>
+        <p:style>
+          <a:lnRef idx="1">
+            <a:schemeClr val="accent1"/>
+          </a:lnRef>
+          <a:fillRef idx="3">
+            <a:schemeClr val="accent1"/>
+          </a:fillRef>
+          <a:effectRef idx="2">
+            <a:schemeClr val="accent1"/>
+          </a:effectRef>
+          <a:fontRef idx="minor">
+            <a:schemeClr val="lt1"/>
+          </a:fontRef>
+        </p:style>
+        <p:txBody>
+          <a:bodyPr rtlCol="0" anchor="ctr"/>
+          <a:lstStyle/>
+          <a:p>
+            <a:pPr algn="ctr">
               <a:defRPr sz="1800">
                 <a:solidFill>
-                  <a:srgbClr val="34495E"/>
+                  <a:srgbClr val="FFFFFF"/>
                 </a:solidFill>
               </a:defRPr>
             </a:pPr>
-            <a:r>
-              <a:t>Steps:</a:t>
-            </a:r>
-          </a:p>
-          <a:p>
-            <a:r>
-              <a:t>1. Input - Test case description</a:t>
-            </a:r>
-          </a:p>
-          <a:p>
-            <a:r>
-              <a:t>2. Analysis - Extract steps and parameters</a:t>
-            </a:r>
-          </a:p>
-          <a:p>
-            <a:r>
-              <a:t>3. Template Matching - Map to code templates</a:t>
-            </a:r>
-          </a:p>
-          <a:p>
-            <a:r>
-              <a:t>4. Code Generation - Create Python test</a:t>
-            </a:r>
-          </a:p>
-          <a:p>
-            <a:r>
-              <a:t>5. Validation - Syntax and structure checks</a:t>
-            </a:r>
-          </a:p>
-          <a:p>
-            <a:r>
-              <a:t>6. Output - Ready-to-execute test file</a:t>
-            </a:r>
-          </a:p>
-        </p:txBody>
-      </p:sp>
-      <p:sp>
-        <p:nvSpPr>
-          <p:cNvPr id="4" name="TextBox 3"/>
-          <p:cNvSpPr txBox="1"/>
+          </a:p>
+        </p:txBody>
+      </p:sp>
+      <p:sp>
+        <p:nvSpPr>
+          <p:cNvPr id="11" name="Right Arrow 10"/>
+          <p:cNvSpPr/>
           <p:nvPr/>
         </p:nvSpPr>
         <p:spPr>
           <a:xfrm>
-            <a:off x="4114800" y="1371600"/>
-            <a:ext cx="4572000" cy="3200400"/>
-          </a:xfrm>
-          <a:prstGeom prst="rect">
-            <a:avLst/>
-          </a:prstGeom>
-          <a:noFill/>
-        </p:spPr>
-        <p:txBody>
-          <a:bodyPr wrap="none">
-            <a:spAutoFit/>
-          </a:bodyPr>
+            <a:off x="3017520" y="1508760"/>
+            <a:ext cx="137160" cy="274320"/>
+          </a:xfrm>
+          <a:prstGeom prst="rightArrow">
+            <a:avLst/>
+          </a:prstGeom>
+          <a:solidFill>
+            <a:srgbClr val="2C3E50"/>
+          </a:solidFill>
+          <a:ln>
+            <a:solidFill>
+              <a:srgbClr val="000000"/>
+            </a:solidFill>
+          </a:ln>
+        </p:spPr>
+        <p:style>
+          <a:lnRef idx="1">
+            <a:schemeClr val="accent1"/>
+          </a:lnRef>
+          <a:fillRef idx="3">
+            <a:schemeClr val="accent1"/>
+          </a:fillRef>
+          <a:effectRef idx="2">
+            <a:schemeClr val="accent1"/>
+          </a:effectRef>
+          <a:fontRef idx="minor">
+            <a:schemeClr val="lt1"/>
+          </a:fontRef>
+        </p:style>
+        <p:txBody>
+          <a:bodyPr rtlCol="0" anchor="ctr"/>
+          <a:lstStyle/>
+          <a:p>
+            <a:pPr algn="ctr">
+              <a:defRPr sz="1800">
+                <a:solidFill>
+                  <a:srgbClr val="FFFFFF"/>
+                </a:solidFill>
+              </a:defRPr>
+            </a:pPr>
+          </a:p>
+        </p:txBody>
+      </p:sp>
+      <p:sp>
+        <p:nvSpPr>
+          <p:cNvPr id="12" name="Right Arrow 11"/>
+          <p:cNvSpPr/>
+          <p:nvPr/>
+        </p:nvSpPr>
+        <p:spPr>
+          <a:xfrm>
+            <a:off x="4389120" y="1508760"/>
+            <a:ext cx="137160" cy="274320"/>
+          </a:xfrm>
+          <a:prstGeom prst="rightArrow">
+            <a:avLst/>
+          </a:prstGeom>
+          <a:solidFill>
+            <a:srgbClr val="2C3E50"/>
+          </a:solidFill>
+          <a:ln>
+            <a:solidFill>
+              <a:srgbClr val="000000"/>
+            </a:solidFill>
+          </a:ln>
+        </p:spPr>
+        <p:style>
+          <a:lnRef idx="1">
+            <a:schemeClr val="accent1"/>
+          </a:lnRef>
+          <a:fillRef idx="3">
+            <a:schemeClr val="accent1"/>
+          </a:fillRef>
+          <a:effectRef idx="2">
+            <a:schemeClr val="accent1"/>
+          </a:effectRef>
+          <a:fontRef idx="minor">
+            <a:schemeClr val="lt1"/>
+          </a:fontRef>
+        </p:style>
+        <p:txBody>
+          <a:bodyPr rtlCol="0" anchor="ctr"/>
+          <a:lstStyle/>
+          <a:p>
+            <a:pPr algn="ctr">
+              <a:defRPr sz="1800">
+                <a:solidFill>
+                  <a:srgbClr val="FFFFFF"/>
+                </a:solidFill>
+              </a:defRPr>
+            </a:pPr>
+          </a:p>
+        </p:txBody>
+      </p:sp>
+      <p:sp>
+        <p:nvSpPr>
+          <p:cNvPr id="13" name="Right Arrow 12"/>
+          <p:cNvSpPr/>
+          <p:nvPr/>
+        </p:nvSpPr>
+        <p:spPr>
+          <a:xfrm>
+            <a:off x="5760720" y="1508760"/>
+            <a:ext cx="137160" cy="274320"/>
+          </a:xfrm>
+          <a:prstGeom prst="rightArrow">
+            <a:avLst/>
+          </a:prstGeom>
+          <a:solidFill>
+            <a:srgbClr val="2C3E50"/>
+          </a:solidFill>
+          <a:ln>
+            <a:solidFill>
+              <a:srgbClr val="000000"/>
+            </a:solidFill>
+          </a:ln>
+        </p:spPr>
+        <p:style>
+          <a:lnRef idx="1">
+            <a:schemeClr val="accent1"/>
+          </a:lnRef>
+          <a:fillRef idx="3">
+            <a:schemeClr val="accent1"/>
+          </a:fillRef>
+          <a:effectRef idx="2">
+            <a:schemeClr val="accent1"/>
+          </a:effectRef>
+          <a:fontRef idx="minor">
+            <a:schemeClr val="lt1"/>
+          </a:fontRef>
+        </p:style>
+        <p:txBody>
+          <a:bodyPr rtlCol="0" anchor="ctr"/>
+          <a:lstStyle/>
+          <a:p>
+            <a:pPr algn="ctr">
+              <a:defRPr sz="1800">
+                <a:solidFill>
+                  <a:srgbClr val="FFFFFF"/>
+                </a:solidFill>
+              </a:defRPr>
+            </a:pPr>
+          </a:p>
+        </p:txBody>
+      </p:sp>
+      <p:sp>
+        <p:nvSpPr>
+          <p:cNvPr id="14" name="Right Arrow 13"/>
+          <p:cNvSpPr/>
+          <p:nvPr/>
+        </p:nvSpPr>
+        <p:spPr>
+          <a:xfrm>
+            <a:off x="7132320" y="1508760"/>
+            <a:ext cx="137160" cy="274320"/>
+          </a:xfrm>
+          <a:prstGeom prst="rightArrow">
+            <a:avLst/>
+          </a:prstGeom>
+          <a:solidFill>
+            <a:srgbClr val="2C3E50"/>
+          </a:solidFill>
+          <a:ln>
+            <a:solidFill>
+              <a:srgbClr val="000000"/>
+            </a:solidFill>
+          </a:ln>
+        </p:spPr>
+        <p:style>
+          <a:lnRef idx="1">
+            <a:schemeClr val="accent1"/>
+          </a:lnRef>
+          <a:fillRef idx="3">
+            <a:schemeClr val="accent1"/>
+          </a:fillRef>
+          <a:effectRef idx="2">
+            <a:schemeClr val="accent1"/>
+          </a:effectRef>
+          <a:fontRef idx="minor">
+            <a:schemeClr val="lt1"/>
+          </a:fontRef>
+        </p:style>
+        <p:txBody>
+          <a:bodyPr rtlCol="0" anchor="ctr"/>
+          <a:lstStyle/>
+          <a:p>
+            <a:pPr algn="ctr">
+              <a:defRPr sz="1800">
+                <a:solidFill>
+                  <a:srgbClr val="FFFFFF"/>
+                </a:solidFill>
+              </a:defRPr>
+            </a:pPr>
+          </a:p>
+        </p:txBody>
+      </p:sp>
+      <p:sp>
+        <p:nvSpPr>
+          <p:cNvPr id="15" name="Rounded Rectangle 14"/>
+          <p:cNvSpPr/>
+          <p:nvPr/>
+        </p:nvSpPr>
+        <p:spPr>
+          <a:xfrm>
+            <a:off x="457200" y="2926080"/>
+            <a:ext cx="8229600" cy="3291840"/>
+          </a:xfrm>
+          <a:prstGeom prst="roundRect">
+            <a:avLst/>
+          </a:prstGeom>
+          <a:solidFill>
+            <a:srgbClr val="F0F0F0"/>
+          </a:solidFill>
+          <a:ln w="25400">
+            <a:solidFill>
+              <a:srgbClr val="646464"/>
+            </a:solidFill>
+          </a:ln>
+        </p:spPr>
+        <p:style>
+          <a:lnRef idx="1">
+            <a:schemeClr val="accent1"/>
+          </a:lnRef>
+          <a:fillRef idx="3">
+            <a:schemeClr val="accent1"/>
+          </a:fillRef>
+          <a:effectRef idx="2">
+            <a:schemeClr val="accent1"/>
+          </a:effectRef>
+          <a:fontRef idx="minor">
+            <a:schemeClr val="lt1"/>
+          </a:fontRef>
+        </p:style>
+        <p:txBody>
+          <a:bodyPr rtlCol="0" anchor="ctr"/>
           <a:lstStyle/>
           <a:p>
             <a:pPr algn="ctr">
               <a:defRPr sz="1400" i="1">
                 <a:solidFill>
-                  <a:srgbClr val="969696"/>
+                  <a:srgbClr val="505050"/>
                 </a:solidFill>
               </a:defRPr>
             </a:pPr>
             <a:r>
               <a:t>[INSERT: Test Generation Process Flow Diagram]</a:t>
+            </a:r>
+          </a:p>
+          <a:p>
+            <a:r>
+              <a:t>(Show input → processing → output pipeline)</a:t>
             </a:r>
           </a:p>
         </p:txBody>
@@ -7960,14 +11434,65 @@
       <p:grpSpPr/>
       <p:sp>
         <p:nvSpPr>
-          <p:cNvPr id="2" name="TextBox 1"/>
+          <p:cNvPr id="2" name="Rectangle 1"/>
+          <p:cNvSpPr/>
+          <p:nvPr/>
+        </p:nvSpPr>
+        <p:spPr>
+          <a:xfrm>
+            <a:off x="0" y="0"/>
+            <a:ext cx="9144000" cy="914400"/>
+          </a:xfrm>
+          <a:prstGeom prst="rect">
+            <a:avLst/>
+          </a:prstGeom>
+          <a:solidFill>
+            <a:srgbClr val="2C3E50"/>
+          </a:solidFill>
+          <a:ln>
+            <a:solidFill>
+              <a:srgbClr val="000000"/>
+            </a:solidFill>
+          </a:ln>
+        </p:spPr>
+        <p:style>
+          <a:lnRef idx="1">
+            <a:schemeClr val="accent1"/>
+          </a:lnRef>
+          <a:fillRef idx="3">
+            <a:schemeClr val="accent1"/>
+          </a:fillRef>
+          <a:effectRef idx="2">
+            <a:schemeClr val="accent1"/>
+          </a:effectRef>
+          <a:fontRef idx="minor">
+            <a:schemeClr val="lt1"/>
+          </a:fontRef>
+        </p:style>
+        <p:txBody>
+          <a:bodyPr rtlCol="0" anchor="ctr"/>
+          <a:lstStyle/>
+          <a:p>
+            <a:pPr algn="ctr">
+              <a:defRPr sz="1600">
+                <a:solidFill>
+                  <a:srgbClr val="FFFFFF"/>
+                </a:solidFill>
+              </a:defRPr>
+            </a:pPr>
+          </a:p>
+        </p:txBody>
+      </p:sp>
+      <p:sp>
+        <p:nvSpPr>
+          <p:cNvPr id="3" name="TextBox 2"/>
           <p:cNvSpPr txBox="1"/>
           <p:nvPr/>
         </p:nvSpPr>
         <p:spPr>
           <a:xfrm>
-            <a:off x="457200" y="457200"/>
-            <a:ext cx="8229600" cy="731520"/>
+            <a:off x="457200" y="182880"/>
+            <a:ext cx="8229600" cy="548640"/>
           </a:xfrm>
           <a:prstGeom prst="rect">
             <a:avLst/>
@@ -7980,10 +11505,10 @@
           </a:bodyPr>
           <a:lstStyle/>
           <a:p>
-            <a:pPr algn="ctr">
-              <a:defRPr sz="3600" b="1">
-                <a:solidFill>
-                  <a:srgbClr val="2C3E50"/>
+            <a:pPr>
+              <a:defRPr sz="3200" b="1">
+                <a:solidFill>
+                  <a:srgbClr val="FFFFFF"/>
                 </a:solidFill>
               </a:defRPr>
             </a:pPr>
@@ -7995,14 +11520,14 @@
       </p:sp>
       <p:sp>
         <p:nvSpPr>
-          <p:cNvPr id="3" name="TextBox 2"/>
+          <p:cNvPr id="4" name="TextBox 3"/>
           <p:cNvSpPr txBox="1"/>
           <p:nvPr/>
         </p:nvSpPr>
         <p:spPr>
           <a:xfrm>
-            <a:off x="457200" y="1097280"/>
-            <a:ext cx="8229600" cy="457200"/>
+            <a:off x="457200" y="1005840"/>
+            <a:ext cx="8229600" cy="274320"/>
           </a:xfrm>
           <a:prstGeom prst="rect">
             <a:avLst/>
@@ -8015,160 +11540,374 @@
           </a:bodyPr>
           <a:lstStyle/>
           <a:p>
+            <a:pPr>
+              <a:defRPr sz="2000">
+                <a:solidFill>
+                  <a:srgbClr val="16A085"/>
+                </a:solidFill>
+              </a:defRPr>
+            </a:pPr>
+            <a:r>
+              <a:t>Memory, AI/ML, and RAG Usage</a:t>
+            </a:r>
+          </a:p>
+        </p:txBody>
+      </p:sp>
+      <p:sp>
+        <p:nvSpPr>
+          <p:cNvPr id="5" name="Rectangle 4"/>
+          <p:cNvSpPr/>
+          <p:nvPr/>
+        </p:nvSpPr>
+        <p:spPr>
+          <a:xfrm>
+            <a:off x="457200" y="1371600"/>
+            <a:ext cx="3657600" cy="457200"/>
+          </a:xfrm>
+          <a:prstGeom prst="rect">
+            <a:avLst/>
+          </a:prstGeom>
+          <a:solidFill>
+            <a:srgbClr val="16A085"/>
+          </a:solidFill>
+          <a:ln>
+            <a:solidFill>
+              <a:srgbClr val="000000"/>
+            </a:solidFill>
+          </a:ln>
+        </p:spPr>
+        <p:style>
+          <a:lnRef idx="1">
+            <a:schemeClr val="accent1"/>
+          </a:lnRef>
+          <a:fillRef idx="3">
+            <a:schemeClr val="accent1"/>
+          </a:fillRef>
+          <a:effectRef idx="2">
+            <a:schemeClr val="accent1"/>
+          </a:effectRef>
+          <a:fontRef idx="minor">
+            <a:schemeClr val="lt1"/>
+          </a:fontRef>
+        </p:style>
+        <p:txBody>
+          <a:bodyPr rtlCol="0" anchor="ctr"/>
+          <a:lstStyle/>
+          <a:p>
             <a:pPr algn="ctr">
-              <a:defRPr sz="2400">
-                <a:solidFill>
-                  <a:srgbClr val="16A085"/>
+              <a:defRPr sz="1600">
+                <a:solidFill>
+                  <a:srgbClr val="FFFFFF"/>
                 </a:solidFill>
               </a:defRPr>
             </a:pPr>
             <a:r>
-              <a:t>Memory, AI/ML, and RAG Usage</a:t>
-            </a:r>
-          </a:p>
-        </p:txBody>
-      </p:sp>
-      <p:sp>
-        <p:nvSpPr>
-          <p:cNvPr id="4" name="TextBox 3"/>
-          <p:cNvSpPr txBox="1"/>
+              <a:t>Memory Usage: 50-100MB</a:t>
+            </a:r>
+          </a:p>
+        </p:txBody>
+      </p:sp>
+      <p:sp>
+        <p:nvSpPr>
+          <p:cNvPr id="6" name="Rectangle 5"/>
+          <p:cNvSpPr/>
           <p:nvPr/>
         </p:nvSpPr>
         <p:spPr>
           <a:xfrm>
-            <a:off x="457200" y="1828800"/>
-            <a:ext cx="4114800" cy="2286000"/>
+            <a:off x="457200" y="1920240"/>
+            <a:ext cx="2286000" cy="274320"/>
           </a:xfrm>
           <a:prstGeom prst="rect">
             <a:avLst/>
           </a:prstGeom>
-          <a:noFill/>
-        </p:spPr>
-        <p:txBody>
-          <a:bodyPr wrap="square">
-            <a:spAutoFit/>
-          </a:bodyPr>
-          <a:lstStyle/>
-          <a:p>
-            <a:pPr>
-              <a:defRPr sz="1800">
+          <a:solidFill>
+            <a:srgbClr val="ECF0F1"/>
+          </a:solidFill>
+          <a:ln>
+            <a:solidFill>
+              <a:srgbClr val="000000"/>
+            </a:solidFill>
+          </a:ln>
+        </p:spPr>
+        <p:style>
+          <a:lnRef idx="1">
+            <a:schemeClr val="accent1"/>
+          </a:lnRef>
+          <a:fillRef idx="3">
+            <a:schemeClr val="accent1"/>
+          </a:fillRef>
+          <a:effectRef idx="2">
+            <a:schemeClr val="accent1"/>
+          </a:effectRef>
+          <a:fontRef idx="minor">
+            <a:schemeClr val="lt1"/>
+          </a:fontRef>
+        </p:style>
+        <p:txBody>
+          <a:bodyPr rtlCol="0" anchor="ctr"/>
+          <a:lstStyle/>
+          <a:p>
+            <a:pPr algn="ctr">
+              <a:defRPr sz="1600">
                 <a:solidFill>
                   <a:srgbClr val="34495E"/>
                 </a:solidFill>
               </a:defRPr>
             </a:pPr>
             <a:r>
-              <a:t>Current Implementation:</a:t>
-            </a:r>
-          </a:p>
-          <a:p>
-            <a:r>
-              <a:t>• Memory Usage: ~50-100MB</a:t>
-            </a:r>
-          </a:p>
-          <a:p>
-            <a:r>
-              <a:t>• AI/ML: Template-based generation (no LLM)</a:t>
-            </a:r>
-          </a:p>
-          <a:p>
-            <a:r>
-              <a:t>• Pattern Matching: Rule-based creation</a:t>
-            </a:r>
-          </a:p>
-          <a:p>
-            <a:r>
-              <a:t>• RAG System: Temporarily disabled (memory)</a:t>
-            </a:r>
-          </a:p>
-        </p:txBody>
-      </p:sp>
-      <p:sp>
-        <p:nvSpPr>
-          <p:cNvPr id="5" name="TextBox 4"/>
-          <p:cNvSpPr txBox="1"/>
+              <a:t>Used: 75MB</a:t>
+            </a:r>
+          </a:p>
+        </p:txBody>
+      </p:sp>
+      <p:sp>
+        <p:nvSpPr>
+          <p:cNvPr id="7" name="Rectangle 6"/>
+          <p:cNvSpPr/>
           <p:nvPr/>
         </p:nvSpPr>
         <p:spPr>
           <a:xfrm>
-            <a:off x="4572000" y="1828800"/>
-            <a:ext cx="4114800" cy="2286000"/>
+            <a:off x="457200" y="2377440"/>
+            <a:ext cx="4114800" cy="1371600"/>
           </a:xfrm>
           <a:prstGeom prst="rect">
             <a:avLst/>
           </a:prstGeom>
-          <a:noFill/>
-        </p:spPr>
-        <p:txBody>
-          <a:bodyPr wrap="square">
-            <a:spAutoFit/>
-          </a:bodyPr>
-          <a:lstStyle/>
-          <a:p>
-            <a:pPr>
-              <a:defRPr sz="1800">
-                <a:solidFill>
-                  <a:srgbClr val="16A085"/>
+          <a:solidFill>
+            <a:srgbClr val="ECF0F1"/>
+          </a:solidFill>
+          <a:ln>
+            <a:solidFill>
+              <a:srgbClr val="000000"/>
+            </a:solidFill>
+          </a:ln>
+        </p:spPr>
+        <p:style>
+          <a:lnRef idx="1">
+            <a:schemeClr val="accent1"/>
+          </a:lnRef>
+          <a:fillRef idx="3">
+            <a:schemeClr val="accent1"/>
+          </a:fillRef>
+          <a:effectRef idx="2">
+            <a:schemeClr val="accent1"/>
+          </a:effectRef>
+          <a:fontRef idx="minor">
+            <a:schemeClr val="lt1"/>
+          </a:fontRef>
+        </p:style>
+        <p:txBody>
+          <a:bodyPr rtlCol="0" anchor="ctr"/>
+          <a:lstStyle/>
+          <a:p>
+            <a:pPr algn="ctr">
+              <a:defRPr sz="1600">
+                <a:solidFill>
+                  <a:srgbClr val="34495E"/>
                 </a:solidFill>
               </a:defRPr>
             </a:pPr>
             <a:r>
-              <a:t>Technology Stack:</a:t>
-            </a:r>
-          </a:p>
-          <a:p>
-            <a:r>
-              <a:t>• Python 3.8+</a:t>
-            </a:r>
-          </a:p>
-          <a:p>
-            <a:r>
-              <a:t>• Pytest (testing framework)</a:t>
-            </a:r>
-          </a:p>
-          <a:p>
-            <a:r>
-              <a:t>• Flask (web interface)</a:t>
-            </a:r>
-          </a:p>
-          <a:p>
-            <a:r>
-              <a:t>• Mock APIs (OME simulation)</a:t>
-            </a:r>
-          </a:p>
-        </p:txBody>
-      </p:sp>
-      <p:sp>
-        <p:nvSpPr>
-          <p:cNvPr id="6" name="TextBox 5"/>
-          <p:cNvSpPr txBox="1"/>
+              <a:t>AI/ML Components:</a:t>
+            </a:r>
+          </a:p>
+          <a:p>
+            <a:r>
+              <a:t>• Template-based generation (no LLM)</a:t>
+            </a:r>
+          </a:p>
+          <a:p>
+            <a:r>
+              <a:t>• Pattern matching</a:t>
+            </a:r>
+          </a:p>
+          <a:p>
+            <a:r>
+              <a:t>• Rule-based creation</a:t>
+            </a:r>
+          </a:p>
+        </p:txBody>
+      </p:sp>
+      <p:sp>
+        <p:nvSpPr>
+          <p:cNvPr id="8" name="Rectangle 7"/>
+          <p:cNvSpPr/>
           <p:nvPr/>
         </p:nvSpPr>
         <p:spPr>
           <a:xfrm>
-            <a:off x="457200" y="4206240"/>
-            <a:ext cx="8229600" cy="2194560"/>
+            <a:off x="4572000" y="2377440"/>
+            <a:ext cx="4114800" cy="1371600"/>
           </a:xfrm>
           <a:prstGeom prst="rect">
             <a:avLst/>
           </a:prstGeom>
-          <a:noFill/>
-        </p:spPr>
-        <p:txBody>
-          <a:bodyPr wrap="none">
-            <a:spAutoFit/>
-          </a:bodyPr>
+          <a:solidFill>
+            <a:srgbClr val="FFE6E6"/>
+          </a:solidFill>
+          <a:ln>
+            <a:solidFill>
+              <a:srgbClr val="000000"/>
+            </a:solidFill>
+          </a:ln>
+        </p:spPr>
+        <p:style>
+          <a:lnRef idx="1">
+            <a:schemeClr val="accent1"/>
+          </a:lnRef>
+          <a:fillRef idx="3">
+            <a:schemeClr val="accent1"/>
+          </a:fillRef>
+          <a:effectRef idx="2">
+            <a:schemeClr val="accent1"/>
+          </a:effectRef>
+          <a:fontRef idx="minor">
+            <a:schemeClr val="lt1"/>
+          </a:fontRef>
+        </p:style>
+        <p:txBody>
+          <a:bodyPr rtlCol="0" anchor="ctr"/>
+          <a:lstStyle/>
+          <a:p>
+            <a:pPr algn="ctr">
+              <a:defRPr sz="1600">
+                <a:solidFill>
+                  <a:srgbClr val="C0392B"/>
+                </a:solidFill>
+              </a:defRPr>
+            </a:pPr>
+            <a:r>
+              <a:t>RAG System:</a:t>
+            </a:r>
+          </a:p>
+          <a:p>
+            <a:r>
+              <a:t>• Temporarily disabled</a:t>
+            </a:r>
+          </a:p>
+          <a:p>
+            <a:r>
+              <a:t>• Memory constraints</a:t>
+            </a:r>
+          </a:p>
+          <a:p>
+            <a:r>
+              <a:t>• Planned for final demo</a:t>
+            </a:r>
+          </a:p>
+        </p:txBody>
+      </p:sp>
+      <p:sp>
+        <p:nvSpPr>
+          <p:cNvPr id="9" name="Rectangle 8"/>
+          <p:cNvSpPr/>
+          <p:nvPr/>
+        </p:nvSpPr>
+        <p:spPr>
+          <a:xfrm>
+            <a:off x="457200" y="3931920"/>
+            <a:ext cx="8229600" cy="914400"/>
+          </a:xfrm>
+          <a:prstGeom prst="rect">
+            <a:avLst/>
+          </a:prstGeom>
+          <a:solidFill>
+            <a:srgbClr val="ECF0F1"/>
+          </a:solidFill>
+          <a:ln>
+            <a:solidFill>
+              <a:srgbClr val="000000"/>
+            </a:solidFill>
+          </a:ln>
+        </p:spPr>
+        <p:style>
+          <a:lnRef idx="1">
+            <a:schemeClr val="accent1"/>
+          </a:lnRef>
+          <a:fillRef idx="3">
+            <a:schemeClr val="accent1"/>
+          </a:fillRef>
+          <a:effectRef idx="2">
+            <a:schemeClr val="accent1"/>
+          </a:effectRef>
+          <a:fontRef idx="minor">
+            <a:schemeClr val="lt1"/>
+          </a:fontRef>
+        </p:style>
+        <p:txBody>
+          <a:bodyPr rtlCol="0" anchor="ctr"/>
+          <a:lstStyle/>
+          <a:p>
+            <a:pPr algn="ctr">
+              <a:defRPr sz="1600">
+                <a:solidFill>
+                  <a:srgbClr val="34495E"/>
+                </a:solidFill>
+              </a:defRPr>
+            </a:pPr>
+            <a:r>
+              <a:t>Technology Stack: Python 3.8+ • Pytest • Flask • Mock APIs</a:t>
+            </a:r>
+          </a:p>
+        </p:txBody>
+      </p:sp>
+      <p:sp>
+        <p:nvSpPr>
+          <p:cNvPr id="10" name="Rounded Rectangle 9"/>
+          <p:cNvSpPr/>
+          <p:nvPr/>
+        </p:nvSpPr>
+        <p:spPr>
+          <a:xfrm>
+            <a:off x="457200" y="5029200"/>
+            <a:ext cx="8229600" cy="1371600"/>
+          </a:xfrm>
+          <a:prstGeom prst="roundRect">
+            <a:avLst/>
+          </a:prstGeom>
+          <a:solidFill>
+            <a:srgbClr val="F0F0F0"/>
+          </a:solidFill>
+          <a:ln w="25400">
+            <a:solidFill>
+              <a:srgbClr val="646464"/>
+            </a:solidFill>
+          </a:ln>
+        </p:spPr>
+        <p:style>
+          <a:lnRef idx="1">
+            <a:schemeClr val="accent1"/>
+          </a:lnRef>
+          <a:fillRef idx="3">
+            <a:schemeClr val="accent1"/>
+          </a:fillRef>
+          <a:effectRef idx="2">
+            <a:schemeClr val="accent1"/>
+          </a:effectRef>
+          <a:fontRef idx="minor">
+            <a:schemeClr val="lt1"/>
+          </a:fontRef>
+        </p:style>
+        <p:txBody>
+          <a:bodyPr rtlCol="0" anchor="ctr"/>
           <a:lstStyle/>
           <a:p>
             <a:pPr algn="ctr">
               <a:defRPr sz="1400" i="1">
                 <a:solidFill>
-                  <a:srgbClr val="969696"/>
+                  <a:srgbClr val="505050"/>
                 </a:solidFill>
               </a:defRPr>
             </a:pPr>
             <a:r>
               <a:t>[INSERT: Resource Utilization Chart]</a:t>
+            </a:r>
+          </a:p>
+          <a:p>
+            <a:r>
+              <a:t>(Show memory breakdown by component)</a:t>
             </a:r>
           </a:p>
         </p:txBody>
